--- a/Presentazione_progetto_TI.pptx
+++ b/Presentazione_progetto_TI.pptx
@@ -1,44 +1,44 @@
 
 <file path=ppt/presentation.xml><?xml version="1.0" encoding="utf-8"?>
-<p:presentation xmlns:a="http://schemas.openxmlformats.org/drawingml/2006/main" xmlns:r="http://schemas.openxmlformats.org/officeDocument/2006/relationships" xmlns:mc="http://schemas.openxmlformats.org/markup-compatibility/2006" xmlns:mv="urn:schemas-microsoft-com:mac:vml" xmlns:p="http://schemas.openxmlformats.org/presentationml/2006/main" xmlns:c="http://schemas.openxmlformats.org/drawingml/2006/chart" xmlns:dgm="http://schemas.openxmlformats.org/drawingml/2006/diagram" xmlns:o="urn:schemas-microsoft-com:office:office" xmlns:v="urn:schemas-microsoft-com:vml" xmlns:pvml="urn:schemas-microsoft-com:office:powerpoint" xmlns:com="http://schemas.openxmlformats.org/drawingml/2006/compatibility" xmlns:p14="http://schemas.microsoft.com/office/powerpoint/2010/main" xmlns:p15="http://schemas.microsoft.com/office/powerpoint/2012/main" xmlns:ahyp="http://schemas.microsoft.com/office/drawing/2018/hyperlinkcolor" autoCompressPictures="0" embedTrueTypeFonts="1" strictFirstAndLastChars="0" saveSubsetFonts="1">
+<p:presentation xmlns:a="http://schemas.openxmlformats.org/drawingml/2006/main" xmlns:r="http://schemas.openxmlformats.org/officeDocument/2006/relationships" xmlns:p="http://schemas.openxmlformats.org/presentationml/2006/main" strictFirstAndLastChars="0" embedTrueTypeFonts="1" saveSubsetFonts="1" autoCompressPictures="0">
   <p:sldMasterIdLst>
-    <p:sldMasterId id="2147483659" r:id="rId4"/>
+    <p:sldMasterId id="2147483659" r:id="rId1"/>
   </p:sldMasterIdLst>
   <p:notesMasterIdLst>
-    <p:notesMasterId r:id="rId5"/>
+    <p:notesMasterId r:id="rId12"/>
   </p:notesMasterIdLst>
   <p:sldIdLst>
-    <p:sldId id="256" r:id="rId6"/>
-    <p:sldId id="257" r:id="rId7"/>
-    <p:sldId id="258" r:id="rId8"/>
-    <p:sldId id="259" r:id="rId9"/>
-    <p:sldId id="260" r:id="rId10"/>
-    <p:sldId id="261" r:id="rId11"/>
-    <p:sldId id="262" r:id="rId12"/>
-    <p:sldId id="263" r:id="rId13"/>
-    <p:sldId id="264" r:id="rId14"/>
-    <p:sldId id="265" r:id="rId15"/>
+    <p:sldId id="256" r:id="rId2"/>
+    <p:sldId id="257" r:id="rId3"/>
+    <p:sldId id="258" r:id="rId4"/>
+    <p:sldId id="259" r:id="rId5"/>
+    <p:sldId id="260" r:id="rId6"/>
+    <p:sldId id="261" r:id="rId7"/>
+    <p:sldId id="262" r:id="rId8"/>
+    <p:sldId id="263" r:id="rId9"/>
+    <p:sldId id="264" r:id="rId10"/>
+    <p:sldId id="265" r:id="rId11"/>
   </p:sldIdLst>
-  <p:sldSz cy="5143500" cx="9144000"/>
+  <p:sldSz cx="9144000" cy="5143500" type="screen16x9"/>
   <p:notesSz cx="6858000" cy="9144000"/>
   <p:embeddedFontLst>
     <p:embeddedFont>
-      <p:font typeface="Raleway"/>
-      <p:regular r:id="rId16"/>
-      <p:bold r:id="rId17"/>
-      <p:italic r:id="rId18"/>
-      <p:boldItalic r:id="rId19"/>
+      <p:font typeface="Lato" panose="020F0502020204030203" pitchFamily="34" charset="0"/>
+      <p:regular r:id="rId13"/>
+      <p:bold r:id="rId14"/>
+      <p:italic r:id="rId15"/>
+      <p:boldItalic r:id="rId16"/>
     </p:embeddedFont>
     <p:embeddedFont>
-      <p:font typeface="Lato"/>
-      <p:regular r:id="rId20"/>
-      <p:bold r:id="rId21"/>
-      <p:italic r:id="rId22"/>
-      <p:boldItalic r:id="rId23"/>
+      <p:font typeface="Raleway" pitchFamily="2" charset="77"/>
+      <p:regular r:id="rId17"/>
+      <p:bold r:id="rId18"/>
+      <p:italic r:id="rId19"/>
+      <p:boldItalic r:id="rId20"/>
     </p:embeddedFont>
   </p:embeddedFontLst>
   <p:defaultTextStyle>
-    <a:defPPr lvl="0" marR="0" rtl="0" algn="l">
+    <a:defPPr marR="0" lvl="0" algn="l" rtl="0">
       <a:lnSpc>
         <a:spcPct val="100000"/>
       </a:lnSpc>
@@ -49,7 +49,7 @@
         <a:spcPts val="0"/>
       </a:spcAft>
     </a:defPPr>
-    <a:lvl1pPr lvl="0" marR="0" rtl="0" algn="l">
+    <a:lvl1pPr marR="0" lvl="0" algn="l" rtl="0">
       <a:lnSpc>
         <a:spcPct val="100000"/>
       </a:lnSpc>
@@ -63,7 +63,7 @@
         <a:srgbClr val="000000"/>
       </a:buClr>
       <a:buFont typeface="Arial"/>
-      <a:defRPr b="0" i="0" sz="1400" u="none" cap="none" strike="noStrike">
+      <a:defRPr sz="1400" b="0" i="0" u="none" strike="noStrike" cap="none">
         <a:solidFill>
           <a:srgbClr val="000000"/>
         </a:solidFill>
@@ -73,7 +73,7 @@
         <a:sym typeface="Arial"/>
       </a:defRPr>
     </a:lvl1pPr>
-    <a:lvl2pPr lvl="1" marR="0" rtl="0" algn="l">
+    <a:lvl2pPr marR="0" lvl="1" algn="l" rtl="0">
       <a:lnSpc>
         <a:spcPct val="100000"/>
       </a:lnSpc>
@@ -87,7 +87,7 @@
         <a:srgbClr val="000000"/>
       </a:buClr>
       <a:buFont typeface="Arial"/>
-      <a:defRPr b="0" i="0" sz="1400" u="none" cap="none" strike="noStrike">
+      <a:defRPr sz="1400" b="0" i="0" u="none" strike="noStrike" cap="none">
         <a:solidFill>
           <a:srgbClr val="000000"/>
         </a:solidFill>
@@ -97,7 +97,7 @@
         <a:sym typeface="Arial"/>
       </a:defRPr>
     </a:lvl2pPr>
-    <a:lvl3pPr lvl="2" marR="0" rtl="0" algn="l">
+    <a:lvl3pPr marR="0" lvl="2" algn="l" rtl="0">
       <a:lnSpc>
         <a:spcPct val="100000"/>
       </a:lnSpc>
@@ -111,7 +111,7 @@
         <a:srgbClr val="000000"/>
       </a:buClr>
       <a:buFont typeface="Arial"/>
-      <a:defRPr b="0" i="0" sz="1400" u="none" cap="none" strike="noStrike">
+      <a:defRPr sz="1400" b="0" i="0" u="none" strike="noStrike" cap="none">
         <a:solidFill>
           <a:srgbClr val="000000"/>
         </a:solidFill>
@@ -121,7 +121,7 @@
         <a:sym typeface="Arial"/>
       </a:defRPr>
     </a:lvl3pPr>
-    <a:lvl4pPr lvl="3" marR="0" rtl="0" algn="l">
+    <a:lvl4pPr marR="0" lvl="3" algn="l" rtl="0">
       <a:lnSpc>
         <a:spcPct val="100000"/>
       </a:lnSpc>
@@ -135,7 +135,7 @@
         <a:srgbClr val="000000"/>
       </a:buClr>
       <a:buFont typeface="Arial"/>
-      <a:defRPr b="0" i="0" sz="1400" u="none" cap="none" strike="noStrike">
+      <a:defRPr sz="1400" b="0" i="0" u="none" strike="noStrike" cap="none">
         <a:solidFill>
           <a:srgbClr val="000000"/>
         </a:solidFill>
@@ -145,7 +145,7 @@
         <a:sym typeface="Arial"/>
       </a:defRPr>
     </a:lvl4pPr>
-    <a:lvl5pPr lvl="4" marR="0" rtl="0" algn="l">
+    <a:lvl5pPr marR="0" lvl="4" algn="l" rtl="0">
       <a:lnSpc>
         <a:spcPct val="100000"/>
       </a:lnSpc>
@@ -159,7 +159,7 @@
         <a:srgbClr val="000000"/>
       </a:buClr>
       <a:buFont typeface="Arial"/>
-      <a:defRPr b="0" i="0" sz="1400" u="none" cap="none" strike="noStrike">
+      <a:defRPr sz="1400" b="0" i="0" u="none" strike="noStrike" cap="none">
         <a:solidFill>
           <a:srgbClr val="000000"/>
         </a:solidFill>
@@ -169,7 +169,7 @@
         <a:sym typeface="Arial"/>
       </a:defRPr>
     </a:lvl5pPr>
-    <a:lvl6pPr lvl="5" marR="0" rtl="0" algn="l">
+    <a:lvl6pPr marR="0" lvl="5" algn="l" rtl="0">
       <a:lnSpc>
         <a:spcPct val="100000"/>
       </a:lnSpc>
@@ -183,7 +183,7 @@
         <a:srgbClr val="000000"/>
       </a:buClr>
       <a:buFont typeface="Arial"/>
-      <a:defRPr b="0" i="0" sz="1400" u="none" cap="none" strike="noStrike">
+      <a:defRPr sz="1400" b="0" i="0" u="none" strike="noStrike" cap="none">
         <a:solidFill>
           <a:srgbClr val="000000"/>
         </a:solidFill>
@@ -193,7 +193,7 @@
         <a:sym typeface="Arial"/>
       </a:defRPr>
     </a:lvl6pPr>
-    <a:lvl7pPr lvl="6" marR="0" rtl="0" algn="l">
+    <a:lvl7pPr marR="0" lvl="6" algn="l" rtl="0">
       <a:lnSpc>
         <a:spcPct val="100000"/>
       </a:lnSpc>
@@ -207,7 +207,7 @@
         <a:srgbClr val="000000"/>
       </a:buClr>
       <a:buFont typeface="Arial"/>
-      <a:defRPr b="0" i="0" sz="1400" u="none" cap="none" strike="noStrike">
+      <a:defRPr sz="1400" b="0" i="0" u="none" strike="noStrike" cap="none">
         <a:solidFill>
           <a:srgbClr val="000000"/>
         </a:solidFill>
@@ -217,7 +217,7 @@
         <a:sym typeface="Arial"/>
       </a:defRPr>
     </a:lvl7pPr>
-    <a:lvl8pPr lvl="7" marR="0" rtl="0" algn="l">
+    <a:lvl8pPr marR="0" lvl="7" algn="l" rtl="0">
       <a:lnSpc>
         <a:spcPct val="100000"/>
       </a:lnSpc>
@@ -231,7 +231,7 @@
         <a:srgbClr val="000000"/>
       </a:buClr>
       <a:buFont typeface="Arial"/>
-      <a:defRPr b="0" i="0" sz="1400" u="none" cap="none" strike="noStrike">
+      <a:defRPr sz="1400" b="0" i="0" u="none" strike="noStrike" cap="none">
         <a:solidFill>
           <a:srgbClr val="000000"/>
         </a:solidFill>
@@ -241,7 +241,7 @@
         <a:sym typeface="Arial"/>
       </a:defRPr>
     </a:lvl8pPr>
-    <a:lvl9pPr lvl="8" marR="0" rtl="0" algn="l">
+    <a:lvl9pPr marR="0" lvl="8" algn="l" rtl="0">
       <a:lnSpc>
         <a:spcPct val="100000"/>
       </a:lnSpc>
@@ -255,7 +255,7 @@
         <a:srgbClr val="000000"/>
       </a:buClr>
       <a:buFont typeface="Arial"/>
-      <a:defRPr b="0" i="0" sz="1400" u="none" cap="none" strike="noStrike">
+      <a:defRPr sz="1400" b="0" i="0" u="none" strike="noStrike" cap="none">
         <a:solidFill>
           <a:srgbClr val="000000"/>
         </a:solidFill>
@@ -268,7 +268,7 @@
   </p:defaultTextStyle>
   <p:extLst>
     <p:ext uri="{EFAFB233-063F-42B5-8137-9DF3F51BA10A}">
-      <p15:sldGuideLst>
+      <p15:sldGuideLst xmlns:p15="http://schemas.microsoft.com/office/powerpoint/2012/main">
         <p15:guide id="1" orient="horz" pos="1620">
           <p15:clr>
             <a:srgbClr val="747775"/>
@@ -286,11 +286,16 @@
 </file>
 
 <file path=ppt/notesMasters/notesMaster1.xml><?xml version="1.0" encoding="utf-8"?>
-<p:notesMaster xmlns:a="http://schemas.openxmlformats.org/drawingml/2006/main" xmlns:r="http://schemas.openxmlformats.org/officeDocument/2006/relationships" xmlns:mc="http://schemas.openxmlformats.org/markup-compatibility/2006" xmlns:mv="urn:schemas-microsoft-com:mac:vml" xmlns:p="http://schemas.openxmlformats.org/presentationml/2006/main" xmlns:c="http://schemas.openxmlformats.org/drawingml/2006/chart" xmlns:dgm="http://schemas.openxmlformats.org/drawingml/2006/diagram" xmlns:o="urn:schemas-microsoft-com:office:office" xmlns:v="urn:schemas-microsoft-com:vml" xmlns:pvml="urn:schemas-microsoft-com:office:powerpoint" xmlns:com="http://schemas.openxmlformats.org/drawingml/2006/compatibility" xmlns:p14="http://schemas.microsoft.com/office/powerpoint/2010/main" xmlns:p15="http://schemas.microsoft.com/office/powerpoint/2012/main" xmlns:ahyp="http://schemas.microsoft.com/office/drawing/2018/hyperlinkcolor">
+<p:notesMaster xmlns:a="http://schemas.openxmlformats.org/drawingml/2006/main" xmlns:r="http://schemas.openxmlformats.org/officeDocument/2006/relationships" xmlns:p="http://schemas.openxmlformats.org/presentationml/2006/main">
   <p:cSld>
+    <p:bg>
+      <p:bgRef idx="1001">
+        <a:schemeClr val="bg1"/>
+      </p:bgRef>
+    </p:bg>
     <p:spTree>
       <p:nvGrpSpPr>
-        <p:cNvPr id="2" name="Shape 2"/>
+        <p:cNvPr id="1" name="Shape 2"/>
         <p:cNvGrpSpPr/>
         <p:nvPr/>
       </p:nvGrpSpPr>
@@ -305,9 +310,11 @@
       <p:sp>
         <p:nvSpPr>
           <p:cNvPr id="3" name="Google Shape;3;n"/>
-          <p:cNvSpPr/>
+          <p:cNvSpPr>
+            <a:spLocks noGrp="1" noRot="1" noChangeAspect="1"/>
+          </p:cNvSpPr>
           <p:nvPr>
-            <p:ph idx="2" type="sldImg"/>
+            <p:ph type="sldImg" idx="2"/>
           </p:nvPr>
         </p:nvSpPr>
         <p:spPr>
@@ -316,9 +323,13 @@
             <a:ext cx="6096075" cy="3429000"/>
           </a:xfrm>
           <a:custGeom>
-            <a:rect b="b" l="l" r="r" t="t"/>
+            <a:avLst/>
+            <a:gdLst/>
+            <a:ahLst/>
+            <a:cxnLst/>
+            <a:rect l="l" t="t" r="r" b="b"/>
             <a:pathLst>
-              <a:path extrusionOk="0" h="120000" w="120000">
+              <a:path w="120000" h="120000" extrusionOk="0">
                 <a:moveTo>
                   <a:pt x="0" y="0"/>
                 </a:moveTo>
@@ -336,23 +347,25 @@
             </a:pathLst>
           </a:custGeom>
           <a:noFill/>
-          <a:ln cap="flat" cmpd="sng" w="9525">
+          <a:ln w="9525" cap="flat" cmpd="sng">
             <a:solidFill>
               <a:srgbClr val="000000"/>
             </a:solidFill>
             <a:prstDash val="solid"/>
             <a:round/>
-            <a:headEnd len="sm" w="sm" type="none"/>
-            <a:tailEnd len="sm" w="sm" type="none"/>
+            <a:headEnd type="none" w="sm" len="sm"/>
+            <a:tailEnd type="none" w="sm" len="sm"/>
           </a:ln>
         </p:spPr>
       </p:sp>
       <p:sp>
         <p:nvSpPr>
           <p:cNvPr id="4" name="Google Shape;4;n"/>
-          <p:cNvSpPr txBox="1"/>
+          <p:cNvSpPr txBox="1">
+            <a:spLocks noGrp="1"/>
+          </p:cNvSpPr>
           <p:nvPr>
-            <p:ph idx="1" type="body"/>
+            <p:ph type="body" idx="1"/>
           </p:nvPr>
         </p:nvSpPr>
         <p:spPr>
@@ -369,11 +382,11 @@
           </a:ln>
         </p:spPr>
         <p:txBody>
-          <a:bodyPr anchorCtr="0" anchor="t" bIns="91425" lIns="91425" spcFirstLastPara="1" rIns="91425" wrap="square" tIns="91425">
+          <a:bodyPr spcFirstLastPara="1" wrap="square" lIns="91425" tIns="91425" rIns="91425" bIns="91425" anchor="t" anchorCtr="0">
             <a:noAutofit/>
           </a:bodyPr>
           <a:lstStyle>
-            <a:lvl1pPr indent="-317500" lvl="0" marL="457200">
+            <a:lvl1pPr marL="457200" lvl="0" indent="-317500">
               <a:spcBef>
                 <a:spcPts val="0"/>
               </a:spcBef>
@@ -384,7 +397,7 @@
               <a:buChar char="●"/>
               <a:defRPr sz="1100"/>
             </a:lvl1pPr>
-            <a:lvl2pPr indent="-317500" lvl="1" marL="914400">
+            <a:lvl2pPr marL="914400" lvl="1" indent="-317500">
               <a:spcBef>
                 <a:spcPts val="0"/>
               </a:spcBef>
@@ -395,7 +408,7 @@
               <a:buChar char="○"/>
               <a:defRPr sz="1100"/>
             </a:lvl2pPr>
-            <a:lvl3pPr indent="-317500" lvl="2" marL="1371600">
+            <a:lvl3pPr marL="1371600" lvl="2" indent="-317500">
               <a:spcBef>
                 <a:spcPts val="0"/>
               </a:spcBef>
@@ -406,7 +419,7 @@
               <a:buChar char="■"/>
               <a:defRPr sz="1100"/>
             </a:lvl3pPr>
-            <a:lvl4pPr indent="-317500" lvl="3" marL="1828800">
+            <a:lvl4pPr marL="1828800" lvl="3" indent="-317500">
               <a:spcBef>
                 <a:spcPts val="0"/>
               </a:spcBef>
@@ -417,7 +430,7 @@
               <a:buChar char="●"/>
               <a:defRPr sz="1100"/>
             </a:lvl4pPr>
-            <a:lvl5pPr indent="-317500" lvl="4" marL="2286000">
+            <a:lvl5pPr marL="2286000" lvl="4" indent="-317500">
               <a:spcBef>
                 <a:spcPts val="0"/>
               </a:spcBef>
@@ -428,7 +441,7 @@
               <a:buChar char="○"/>
               <a:defRPr sz="1100"/>
             </a:lvl5pPr>
-            <a:lvl6pPr indent="-317500" lvl="5" marL="2743200">
+            <a:lvl6pPr marL="2743200" lvl="5" indent="-317500">
               <a:spcBef>
                 <a:spcPts val="0"/>
               </a:spcBef>
@@ -439,7 +452,7 @@
               <a:buChar char="■"/>
               <a:defRPr sz="1100"/>
             </a:lvl6pPr>
-            <a:lvl7pPr indent="-317500" lvl="6" marL="3200400">
+            <a:lvl7pPr marL="3200400" lvl="6" indent="-317500">
               <a:spcBef>
                 <a:spcPts val="0"/>
               </a:spcBef>
@@ -450,7 +463,7 @@
               <a:buChar char="●"/>
               <a:defRPr sz="1100"/>
             </a:lvl7pPr>
-            <a:lvl8pPr indent="-317500" lvl="7" marL="3657600">
+            <a:lvl8pPr marL="3657600" lvl="7" indent="-317500">
               <a:spcBef>
                 <a:spcPts val="0"/>
               </a:spcBef>
@@ -461,7 +474,7 @@
               <a:buChar char="○"/>
               <a:defRPr sz="1100"/>
             </a:lvl8pPr>
-            <a:lvl9pPr indent="-317500" lvl="8" marL="4114800">
+            <a:lvl9pPr marL="4114800" lvl="8" indent="-317500">
               <a:spcBef>
                 <a:spcPts val="0"/>
               </a:spcBef>
@@ -473,14 +486,16 @@
               <a:defRPr sz="1100"/>
             </a:lvl9pPr>
           </a:lstStyle>
-          <a:p/>
+          <a:p>
+            <a:endParaRPr/>
+          </a:p>
         </p:txBody>
       </p:sp>
     </p:spTree>
   </p:cSld>
-  <p:clrMap accent1="accent1" accent2="accent2" accent3="accent3" accent4="accent4" accent5="accent5" accent6="accent6" bg1="lt1" bg2="dk2" tx1="dk1" tx2="lt2" folHlink="folHlink" hlink="hlink"/>
+  <p:clrMap bg1="lt1" tx1="dk1" bg2="dk2" tx2="lt2" accent1="accent1" accent2="accent2" accent3="accent3" accent4="accent4" accent5="accent5" accent6="accent6" hlink="hlink" folHlink="folHlink"/>
   <p:notesStyle>
-    <a:defPPr lvl="0" marR="0" rtl="0" algn="l">
+    <a:defPPr marR="0" lvl="0" algn="l" rtl="0">
       <a:lnSpc>
         <a:spcPct val="100000"/>
       </a:lnSpc>
@@ -491,7 +506,7 @@
         <a:spcPts val="0"/>
       </a:spcAft>
     </a:defPPr>
-    <a:lvl1pPr lvl="0" marR="0" rtl="0" algn="l">
+    <a:lvl1pPr marR="0" lvl="0" algn="l" rtl="0">
       <a:lnSpc>
         <a:spcPct val="100000"/>
       </a:lnSpc>
@@ -505,7 +520,7 @@
         <a:srgbClr val="000000"/>
       </a:buClr>
       <a:buFont typeface="Arial"/>
-      <a:defRPr b="0" i="0" sz="1400" u="none" cap="none" strike="noStrike">
+      <a:defRPr sz="1400" b="0" i="0" u="none" strike="noStrike" cap="none">
         <a:solidFill>
           <a:srgbClr val="000000"/>
         </a:solidFill>
@@ -515,7 +530,7 @@
         <a:sym typeface="Arial"/>
       </a:defRPr>
     </a:lvl1pPr>
-    <a:lvl2pPr lvl="1" marR="0" rtl="0" algn="l">
+    <a:lvl2pPr marR="0" lvl="1" algn="l" rtl="0">
       <a:lnSpc>
         <a:spcPct val="100000"/>
       </a:lnSpc>
@@ -529,7 +544,7 @@
         <a:srgbClr val="000000"/>
       </a:buClr>
       <a:buFont typeface="Arial"/>
-      <a:defRPr b="0" i="0" sz="1400" u="none" cap="none" strike="noStrike">
+      <a:defRPr sz="1400" b="0" i="0" u="none" strike="noStrike" cap="none">
         <a:solidFill>
           <a:srgbClr val="000000"/>
         </a:solidFill>
@@ -539,7 +554,7 @@
         <a:sym typeface="Arial"/>
       </a:defRPr>
     </a:lvl2pPr>
-    <a:lvl3pPr lvl="2" marR="0" rtl="0" algn="l">
+    <a:lvl3pPr marR="0" lvl="2" algn="l" rtl="0">
       <a:lnSpc>
         <a:spcPct val="100000"/>
       </a:lnSpc>
@@ -553,7 +568,7 @@
         <a:srgbClr val="000000"/>
       </a:buClr>
       <a:buFont typeface="Arial"/>
-      <a:defRPr b="0" i="0" sz="1400" u="none" cap="none" strike="noStrike">
+      <a:defRPr sz="1400" b="0" i="0" u="none" strike="noStrike" cap="none">
         <a:solidFill>
           <a:srgbClr val="000000"/>
         </a:solidFill>
@@ -563,7 +578,7 @@
         <a:sym typeface="Arial"/>
       </a:defRPr>
     </a:lvl3pPr>
-    <a:lvl4pPr lvl="3" marR="0" rtl="0" algn="l">
+    <a:lvl4pPr marR="0" lvl="3" algn="l" rtl="0">
       <a:lnSpc>
         <a:spcPct val="100000"/>
       </a:lnSpc>
@@ -577,7 +592,7 @@
         <a:srgbClr val="000000"/>
       </a:buClr>
       <a:buFont typeface="Arial"/>
-      <a:defRPr b="0" i="0" sz="1400" u="none" cap="none" strike="noStrike">
+      <a:defRPr sz="1400" b="0" i="0" u="none" strike="noStrike" cap="none">
         <a:solidFill>
           <a:srgbClr val="000000"/>
         </a:solidFill>
@@ -587,7 +602,7 @@
         <a:sym typeface="Arial"/>
       </a:defRPr>
     </a:lvl4pPr>
-    <a:lvl5pPr lvl="4" marR="0" rtl="0" algn="l">
+    <a:lvl5pPr marR="0" lvl="4" algn="l" rtl="0">
       <a:lnSpc>
         <a:spcPct val="100000"/>
       </a:lnSpc>
@@ -601,7 +616,7 @@
         <a:srgbClr val="000000"/>
       </a:buClr>
       <a:buFont typeface="Arial"/>
-      <a:defRPr b="0" i="0" sz="1400" u="none" cap="none" strike="noStrike">
+      <a:defRPr sz="1400" b="0" i="0" u="none" strike="noStrike" cap="none">
         <a:solidFill>
           <a:srgbClr val="000000"/>
         </a:solidFill>
@@ -611,7 +626,7 @@
         <a:sym typeface="Arial"/>
       </a:defRPr>
     </a:lvl5pPr>
-    <a:lvl6pPr lvl="5" marR="0" rtl="0" algn="l">
+    <a:lvl6pPr marR="0" lvl="5" algn="l" rtl="0">
       <a:lnSpc>
         <a:spcPct val="100000"/>
       </a:lnSpc>
@@ -625,7 +640,7 @@
         <a:srgbClr val="000000"/>
       </a:buClr>
       <a:buFont typeface="Arial"/>
-      <a:defRPr b="0" i="0" sz="1400" u="none" cap="none" strike="noStrike">
+      <a:defRPr sz="1400" b="0" i="0" u="none" strike="noStrike" cap="none">
         <a:solidFill>
           <a:srgbClr val="000000"/>
         </a:solidFill>
@@ -635,7 +650,7 @@
         <a:sym typeface="Arial"/>
       </a:defRPr>
     </a:lvl6pPr>
-    <a:lvl7pPr lvl="6" marR="0" rtl="0" algn="l">
+    <a:lvl7pPr marR="0" lvl="6" algn="l" rtl="0">
       <a:lnSpc>
         <a:spcPct val="100000"/>
       </a:lnSpc>
@@ -649,7 +664,7 @@
         <a:srgbClr val="000000"/>
       </a:buClr>
       <a:buFont typeface="Arial"/>
-      <a:defRPr b="0" i="0" sz="1400" u="none" cap="none" strike="noStrike">
+      <a:defRPr sz="1400" b="0" i="0" u="none" strike="noStrike" cap="none">
         <a:solidFill>
           <a:srgbClr val="000000"/>
         </a:solidFill>
@@ -659,7 +674,7 @@
         <a:sym typeface="Arial"/>
       </a:defRPr>
     </a:lvl7pPr>
-    <a:lvl8pPr lvl="7" marR="0" rtl="0" algn="l">
+    <a:lvl8pPr marR="0" lvl="7" algn="l" rtl="0">
       <a:lnSpc>
         <a:spcPct val="100000"/>
       </a:lnSpc>
@@ -673,7 +688,7 @@
         <a:srgbClr val="000000"/>
       </a:buClr>
       <a:buFont typeface="Arial"/>
-      <a:defRPr b="0" i="0" sz="1400" u="none" cap="none" strike="noStrike">
+      <a:defRPr sz="1400" b="0" i="0" u="none" strike="noStrike" cap="none">
         <a:solidFill>
           <a:srgbClr val="000000"/>
         </a:solidFill>
@@ -683,7 +698,7 @@
         <a:sym typeface="Arial"/>
       </a:defRPr>
     </a:lvl8pPr>
-    <a:lvl9pPr lvl="8" marR="0" rtl="0" algn="l">
+    <a:lvl9pPr marR="0" lvl="8" algn="l" rtl="0">
       <a:lnSpc>
         <a:spcPct val="100000"/>
       </a:lnSpc>
@@ -697,7 +712,7 @@
         <a:srgbClr val="000000"/>
       </a:buClr>
       <a:buFont typeface="Arial"/>
-      <a:defRPr b="0" i="0" sz="1400" u="none" cap="none" strike="noStrike">
+      <a:defRPr sz="1400" b="0" i="0" u="none" strike="noStrike" cap="none">
         <a:solidFill>
           <a:srgbClr val="000000"/>
         </a:solidFill>
@@ -712,11 +727,11 @@
 </file>
 
 <file path=ppt/notesSlides/notesSlide1.xml><?xml version="1.0" encoding="utf-8"?>
-<p:notes xmlns:a="http://schemas.openxmlformats.org/drawingml/2006/main" xmlns:r="http://schemas.openxmlformats.org/officeDocument/2006/relationships" xmlns:mc="http://schemas.openxmlformats.org/markup-compatibility/2006" xmlns:mv="urn:schemas-microsoft-com:mac:vml" xmlns:p="http://schemas.openxmlformats.org/presentationml/2006/main" xmlns:c="http://schemas.openxmlformats.org/drawingml/2006/chart" xmlns:dgm="http://schemas.openxmlformats.org/drawingml/2006/diagram" xmlns:o="urn:schemas-microsoft-com:office:office" xmlns:v="urn:schemas-microsoft-com:vml" xmlns:pvml="urn:schemas-microsoft-com:office:powerpoint" xmlns:com="http://schemas.openxmlformats.org/drawingml/2006/compatibility" xmlns:p14="http://schemas.microsoft.com/office/powerpoint/2010/main" xmlns:p15="http://schemas.microsoft.com/office/powerpoint/2012/main" xmlns:ahyp="http://schemas.microsoft.com/office/drawing/2018/hyperlinkcolor" showMasterPhAnim="0" showMasterSp="0">
+<p:notes xmlns:a="http://schemas.openxmlformats.org/drawingml/2006/main" xmlns:r="http://schemas.openxmlformats.org/officeDocument/2006/relationships" xmlns:p="http://schemas.openxmlformats.org/presentationml/2006/main" showMasterSp="0" showMasterPhAnim="0">
   <p:cSld>
     <p:spTree>
       <p:nvGrpSpPr>
-        <p:cNvPr id="68" name="Shape 68"/>
+        <p:cNvPr id="1" name="Shape 68"/>
         <p:cNvGrpSpPr/>
         <p:nvPr/>
       </p:nvGrpSpPr>
@@ -731,9 +746,11 @@
       <p:sp>
         <p:nvSpPr>
           <p:cNvPr id="69" name="Google Shape;69;gc6fa3c898_0_0:notes"/>
-          <p:cNvSpPr/>
+          <p:cNvSpPr>
+            <a:spLocks noGrp="1" noRot="1" noChangeAspect="1"/>
+          </p:cNvSpPr>
           <p:nvPr>
-            <p:ph idx="2" type="sldImg"/>
+            <p:ph type="sldImg" idx="2"/>
           </p:nvPr>
         </p:nvSpPr>
         <p:spPr>
@@ -742,9 +759,13 @@
             <a:ext cx="6096300" cy="3429000"/>
           </a:xfrm>
           <a:custGeom>
-            <a:rect b="b" l="l" r="r" t="t"/>
+            <a:avLst/>
+            <a:gdLst/>
+            <a:ahLst/>
+            <a:cxnLst/>
+            <a:rect l="l" t="t" r="r" b="b"/>
             <a:pathLst>
-              <a:path extrusionOk="0" h="120000" w="120000">
+              <a:path w="120000" h="120000" extrusionOk="0">
                 <a:moveTo>
                   <a:pt x="0" y="0"/>
                 </a:moveTo>
@@ -766,9 +787,11 @@
       <p:sp>
         <p:nvSpPr>
           <p:cNvPr id="70" name="Google Shape;70;gc6fa3c898_0_0:notes"/>
-          <p:cNvSpPr txBox="1"/>
+          <p:cNvSpPr txBox="1">
+            <a:spLocks noGrp="1"/>
+          </p:cNvSpPr>
           <p:nvPr>
-            <p:ph idx="1" type="body"/>
+            <p:ph type="body" idx="1"/>
           </p:nvPr>
         </p:nvSpPr>
         <p:spPr>
@@ -781,12 +804,12 @@
           </a:prstGeom>
         </p:spPr>
         <p:txBody>
-          <a:bodyPr anchorCtr="0" anchor="t" bIns="91425" lIns="91425" spcFirstLastPara="1" rIns="91425" wrap="square" tIns="91425">
+          <a:bodyPr spcFirstLastPara="1" wrap="square" lIns="91425" tIns="91425" rIns="91425" bIns="91425" anchor="t" anchorCtr="0">
             <a:noAutofit/>
           </a:bodyPr>
           <a:lstStyle/>
           <a:p>
-            <a:pPr indent="0" lvl="0" marL="0" rtl="0" algn="l">
+            <a:pPr marL="0" lvl="0" indent="0" algn="l" rtl="0">
               <a:spcBef>
                 <a:spcPts val="0"/>
               </a:spcBef>
@@ -795,9 +818,6 @@
               </a:spcAft>
               <a:buNone/>
             </a:pPr>
-            <a:r>
-              <a:t/>
-            </a:r>
             <a:endParaRPr/>
           </a:p>
         </p:txBody>
@@ -811,11 +831,11 @@
 </file>
 
 <file path=ppt/notesSlides/notesSlide10.xml><?xml version="1.0" encoding="utf-8"?>
-<p:notes xmlns:a="http://schemas.openxmlformats.org/drawingml/2006/main" xmlns:r="http://schemas.openxmlformats.org/officeDocument/2006/relationships" xmlns:mc="http://schemas.openxmlformats.org/markup-compatibility/2006" xmlns:mv="urn:schemas-microsoft-com:mac:vml" xmlns:p="http://schemas.openxmlformats.org/presentationml/2006/main" xmlns:c="http://schemas.openxmlformats.org/drawingml/2006/chart" xmlns:dgm="http://schemas.openxmlformats.org/drawingml/2006/diagram" xmlns:o="urn:schemas-microsoft-com:office:office" xmlns:v="urn:schemas-microsoft-com:vml" xmlns:pvml="urn:schemas-microsoft-com:office:powerpoint" xmlns:com="http://schemas.openxmlformats.org/drawingml/2006/compatibility" xmlns:p14="http://schemas.microsoft.com/office/powerpoint/2010/main" xmlns:p15="http://schemas.microsoft.com/office/powerpoint/2012/main" xmlns:ahyp="http://schemas.microsoft.com/office/drawing/2018/hyperlinkcolor" showMasterPhAnim="0" showMasterSp="0">
+<p:notes xmlns:a="http://schemas.openxmlformats.org/drawingml/2006/main" xmlns:r="http://schemas.openxmlformats.org/officeDocument/2006/relationships" xmlns:p="http://schemas.openxmlformats.org/presentationml/2006/main" showMasterSp="0" showMasterPhAnim="0">
   <p:cSld>
     <p:spTree>
       <p:nvGrpSpPr>
-        <p:cNvPr id="145" name="Shape 145"/>
+        <p:cNvPr id="1" name="Shape 145"/>
         <p:cNvGrpSpPr/>
         <p:nvPr/>
       </p:nvGrpSpPr>
@@ -830,20 +850,26 @@
       <p:sp>
         <p:nvSpPr>
           <p:cNvPr id="146" name="Google Shape;146;gc6fa3c898_0_28:notes"/>
-          <p:cNvSpPr/>
+          <p:cNvSpPr>
+            <a:spLocks noGrp="1" noRot="1" noChangeAspect="1"/>
+          </p:cNvSpPr>
           <p:nvPr>
-            <p:ph idx="2" type="sldImg"/>
+            <p:ph type="sldImg" idx="2"/>
           </p:nvPr>
         </p:nvSpPr>
         <p:spPr>
           <a:xfrm>
-            <a:off x="381188" y="685800"/>
-            <a:ext cx="6096300" cy="3429000"/>
+            <a:off x="381000" y="685800"/>
+            <a:ext cx="6096000" cy="3429000"/>
           </a:xfrm>
           <a:custGeom>
-            <a:rect b="b" l="l" r="r" t="t"/>
+            <a:avLst/>
+            <a:gdLst/>
+            <a:ahLst/>
+            <a:cxnLst/>
+            <a:rect l="l" t="t" r="r" b="b"/>
             <a:pathLst>
-              <a:path extrusionOk="0" h="120000" w="120000">
+              <a:path w="120000" h="120000" extrusionOk="0">
                 <a:moveTo>
                   <a:pt x="0" y="0"/>
                 </a:moveTo>
@@ -865,9 +891,11 @@
       <p:sp>
         <p:nvSpPr>
           <p:cNvPr id="147" name="Google Shape;147;gc6fa3c898_0_28:notes"/>
-          <p:cNvSpPr txBox="1"/>
+          <p:cNvSpPr txBox="1">
+            <a:spLocks noGrp="1"/>
+          </p:cNvSpPr>
           <p:nvPr>
-            <p:ph idx="1" type="body"/>
+            <p:ph type="body" idx="1"/>
           </p:nvPr>
         </p:nvSpPr>
         <p:spPr>
@@ -880,12 +908,12 @@
           </a:prstGeom>
         </p:spPr>
         <p:txBody>
-          <a:bodyPr anchorCtr="0" anchor="t" bIns="91425" lIns="91425" spcFirstLastPara="1" rIns="91425" wrap="square" tIns="91425">
+          <a:bodyPr spcFirstLastPara="1" wrap="square" lIns="91425" tIns="91425" rIns="91425" bIns="91425" anchor="t" anchorCtr="0">
             <a:noAutofit/>
           </a:bodyPr>
           <a:lstStyle/>
           <a:p>
-            <a:pPr indent="0" lvl="0" marL="0" rtl="0" algn="l">
+            <a:pPr marL="0" lvl="0" indent="0" algn="l" rtl="0">
               <a:spcBef>
                 <a:spcPts val="0"/>
               </a:spcBef>
@@ -894,9 +922,6 @@
               </a:spcAft>
               <a:buNone/>
             </a:pPr>
-            <a:r>
-              <a:t/>
-            </a:r>
             <a:endParaRPr/>
           </a:p>
         </p:txBody>
@@ -910,11 +935,11 @@
 </file>
 
 <file path=ppt/notesSlides/notesSlide2.xml><?xml version="1.0" encoding="utf-8"?>
-<p:notes xmlns:a="http://schemas.openxmlformats.org/drawingml/2006/main" xmlns:r="http://schemas.openxmlformats.org/officeDocument/2006/relationships" xmlns:mc="http://schemas.openxmlformats.org/markup-compatibility/2006" xmlns:mv="urn:schemas-microsoft-com:mac:vml" xmlns:p="http://schemas.openxmlformats.org/presentationml/2006/main" xmlns:c="http://schemas.openxmlformats.org/drawingml/2006/chart" xmlns:dgm="http://schemas.openxmlformats.org/drawingml/2006/diagram" xmlns:o="urn:schemas-microsoft-com:office:office" xmlns:v="urn:schemas-microsoft-com:vml" xmlns:pvml="urn:schemas-microsoft-com:office:powerpoint" xmlns:com="http://schemas.openxmlformats.org/drawingml/2006/compatibility" xmlns:p14="http://schemas.microsoft.com/office/powerpoint/2010/main" xmlns:p15="http://schemas.microsoft.com/office/powerpoint/2012/main" xmlns:ahyp="http://schemas.microsoft.com/office/drawing/2018/hyperlinkcolor" showMasterPhAnim="0" showMasterSp="0">
+<p:notes xmlns:a="http://schemas.openxmlformats.org/drawingml/2006/main" xmlns:r="http://schemas.openxmlformats.org/officeDocument/2006/relationships" xmlns:p="http://schemas.openxmlformats.org/presentationml/2006/main" showMasterSp="0" showMasterPhAnim="0">
   <p:cSld>
     <p:spTree>
       <p:nvGrpSpPr>
-        <p:cNvPr id="74" name="Shape 74"/>
+        <p:cNvPr id="1" name="Shape 74"/>
         <p:cNvGrpSpPr/>
         <p:nvPr/>
       </p:nvGrpSpPr>
@@ -929,9 +954,11 @@
       <p:sp>
         <p:nvSpPr>
           <p:cNvPr id="75" name="Google Shape;75;gc6fa3c898_0_5:notes"/>
-          <p:cNvSpPr/>
+          <p:cNvSpPr>
+            <a:spLocks noGrp="1" noRot="1" noChangeAspect="1"/>
+          </p:cNvSpPr>
           <p:nvPr>
-            <p:ph idx="2" type="sldImg"/>
+            <p:ph type="sldImg" idx="2"/>
           </p:nvPr>
         </p:nvSpPr>
         <p:spPr>
@@ -940,9 +967,13 @@
             <a:ext cx="6096300" cy="3429000"/>
           </a:xfrm>
           <a:custGeom>
-            <a:rect b="b" l="l" r="r" t="t"/>
+            <a:avLst/>
+            <a:gdLst/>
+            <a:ahLst/>
+            <a:cxnLst/>
+            <a:rect l="l" t="t" r="r" b="b"/>
             <a:pathLst>
-              <a:path extrusionOk="0" h="120000" w="120000">
+              <a:path w="120000" h="120000" extrusionOk="0">
                 <a:moveTo>
                   <a:pt x="0" y="0"/>
                 </a:moveTo>
@@ -964,9 +995,11 @@
       <p:sp>
         <p:nvSpPr>
           <p:cNvPr id="76" name="Google Shape;76;gc6fa3c898_0_5:notes"/>
-          <p:cNvSpPr txBox="1"/>
+          <p:cNvSpPr txBox="1">
+            <a:spLocks noGrp="1"/>
+          </p:cNvSpPr>
           <p:nvPr>
-            <p:ph idx="1" type="body"/>
+            <p:ph type="body" idx="1"/>
           </p:nvPr>
         </p:nvSpPr>
         <p:spPr>
@@ -979,12 +1012,12 @@
           </a:prstGeom>
         </p:spPr>
         <p:txBody>
-          <a:bodyPr anchorCtr="0" anchor="t" bIns="91425" lIns="91425" spcFirstLastPara="1" rIns="91425" wrap="square" tIns="91425">
+          <a:bodyPr spcFirstLastPara="1" wrap="square" lIns="91425" tIns="91425" rIns="91425" bIns="91425" anchor="t" anchorCtr="0">
             <a:noAutofit/>
           </a:bodyPr>
           <a:lstStyle/>
           <a:p>
-            <a:pPr indent="0" lvl="0" marL="0" rtl="0" algn="l">
+            <a:pPr marL="0" lvl="0" indent="0" algn="l" rtl="0">
               <a:spcBef>
                 <a:spcPts val="0"/>
               </a:spcBef>
@@ -993,9 +1026,6 @@
               </a:spcAft>
               <a:buNone/>
             </a:pPr>
-            <a:r>
-              <a:t/>
-            </a:r>
             <a:endParaRPr/>
           </a:p>
         </p:txBody>
@@ -1009,11 +1039,11 @@
 </file>
 
 <file path=ppt/notesSlides/notesSlide3.xml><?xml version="1.0" encoding="utf-8"?>
-<p:notes xmlns:a="http://schemas.openxmlformats.org/drawingml/2006/main" xmlns:r="http://schemas.openxmlformats.org/officeDocument/2006/relationships" xmlns:mc="http://schemas.openxmlformats.org/markup-compatibility/2006" xmlns:mv="urn:schemas-microsoft-com:mac:vml" xmlns:p="http://schemas.openxmlformats.org/presentationml/2006/main" xmlns:c="http://schemas.openxmlformats.org/drawingml/2006/chart" xmlns:dgm="http://schemas.openxmlformats.org/drawingml/2006/diagram" xmlns:o="urn:schemas-microsoft-com:office:office" xmlns:v="urn:schemas-microsoft-com:vml" xmlns:pvml="urn:schemas-microsoft-com:office:powerpoint" xmlns:com="http://schemas.openxmlformats.org/drawingml/2006/compatibility" xmlns:p14="http://schemas.microsoft.com/office/powerpoint/2010/main" xmlns:p15="http://schemas.microsoft.com/office/powerpoint/2012/main" xmlns:ahyp="http://schemas.microsoft.com/office/drawing/2018/hyperlinkcolor" showMasterPhAnim="0" showMasterSp="0">
+<p:notes xmlns:a="http://schemas.openxmlformats.org/drawingml/2006/main" xmlns:r="http://schemas.openxmlformats.org/officeDocument/2006/relationships" xmlns:p="http://schemas.openxmlformats.org/presentationml/2006/main" showMasterSp="0" showMasterPhAnim="0">
   <p:cSld>
     <p:spTree>
       <p:nvGrpSpPr>
-        <p:cNvPr id="86" name="Shape 86"/>
+        <p:cNvPr id="1" name="Shape 86"/>
         <p:cNvGrpSpPr/>
         <p:nvPr/>
       </p:nvGrpSpPr>
@@ -1028,9 +1058,11 @@
       <p:sp>
         <p:nvSpPr>
           <p:cNvPr id="87" name="Google Shape;87;gc6fa3c898_0_10:notes"/>
-          <p:cNvSpPr/>
+          <p:cNvSpPr>
+            <a:spLocks noGrp="1" noRot="1" noChangeAspect="1"/>
+          </p:cNvSpPr>
           <p:nvPr>
-            <p:ph idx="2" type="sldImg"/>
+            <p:ph type="sldImg" idx="2"/>
           </p:nvPr>
         </p:nvSpPr>
         <p:spPr>
@@ -1039,9 +1071,13 @@
             <a:ext cx="6096300" cy="3429000"/>
           </a:xfrm>
           <a:custGeom>
-            <a:rect b="b" l="l" r="r" t="t"/>
+            <a:avLst/>
+            <a:gdLst/>
+            <a:ahLst/>
+            <a:cxnLst/>
+            <a:rect l="l" t="t" r="r" b="b"/>
             <a:pathLst>
-              <a:path extrusionOk="0" h="120000" w="120000">
+              <a:path w="120000" h="120000" extrusionOk="0">
                 <a:moveTo>
                   <a:pt x="0" y="0"/>
                 </a:moveTo>
@@ -1063,9 +1099,11 @@
       <p:sp>
         <p:nvSpPr>
           <p:cNvPr id="88" name="Google Shape;88;gc6fa3c898_0_10:notes"/>
-          <p:cNvSpPr txBox="1"/>
+          <p:cNvSpPr txBox="1">
+            <a:spLocks noGrp="1"/>
+          </p:cNvSpPr>
           <p:nvPr>
-            <p:ph idx="1" type="body"/>
+            <p:ph type="body" idx="1"/>
           </p:nvPr>
         </p:nvSpPr>
         <p:spPr>
@@ -1078,12 +1116,12 @@
           </a:prstGeom>
         </p:spPr>
         <p:txBody>
-          <a:bodyPr anchorCtr="0" anchor="t" bIns="91425" lIns="91425" spcFirstLastPara="1" rIns="91425" wrap="square" tIns="91425">
+          <a:bodyPr spcFirstLastPara="1" wrap="square" lIns="91425" tIns="91425" rIns="91425" bIns="91425" anchor="t" anchorCtr="0">
             <a:noAutofit/>
           </a:bodyPr>
           <a:lstStyle/>
           <a:p>
-            <a:pPr indent="0" lvl="0" marL="0" rtl="0" algn="l">
+            <a:pPr marL="0" lvl="0" indent="0" algn="l" rtl="0">
               <a:spcBef>
                 <a:spcPts val="0"/>
               </a:spcBef>
@@ -1092,9 +1130,6 @@
               </a:spcAft>
               <a:buNone/>
             </a:pPr>
-            <a:r>
-              <a:t/>
-            </a:r>
             <a:endParaRPr/>
           </a:p>
         </p:txBody>
@@ -1108,11 +1143,11 @@
 </file>
 
 <file path=ppt/notesSlides/notesSlide4.xml><?xml version="1.0" encoding="utf-8"?>
-<p:notes xmlns:a="http://schemas.openxmlformats.org/drawingml/2006/main" xmlns:r="http://schemas.openxmlformats.org/officeDocument/2006/relationships" xmlns:mc="http://schemas.openxmlformats.org/markup-compatibility/2006" xmlns:mv="urn:schemas-microsoft-com:mac:vml" xmlns:p="http://schemas.openxmlformats.org/presentationml/2006/main" xmlns:c="http://schemas.openxmlformats.org/drawingml/2006/chart" xmlns:dgm="http://schemas.openxmlformats.org/drawingml/2006/diagram" xmlns:o="urn:schemas-microsoft-com:office:office" xmlns:v="urn:schemas-microsoft-com:vml" xmlns:pvml="urn:schemas-microsoft-com:office:powerpoint" xmlns:com="http://schemas.openxmlformats.org/drawingml/2006/compatibility" xmlns:p14="http://schemas.microsoft.com/office/powerpoint/2010/main" xmlns:p15="http://schemas.microsoft.com/office/powerpoint/2012/main" xmlns:ahyp="http://schemas.microsoft.com/office/drawing/2018/hyperlinkcolor" showMasterPhAnim="0" showMasterSp="0">
+<p:notes xmlns:a="http://schemas.openxmlformats.org/drawingml/2006/main" xmlns:r="http://schemas.openxmlformats.org/officeDocument/2006/relationships" xmlns:p="http://schemas.openxmlformats.org/presentationml/2006/main" showMasterSp="0" showMasterPhAnim="0">
   <p:cSld>
     <p:spTree>
       <p:nvGrpSpPr>
-        <p:cNvPr id="94" name="Shape 94"/>
+        <p:cNvPr id="1" name="Shape 94"/>
         <p:cNvGrpSpPr/>
         <p:nvPr/>
       </p:nvGrpSpPr>
@@ -1127,9 +1162,11 @@
       <p:sp>
         <p:nvSpPr>
           <p:cNvPr id="95" name="Google Shape;95;g3aaa3262fd7_0_6:notes"/>
-          <p:cNvSpPr/>
+          <p:cNvSpPr>
+            <a:spLocks noGrp="1" noRot="1" noChangeAspect="1"/>
+          </p:cNvSpPr>
           <p:nvPr>
-            <p:ph idx="2" type="sldImg"/>
+            <p:ph type="sldImg" idx="2"/>
           </p:nvPr>
         </p:nvSpPr>
         <p:spPr>
@@ -1138,9 +1175,13 @@
             <a:ext cx="6096000" cy="3429000"/>
           </a:xfrm>
           <a:custGeom>
-            <a:rect b="b" l="l" r="r" t="t"/>
+            <a:avLst/>
+            <a:gdLst/>
+            <a:ahLst/>
+            <a:cxnLst/>
+            <a:rect l="l" t="t" r="r" b="b"/>
             <a:pathLst>
-              <a:path extrusionOk="0" h="120000" w="120000">
+              <a:path w="120000" h="120000" extrusionOk="0">
                 <a:moveTo>
                   <a:pt x="0" y="0"/>
                 </a:moveTo>
@@ -1162,9 +1203,11 @@
       <p:sp>
         <p:nvSpPr>
           <p:cNvPr id="96" name="Google Shape;96;g3aaa3262fd7_0_6:notes"/>
-          <p:cNvSpPr txBox="1"/>
+          <p:cNvSpPr txBox="1">
+            <a:spLocks noGrp="1"/>
+          </p:cNvSpPr>
           <p:nvPr>
-            <p:ph idx="1" type="body"/>
+            <p:ph type="body" idx="1"/>
           </p:nvPr>
         </p:nvSpPr>
         <p:spPr>
@@ -1177,12 +1220,12 @@
           </a:prstGeom>
         </p:spPr>
         <p:txBody>
-          <a:bodyPr anchorCtr="0" anchor="t" bIns="91425" lIns="91425" spcFirstLastPara="1" rIns="91425" wrap="square" tIns="91425">
+          <a:bodyPr spcFirstLastPara="1" wrap="square" lIns="91425" tIns="91425" rIns="91425" bIns="91425" anchor="t" anchorCtr="0">
             <a:noAutofit/>
           </a:bodyPr>
           <a:lstStyle/>
           <a:p>
-            <a:pPr indent="0" lvl="0" marL="0" rtl="0" algn="l">
+            <a:pPr marL="0" lvl="0" indent="0" algn="l" rtl="0">
               <a:spcBef>
                 <a:spcPts val="0"/>
               </a:spcBef>
@@ -1191,9 +1234,6 @@
               </a:spcAft>
               <a:buNone/>
             </a:pPr>
-            <a:r>
-              <a:t/>
-            </a:r>
             <a:endParaRPr/>
           </a:p>
         </p:txBody>
@@ -1207,11 +1247,11 @@
 </file>
 
 <file path=ppt/notesSlides/notesSlide5.xml><?xml version="1.0" encoding="utf-8"?>
-<p:notes xmlns:a="http://schemas.openxmlformats.org/drawingml/2006/main" xmlns:r="http://schemas.openxmlformats.org/officeDocument/2006/relationships" xmlns:mc="http://schemas.openxmlformats.org/markup-compatibility/2006" xmlns:mv="urn:schemas-microsoft-com:mac:vml" xmlns:p="http://schemas.openxmlformats.org/presentationml/2006/main" xmlns:c="http://schemas.openxmlformats.org/drawingml/2006/chart" xmlns:dgm="http://schemas.openxmlformats.org/drawingml/2006/diagram" xmlns:o="urn:schemas-microsoft-com:office:office" xmlns:v="urn:schemas-microsoft-com:vml" xmlns:pvml="urn:schemas-microsoft-com:office:powerpoint" xmlns:com="http://schemas.openxmlformats.org/drawingml/2006/compatibility" xmlns:p14="http://schemas.microsoft.com/office/powerpoint/2010/main" xmlns:p15="http://schemas.microsoft.com/office/powerpoint/2012/main" xmlns:ahyp="http://schemas.microsoft.com/office/drawing/2018/hyperlinkcolor" showMasterPhAnim="0" showMasterSp="0">
+<p:notes xmlns:a="http://schemas.openxmlformats.org/drawingml/2006/main" xmlns:r="http://schemas.openxmlformats.org/officeDocument/2006/relationships" xmlns:p="http://schemas.openxmlformats.org/presentationml/2006/main" showMasterSp="0" showMasterPhAnim="0">
   <p:cSld>
     <p:spTree>
       <p:nvGrpSpPr>
-        <p:cNvPr id="102" name="Shape 102"/>
+        <p:cNvPr id="1" name="Shape 102"/>
         <p:cNvGrpSpPr/>
         <p:nvPr/>
       </p:nvGrpSpPr>
@@ -1226,9 +1266,11 @@
       <p:sp>
         <p:nvSpPr>
           <p:cNvPr id="103" name="Google Shape;103;g3aabf1518c0_1_4:notes"/>
-          <p:cNvSpPr/>
+          <p:cNvSpPr>
+            <a:spLocks noGrp="1" noRot="1" noChangeAspect="1"/>
+          </p:cNvSpPr>
           <p:nvPr>
-            <p:ph idx="2" type="sldImg"/>
+            <p:ph type="sldImg" idx="2"/>
           </p:nvPr>
         </p:nvSpPr>
         <p:spPr>
@@ -1237,9 +1279,13 @@
             <a:ext cx="6096000" cy="3429000"/>
           </a:xfrm>
           <a:custGeom>
-            <a:rect b="b" l="l" r="r" t="t"/>
+            <a:avLst/>
+            <a:gdLst/>
+            <a:ahLst/>
+            <a:cxnLst/>
+            <a:rect l="l" t="t" r="r" b="b"/>
             <a:pathLst>
-              <a:path extrusionOk="0" h="120000" w="120000">
+              <a:path w="120000" h="120000" extrusionOk="0">
                 <a:moveTo>
                   <a:pt x="0" y="0"/>
                 </a:moveTo>
@@ -1261,9 +1307,11 @@
       <p:sp>
         <p:nvSpPr>
           <p:cNvPr id="104" name="Google Shape;104;g3aabf1518c0_1_4:notes"/>
-          <p:cNvSpPr txBox="1"/>
+          <p:cNvSpPr txBox="1">
+            <a:spLocks noGrp="1"/>
+          </p:cNvSpPr>
           <p:nvPr>
-            <p:ph idx="1" type="body"/>
+            <p:ph type="body" idx="1"/>
           </p:nvPr>
         </p:nvSpPr>
         <p:spPr>
@@ -1276,12 +1324,12 @@
           </a:prstGeom>
         </p:spPr>
         <p:txBody>
-          <a:bodyPr anchorCtr="0" anchor="t" bIns="91425" lIns="91425" spcFirstLastPara="1" rIns="91425" wrap="square" tIns="91425">
+          <a:bodyPr spcFirstLastPara="1" wrap="square" lIns="91425" tIns="91425" rIns="91425" bIns="91425" anchor="t" anchorCtr="0">
             <a:noAutofit/>
           </a:bodyPr>
           <a:lstStyle/>
           <a:p>
-            <a:pPr indent="0" lvl="0" marL="0" rtl="0" algn="l">
+            <a:pPr marL="0" lvl="0" indent="0" algn="l" rtl="0">
               <a:spcBef>
                 <a:spcPts val="0"/>
               </a:spcBef>
@@ -1290,9 +1338,6 @@
               </a:spcAft>
               <a:buNone/>
             </a:pPr>
-            <a:r>
-              <a:t/>
-            </a:r>
             <a:endParaRPr/>
           </a:p>
         </p:txBody>
@@ -1306,11 +1351,11 @@
 </file>
 
 <file path=ppt/notesSlides/notesSlide6.xml><?xml version="1.0" encoding="utf-8"?>
-<p:notes xmlns:a="http://schemas.openxmlformats.org/drawingml/2006/main" xmlns:r="http://schemas.openxmlformats.org/officeDocument/2006/relationships" xmlns:mc="http://schemas.openxmlformats.org/markup-compatibility/2006" xmlns:mv="urn:schemas-microsoft-com:mac:vml" xmlns:p="http://schemas.openxmlformats.org/presentationml/2006/main" xmlns:c="http://schemas.openxmlformats.org/drawingml/2006/chart" xmlns:dgm="http://schemas.openxmlformats.org/drawingml/2006/diagram" xmlns:o="urn:schemas-microsoft-com:office:office" xmlns:v="urn:schemas-microsoft-com:vml" xmlns:pvml="urn:schemas-microsoft-com:office:powerpoint" xmlns:com="http://schemas.openxmlformats.org/drawingml/2006/compatibility" xmlns:p14="http://schemas.microsoft.com/office/powerpoint/2010/main" xmlns:p15="http://schemas.microsoft.com/office/powerpoint/2012/main" xmlns:ahyp="http://schemas.microsoft.com/office/drawing/2018/hyperlinkcolor" showMasterPhAnim="0" showMasterSp="0">
+<p:notes xmlns:a="http://schemas.openxmlformats.org/drawingml/2006/main" xmlns:r="http://schemas.openxmlformats.org/officeDocument/2006/relationships" xmlns:p="http://schemas.openxmlformats.org/presentationml/2006/main" showMasterSp="0" showMasterPhAnim="0">
   <p:cSld>
     <p:spTree>
       <p:nvGrpSpPr>
-        <p:cNvPr id="113" name="Shape 113"/>
+        <p:cNvPr id="1" name="Shape 113"/>
         <p:cNvGrpSpPr/>
         <p:nvPr/>
       </p:nvGrpSpPr>
@@ -1325,9 +1370,11 @@
       <p:sp>
         <p:nvSpPr>
           <p:cNvPr id="114" name="Google Shape;114;g3aacb908870_0_4:notes"/>
-          <p:cNvSpPr/>
+          <p:cNvSpPr>
+            <a:spLocks noGrp="1" noRot="1" noChangeAspect="1"/>
+          </p:cNvSpPr>
           <p:nvPr>
-            <p:ph idx="2" type="sldImg"/>
+            <p:ph type="sldImg" idx="2"/>
           </p:nvPr>
         </p:nvSpPr>
         <p:spPr>
@@ -1336,9 +1383,13 @@
             <a:ext cx="6096000" cy="3429000"/>
           </a:xfrm>
           <a:custGeom>
-            <a:rect b="b" l="l" r="r" t="t"/>
+            <a:avLst/>
+            <a:gdLst/>
+            <a:ahLst/>
+            <a:cxnLst/>
+            <a:rect l="l" t="t" r="r" b="b"/>
             <a:pathLst>
-              <a:path extrusionOk="0" h="120000" w="120000">
+              <a:path w="120000" h="120000" extrusionOk="0">
                 <a:moveTo>
                   <a:pt x="0" y="0"/>
                 </a:moveTo>
@@ -1360,9 +1411,11 @@
       <p:sp>
         <p:nvSpPr>
           <p:cNvPr id="115" name="Google Shape;115;g3aacb908870_0_4:notes"/>
-          <p:cNvSpPr txBox="1"/>
+          <p:cNvSpPr txBox="1">
+            <a:spLocks noGrp="1"/>
+          </p:cNvSpPr>
           <p:nvPr>
-            <p:ph idx="1" type="body"/>
+            <p:ph type="body" idx="1"/>
           </p:nvPr>
         </p:nvSpPr>
         <p:spPr>
@@ -1375,12 +1428,12 @@
           </a:prstGeom>
         </p:spPr>
         <p:txBody>
-          <a:bodyPr anchorCtr="0" anchor="t" bIns="91425" lIns="91425" spcFirstLastPara="1" rIns="91425" wrap="square" tIns="91425">
+          <a:bodyPr spcFirstLastPara="1" wrap="square" lIns="91425" tIns="91425" rIns="91425" bIns="91425" anchor="t" anchorCtr="0">
             <a:noAutofit/>
           </a:bodyPr>
           <a:lstStyle/>
           <a:p>
-            <a:pPr indent="0" lvl="0" marL="0" rtl="0" algn="l">
+            <a:pPr marL="0" lvl="0" indent="0" algn="l" rtl="0">
               <a:spcBef>
                 <a:spcPts val="0"/>
               </a:spcBef>
@@ -1389,9 +1442,6 @@
               </a:spcAft>
               <a:buNone/>
             </a:pPr>
-            <a:r>
-              <a:t/>
-            </a:r>
             <a:endParaRPr/>
           </a:p>
         </p:txBody>
@@ -1405,11 +1455,11 @@
 </file>
 
 <file path=ppt/notesSlides/notesSlide7.xml><?xml version="1.0" encoding="utf-8"?>
-<p:notes xmlns:a="http://schemas.openxmlformats.org/drawingml/2006/main" xmlns:r="http://schemas.openxmlformats.org/officeDocument/2006/relationships" xmlns:mc="http://schemas.openxmlformats.org/markup-compatibility/2006" xmlns:mv="urn:schemas-microsoft-com:mac:vml" xmlns:p="http://schemas.openxmlformats.org/presentationml/2006/main" xmlns:c="http://schemas.openxmlformats.org/drawingml/2006/chart" xmlns:dgm="http://schemas.openxmlformats.org/drawingml/2006/diagram" xmlns:o="urn:schemas-microsoft-com:office:office" xmlns:v="urn:schemas-microsoft-com:vml" xmlns:pvml="urn:schemas-microsoft-com:office:powerpoint" xmlns:com="http://schemas.openxmlformats.org/drawingml/2006/compatibility" xmlns:p14="http://schemas.microsoft.com/office/powerpoint/2010/main" xmlns:p15="http://schemas.microsoft.com/office/powerpoint/2012/main" xmlns:ahyp="http://schemas.microsoft.com/office/drawing/2018/hyperlinkcolor" showMasterPhAnim="0" showMasterSp="0">
+<p:notes xmlns:a="http://schemas.openxmlformats.org/drawingml/2006/main" xmlns:r="http://schemas.openxmlformats.org/officeDocument/2006/relationships" xmlns:p="http://schemas.openxmlformats.org/presentationml/2006/main" showMasterSp="0" showMasterPhAnim="0">
   <p:cSld>
     <p:spTree>
       <p:nvGrpSpPr>
-        <p:cNvPr id="128" name="Shape 128"/>
+        <p:cNvPr id="1" name="Shape 128"/>
         <p:cNvGrpSpPr/>
         <p:nvPr/>
       </p:nvGrpSpPr>
@@ -1424,9 +1474,11 @@
       <p:sp>
         <p:nvSpPr>
           <p:cNvPr id="129" name="Google Shape;129;g3aacb908870_0_32:notes"/>
-          <p:cNvSpPr/>
+          <p:cNvSpPr>
+            <a:spLocks noGrp="1" noRot="1" noChangeAspect="1"/>
+          </p:cNvSpPr>
           <p:nvPr>
-            <p:ph idx="2" type="sldImg"/>
+            <p:ph type="sldImg" idx="2"/>
           </p:nvPr>
         </p:nvSpPr>
         <p:spPr>
@@ -1435,9 +1487,13 @@
             <a:ext cx="6096000" cy="3429000"/>
           </a:xfrm>
           <a:custGeom>
-            <a:rect b="b" l="l" r="r" t="t"/>
+            <a:avLst/>
+            <a:gdLst/>
+            <a:ahLst/>
+            <a:cxnLst/>
+            <a:rect l="l" t="t" r="r" b="b"/>
             <a:pathLst>
-              <a:path extrusionOk="0" h="120000" w="120000">
+              <a:path w="120000" h="120000" extrusionOk="0">
                 <a:moveTo>
                   <a:pt x="0" y="0"/>
                 </a:moveTo>
@@ -1459,9 +1515,11 @@
       <p:sp>
         <p:nvSpPr>
           <p:cNvPr id="130" name="Google Shape;130;g3aacb908870_0_32:notes"/>
-          <p:cNvSpPr txBox="1"/>
+          <p:cNvSpPr txBox="1">
+            <a:spLocks noGrp="1"/>
+          </p:cNvSpPr>
           <p:nvPr>
-            <p:ph idx="1" type="body"/>
+            <p:ph type="body" idx="1"/>
           </p:nvPr>
         </p:nvSpPr>
         <p:spPr>
@@ -1474,12 +1532,12 @@
           </a:prstGeom>
         </p:spPr>
         <p:txBody>
-          <a:bodyPr anchorCtr="0" anchor="t" bIns="91425" lIns="91425" spcFirstLastPara="1" rIns="91425" wrap="square" tIns="91425">
+          <a:bodyPr spcFirstLastPara="1" wrap="square" lIns="91425" tIns="91425" rIns="91425" bIns="91425" anchor="t" anchorCtr="0">
             <a:noAutofit/>
           </a:bodyPr>
           <a:lstStyle/>
           <a:p>
-            <a:pPr indent="0" lvl="0" marL="0" rtl="0" algn="l">
+            <a:pPr marL="0" lvl="0" indent="0" algn="l" rtl="0">
               <a:spcBef>
                 <a:spcPts val="0"/>
               </a:spcBef>
@@ -1488,9 +1546,6 @@
               </a:spcAft>
               <a:buNone/>
             </a:pPr>
-            <a:r>
-              <a:t/>
-            </a:r>
             <a:endParaRPr/>
           </a:p>
         </p:txBody>
@@ -1504,11 +1559,11 @@
 </file>
 
 <file path=ppt/notesSlides/notesSlide8.xml><?xml version="1.0" encoding="utf-8"?>
-<p:notes xmlns:a="http://schemas.openxmlformats.org/drawingml/2006/main" xmlns:r="http://schemas.openxmlformats.org/officeDocument/2006/relationships" xmlns:mc="http://schemas.openxmlformats.org/markup-compatibility/2006" xmlns:mv="urn:schemas-microsoft-com:mac:vml" xmlns:p="http://schemas.openxmlformats.org/presentationml/2006/main" xmlns:c="http://schemas.openxmlformats.org/drawingml/2006/chart" xmlns:dgm="http://schemas.openxmlformats.org/drawingml/2006/diagram" xmlns:o="urn:schemas-microsoft-com:office:office" xmlns:v="urn:schemas-microsoft-com:vml" xmlns:pvml="urn:schemas-microsoft-com:office:powerpoint" xmlns:com="http://schemas.openxmlformats.org/drawingml/2006/compatibility" xmlns:p14="http://schemas.microsoft.com/office/powerpoint/2010/main" xmlns:p15="http://schemas.microsoft.com/office/powerpoint/2012/main" xmlns:ahyp="http://schemas.microsoft.com/office/drawing/2018/hyperlinkcolor" showMasterPhAnim="0" showMasterSp="0">
+<p:notes xmlns:a="http://schemas.openxmlformats.org/drawingml/2006/main" xmlns:r="http://schemas.openxmlformats.org/officeDocument/2006/relationships" xmlns:p="http://schemas.openxmlformats.org/presentationml/2006/main" showMasterSp="0" showMasterPhAnim="0">
   <p:cSld>
     <p:spTree>
       <p:nvGrpSpPr>
-        <p:cNvPr id="133" name="Shape 133"/>
+        <p:cNvPr id="1" name="Shape 133"/>
         <p:cNvGrpSpPr/>
         <p:nvPr/>
       </p:nvGrpSpPr>
@@ -1523,9 +1578,11 @@
       <p:sp>
         <p:nvSpPr>
           <p:cNvPr id="134" name="Google Shape;134;g3aabf1518c0_1_21:notes"/>
-          <p:cNvSpPr/>
+          <p:cNvSpPr>
+            <a:spLocks noGrp="1" noRot="1" noChangeAspect="1"/>
+          </p:cNvSpPr>
           <p:nvPr>
-            <p:ph idx="2" type="sldImg"/>
+            <p:ph type="sldImg" idx="2"/>
           </p:nvPr>
         </p:nvSpPr>
         <p:spPr>
@@ -1534,9 +1591,13 @@
             <a:ext cx="6096000" cy="3429000"/>
           </a:xfrm>
           <a:custGeom>
-            <a:rect b="b" l="l" r="r" t="t"/>
+            <a:avLst/>
+            <a:gdLst/>
+            <a:ahLst/>
+            <a:cxnLst/>
+            <a:rect l="l" t="t" r="r" b="b"/>
             <a:pathLst>
-              <a:path extrusionOk="0" h="120000" w="120000">
+              <a:path w="120000" h="120000" extrusionOk="0">
                 <a:moveTo>
                   <a:pt x="0" y="0"/>
                 </a:moveTo>
@@ -1558,9 +1619,11 @@
       <p:sp>
         <p:nvSpPr>
           <p:cNvPr id="135" name="Google Shape;135;g3aabf1518c0_1_21:notes"/>
-          <p:cNvSpPr txBox="1"/>
+          <p:cNvSpPr txBox="1">
+            <a:spLocks noGrp="1"/>
+          </p:cNvSpPr>
           <p:nvPr>
-            <p:ph idx="1" type="body"/>
+            <p:ph type="body" idx="1"/>
           </p:nvPr>
         </p:nvSpPr>
         <p:spPr>
@@ -1573,12 +1636,12 @@
           </a:prstGeom>
         </p:spPr>
         <p:txBody>
-          <a:bodyPr anchorCtr="0" anchor="t" bIns="91425" lIns="91425" spcFirstLastPara="1" rIns="91425" wrap="square" tIns="91425">
+          <a:bodyPr spcFirstLastPara="1" wrap="square" lIns="91425" tIns="91425" rIns="91425" bIns="91425" anchor="t" anchorCtr="0">
             <a:noAutofit/>
           </a:bodyPr>
           <a:lstStyle/>
           <a:p>
-            <a:pPr indent="0" lvl="0" marL="0" rtl="0" algn="l">
+            <a:pPr marL="0" lvl="0" indent="0" algn="l" rtl="0">
               <a:spcBef>
                 <a:spcPts val="0"/>
               </a:spcBef>
@@ -1587,9 +1650,6 @@
               </a:spcAft>
               <a:buNone/>
             </a:pPr>
-            <a:r>
-              <a:t/>
-            </a:r>
             <a:endParaRPr/>
           </a:p>
         </p:txBody>
@@ -1603,11 +1663,11 @@
 </file>
 
 <file path=ppt/notesSlides/notesSlide9.xml><?xml version="1.0" encoding="utf-8"?>
-<p:notes xmlns:a="http://schemas.openxmlformats.org/drawingml/2006/main" xmlns:r="http://schemas.openxmlformats.org/officeDocument/2006/relationships" xmlns:mc="http://schemas.openxmlformats.org/markup-compatibility/2006" xmlns:mv="urn:schemas-microsoft-com:mac:vml" xmlns:p="http://schemas.openxmlformats.org/presentationml/2006/main" xmlns:c="http://schemas.openxmlformats.org/drawingml/2006/chart" xmlns:dgm="http://schemas.openxmlformats.org/drawingml/2006/diagram" xmlns:o="urn:schemas-microsoft-com:office:office" xmlns:v="urn:schemas-microsoft-com:vml" xmlns:pvml="urn:schemas-microsoft-com:office:powerpoint" xmlns:com="http://schemas.openxmlformats.org/drawingml/2006/compatibility" xmlns:p14="http://schemas.microsoft.com/office/powerpoint/2010/main" xmlns:p15="http://schemas.microsoft.com/office/powerpoint/2012/main" xmlns:ahyp="http://schemas.microsoft.com/office/drawing/2018/hyperlinkcolor" showMasterPhAnim="0" showMasterSp="0">
+<p:notes xmlns:a="http://schemas.openxmlformats.org/drawingml/2006/main" xmlns:r="http://schemas.openxmlformats.org/officeDocument/2006/relationships" xmlns:p="http://schemas.openxmlformats.org/presentationml/2006/main" showMasterSp="0" showMasterPhAnim="0">
   <p:cSld>
     <p:spTree>
       <p:nvGrpSpPr>
-        <p:cNvPr id="139" name="Shape 139"/>
+        <p:cNvPr id="1" name="Shape 139"/>
         <p:cNvGrpSpPr/>
         <p:nvPr/>
       </p:nvGrpSpPr>
@@ -1622,9 +1682,11 @@
       <p:sp>
         <p:nvSpPr>
           <p:cNvPr id="140" name="Google Shape;140;g3aacb908870_0_37:notes"/>
-          <p:cNvSpPr/>
+          <p:cNvSpPr>
+            <a:spLocks noGrp="1" noRot="1" noChangeAspect="1"/>
+          </p:cNvSpPr>
           <p:nvPr>
-            <p:ph idx="2" type="sldImg"/>
+            <p:ph type="sldImg" idx="2"/>
           </p:nvPr>
         </p:nvSpPr>
         <p:spPr>
@@ -1633,9 +1695,13 @@
             <a:ext cx="6096000" cy="3429000"/>
           </a:xfrm>
           <a:custGeom>
-            <a:rect b="b" l="l" r="r" t="t"/>
+            <a:avLst/>
+            <a:gdLst/>
+            <a:ahLst/>
+            <a:cxnLst/>
+            <a:rect l="l" t="t" r="r" b="b"/>
             <a:pathLst>
-              <a:path extrusionOk="0" h="120000" w="120000">
+              <a:path w="120000" h="120000" extrusionOk="0">
                 <a:moveTo>
                   <a:pt x="0" y="0"/>
                 </a:moveTo>
@@ -1657,9 +1723,11 @@
       <p:sp>
         <p:nvSpPr>
           <p:cNvPr id="141" name="Google Shape;141;g3aacb908870_0_37:notes"/>
-          <p:cNvSpPr txBox="1"/>
+          <p:cNvSpPr txBox="1">
+            <a:spLocks noGrp="1"/>
+          </p:cNvSpPr>
           <p:nvPr>
-            <p:ph idx="1" type="body"/>
+            <p:ph type="body" idx="1"/>
           </p:nvPr>
         </p:nvSpPr>
         <p:spPr>
@@ -1672,12 +1740,12 @@
           </a:prstGeom>
         </p:spPr>
         <p:txBody>
-          <a:bodyPr anchorCtr="0" anchor="t" bIns="91425" lIns="91425" spcFirstLastPara="1" rIns="91425" wrap="square" tIns="91425">
+          <a:bodyPr spcFirstLastPara="1" wrap="square" lIns="91425" tIns="91425" rIns="91425" bIns="91425" anchor="t" anchorCtr="0">
             <a:noAutofit/>
           </a:bodyPr>
           <a:lstStyle/>
           <a:p>
-            <a:pPr indent="0" lvl="0" marL="0" rtl="0" algn="l">
+            <a:pPr marL="0" lvl="0" indent="0" algn="l" rtl="0">
               <a:spcBef>
                 <a:spcPts val="0"/>
               </a:spcBef>
@@ -1686,9 +1754,6 @@
               </a:spcAft>
               <a:buNone/>
             </a:pPr>
-            <a:r>
-              <a:t/>
-            </a:r>
             <a:endParaRPr/>
           </a:p>
         </p:txBody>
@@ -1702,18 +1767,19 @@
 </file>
 
 <file path=ppt/slideLayouts/slideLayout1.xml><?xml version="1.0" encoding="utf-8"?>
-<p:sldLayout xmlns:a="http://schemas.openxmlformats.org/drawingml/2006/main" xmlns:r="http://schemas.openxmlformats.org/officeDocument/2006/relationships" xmlns:mc="http://schemas.openxmlformats.org/markup-compatibility/2006" xmlns:mv="urn:schemas-microsoft-com:mac:vml" xmlns:p="http://schemas.openxmlformats.org/presentationml/2006/main" xmlns:c="http://schemas.openxmlformats.org/drawingml/2006/chart" xmlns:dgm="http://schemas.openxmlformats.org/drawingml/2006/diagram" xmlns:o="urn:schemas-microsoft-com:office:office" xmlns:v="urn:schemas-microsoft-com:vml" xmlns:pvml="urn:schemas-microsoft-com:office:powerpoint" xmlns:com="http://schemas.openxmlformats.org/drawingml/2006/compatibility" xmlns:p14="http://schemas.microsoft.com/office/powerpoint/2010/main" xmlns:p15="http://schemas.microsoft.com/office/powerpoint/2012/main" xmlns:ahyp="http://schemas.microsoft.com/office/drawing/2018/hyperlinkcolor" matchingName="Title slide" type="title">
+<p:sldLayout xmlns:a="http://schemas.openxmlformats.org/drawingml/2006/main" xmlns:r="http://schemas.openxmlformats.org/officeDocument/2006/relationships" xmlns:p="http://schemas.openxmlformats.org/presentationml/2006/main" matchingName="Title slide" type="title">
   <p:cSld name="TITLE">
     <p:bg>
       <p:bgPr>
         <a:solidFill>
           <a:schemeClr val="dk1"/>
         </a:solidFill>
+        <a:effectLst/>
       </p:bgPr>
     </p:bg>
     <p:spTree>
       <p:nvGrpSpPr>
-        <p:cNvPr id="9" name="Shape 9"/>
+        <p:cNvPr id="1" name="Shape 9"/>
         <p:cNvGrpSpPr/>
         <p:nvPr/>
       </p:nvGrpSpPr>
@@ -1740,14 +1806,14 @@
             <a:avLst/>
           </a:prstGeom>
           <a:noFill/>
-          <a:ln cap="flat" cmpd="sng" w="38100">
+          <a:ln w="38100" cap="flat" cmpd="sng">
             <a:solidFill>
               <a:schemeClr val="lt1"/>
             </a:solidFill>
             <a:prstDash val="solid"/>
             <a:round/>
-            <a:headEnd len="sm" w="sm" type="none"/>
-            <a:tailEnd len="sm" w="sm" type="none"/>
+            <a:headEnd type="none" w="sm" len="sm"/>
+            <a:tailEnd type="none" w="sm" len="sm"/>
           </a:ln>
         </p:spPr>
       </p:cxnSp>
@@ -1766,14 +1832,14 @@
             <a:avLst/>
           </a:prstGeom>
           <a:noFill/>
-          <a:ln cap="flat" cmpd="sng" w="19050">
+          <a:ln w="19050" cap="flat" cmpd="sng">
             <a:solidFill>
               <a:schemeClr val="lt1"/>
             </a:solidFill>
             <a:prstDash val="solid"/>
             <a:round/>
-            <a:headEnd len="sm" w="sm" type="none"/>
-            <a:tailEnd len="sm" w="sm" type="none"/>
+            <a:headEnd type="none" w="sm" len="sm"/>
+            <a:tailEnd type="none" w="sm" len="sm"/>
           </a:ln>
         </p:spPr>
       </p:cxnSp>
@@ -1792,21 +1858,23 @@
             <a:avLst/>
           </a:prstGeom>
           <a:noFill/>
-          <a:ln cap="flat" cmpd="sng" w="19050">
+          <a:ln w="19050" cap="flat" cmpd="sng">
             <a:solidFill>
               <a:schemeClr val="lt1"/>
             </a:solidFill>
             <a:prstDash val="solid"/>
             <a:round/>
-            <a:headEnd len="sm" w="sm" type="none"/>
-            <a:tailEnd len="sm" w="sm" type="none"/>
+            <a:headEnd type="none" w="sm" len="sm"/>
+            <a:tailEnd type="none" w="sm" len="sm"/>
           </a:ln>
         </p:spPr>
       </p:cxnSp>
       <p:sp>
         <p:nvSpPr>
           <p:cNvPr id="13" name="Google Shape;13;p2"/>
-          <p:cNvSpPr txBox="1"/>
+          <p:cNvSpPr txBox="1">
+            <a:spLocks noGrp="1"/>
+          </p:cNvSpPr>
           <p:nvPr>
             <p:ph type="ctrTitle"/>
           </p:nvPr>
@@ -1821,7 +1889,7 @@
           </a:prstGeom>
         </p:spPr>
         <p:txBody>
-          <a:bodyPr anchorCtr="0" anchor="t" bIns="91425" lIns="91425" spcFirstLastPara="1" rIns="91425" wrap="square" tIns="91425">
+          <a:bodyPr spcFirstLastPara="1" wrap="square" lIns="91425" tIns="91425" rIns="91425" bIns="91425" anchor="t" anchorCtr="0">
             <a:noAutofit/>
           </a:bodyPr>
           <a:lstStyle>
@@ -1988,15 +2056,19 @@
               </a:defRPr>
             </a:lvl9pPr>
           </a:lstStyle>
-          <a:p/>
+          <a:p>
+            <a:endParaRPr/>
+          </a:p>
         </p:txBody>
       </p:sp>
       <p:sp>
         <p:nvSpPr>
           <p:cNvPr id="14" name="Google Shape;14;p2"/>
-          <p:cNvSpPr txBox="1"/>
+          <p:cNvSpPr txBox="1">
+            <a:spLocks noGrp="1"/>
+          </p:cNvSpPr>
           <p:nvPr>
-            <p:ph idx="1" type="subTitle"/>
+            <p:ph type="subTitle" idx="1"/>
           </p:nvPr>
         </p:nvSpPr>
         <p:spPr>
@@ -2009,7 +2081,7 @@
           </a:prstGeom>
         </p:spPr>
         <p:txBody>
-          <a:bodyPr anchorCtr="0" anchor="b" bIns="91425" lIns="91425" spcFirstLastPara="1" rIns="91425" wrap="square" tIns="91425">
+          <a:bodyPr spcFirstLastPara="1" wrap="square" lIns="91425" tIns="91425" rIns="91425" bIns="91425" anchor="b" anchorCtr="0">
             <a:noAutofit/>
           </a:bodyPr>
           <a:lstStyle>
@@ -2203,15 +2275,19 @@
               </a:defRPr>
             </a:lvl9pPr>
           </a:lstStyle>
-          <a:p/>
+          <a:p>
+            <a:endParaRPr/>
+          </a:p>
         </p:txBody>
       </p:sp>
       <p:sp>
         <p:nvSpPr>
           <p:cNvPr id="15" name="Google Shape;15;p2"/>
-          <p:cNvSpPr txBox="1"/>
+          <p:cNvSpPr txBox="1">
+            <a:spLocks noGrp="1"/>
+          </p:cNvSpPr>
           <p:nvPr>
-            <p:ph idx="12" type="sldNum"/>
+            <p:ph type="sldNum" idx="12"/>
           </p:nvPr>
         </p:nvSpPr>
         <p:spPr>
@@ -2224,7 +2300,7 @@
           </a:prstGeom>
         </p:spPr>
         <p:txBody>
-          <a:bodyPr anchorCtr="0" anchor="ctr" bIns="91425" lIns="91425" spcFirstLastPara="1" rIns="91425" wrap="square" tIns="91425">
+          <a:bodyPr spcFirstLastPara="1" wrap="square" lIns="91425" tIns="91425" rIns="91425" bIns="91425" anchor="ctr" anchorCtr="0">
             <a:noAutofit/>
           </a:bodyPr>
           <a:lstStyle>
@@ -2302,7 +2378,7 @@
             </a:lvl9pPr>
           </a:lstStyle>
           <a:p>
-            <a:pPr indent="0" lvl="0" marL="0" rtl="0" algn="r">
+            <a:pPr marL="0" lvl="0" indent="0" algn="r" rtl="0">
               <a:spcBef>
                 <a:spcPts val="0"/>
               </a:spcBef>
@@ -2313,7 +2389,7 @@
             </a:pPr>
             <a:fld id="{00000000-1234-1234-1234-123412341234}" type="slidenum">
               <a:rPr lang="it"/>
-              <a:t>‹#›</a:t>
+              <a:t>‹N›</a:t>
             </a:fld>
             <a:endParaRPr/>
           </a:p>
@@ -2328,11 +2404,11 @@
 </file>
 
 <file path=ppt/slideLayouts/slideLayout10.xml><?xml version="1.0" encoding="utf-8"?>
-<p:sldLayout xmlns:a="http://schemas.openxmlformats.org/drawingml/2006/main" xmlns:r="http://schemas.openxmlformats.org/officeDocument/2006/relationships" xmlns:mc="http://schemas.openxmlformats.org/markup-compatibility/2006" xmlns:mv="urn:schemas-microsoft-com:mac:vml" xmlns:p="http://schemas.openxmlformats.org/presentationml/2006/main" xmlns:c="http://schemas.openxmlformats.org/drawingml/2006/chart" xmlns:dgm="http://schemas.openxmlformats.org/drawingml/2006/diagram" xmlns:o="urn:schemas-microsoft-com:office:office" xmlns:v="urn:schemas-microsoft-com:vml" xmlns:pvml="urn:schemas-microsoft-com:office:powerpoint" xmlns:com="http://schemas.openxmlformats.org/drawingml/2006/compatibility" xmlns:p14="http://schemas.microsoft.com/office/powerpoint/2010/main" xmlns:p15="http://schemas.microsoft.com/office/powerpoint/2012/main" xmlns:ahyp="http://schemas.microsoft.com/office/drawing/2018/hyperlinkcolor" matchingName="Big number">
+<p:sldLayout xmlns:a="http://schemas.openxmlformats.org/drawingml/2006/main" xmlns:r="http://schemas.openxmlformats.org/officeDocument/2006/relationships" xmlns:p="http://schemas.openxmlformats.org/presentationml/2006/main" matchingName="Big number">
   <p:cSld name="BIG_NUMBER">
     <p:spTree>
       <p:nvGrpSpPr>
-        <p:cNvPr id="60" name="Shape 60"/>
+        <p:cNvPr id="1" name="Shape 60"/>
         <p:cNvGrpSpPr/>
         <p:nvPr/>
       </p:nvGrpSpPr>
@@ -2359,14 +2435,14 @@
             <a:avLst/>
           </a:prstGeom>
           <a:noFill/>
-          <a:ln cap="flat" cmpd="sng" w="19050">
+          <a:ln w="19050" cap="flat" cmpd="sng">
             <a:solidFill>
               <a:schemeClr val="dk2"/>
             </a:solidFill>
             <a:prstDash val="solid"/>
             <a:round/>
-            <a:headEnd len="sm" w="sm" type="none"/>
-            <a:tailEnd len="sm" w="sm" type="none"/>
+            <a:headEnd type="none" w="sm" len="sm"/>
+            <a:tailEnd type="none" w="sm" len="sm"/>
           </a:ln>
         </p:spPr>
       </p:cxnSp>
@@ -2385,23 +2461,25 @@
             <a:avLst/>
           </a:prstGeom>
           <a:noFill/>
-          <a:ln cap="flat" cmpd="sng" w="38100">
+          <a:ln w="38100" cap="flat" cmpd="sng">
             <a:solidFill>
               <a:schemeClr val="dk2"/>
             </a:solidFill>
             <a:prstDash val="solid"/>
             <a:round/>
-            <a:headEnd len="sm" w="sm" type="none"/>
-            <a:tailEnd len="sm" w="sm" type="none"/>
+            <a:headEnd type="none" w="sm" len="sm"/>
+            <a:tailEnd type="none" w="sm" len="sm"/>
           </a:ln>
         </p:spPr>
       </p:cxnSp>
       <p:sp>
         <p:nvSpPr>
           <p:cNvPr id="63" name="Google Shape;63;p11"/>
-          <p:cNvSpPr txBox="1"/>
+          <p:cNvSpPr txBox="1">
+            <a:spLocks noGrp="1"/>
+          </p:cNvSpPr>
           <p:nvPr>
-            <p:ph hasCustomPrompt="1" type="title"/>
+            <p:ph type="title" hasCustomPrompt="1"/>
           </p:nvPr>
         </p:nvSpPr>
         <p:spPr>
@@ -2414,7 +2492,7 @@
           </a:prstGeom>
         </p:spPr>
         <p:txBody>
-          <a:bodyPr anchorCtr="0" anchor="ctr" bIns="91425" lIns="91425" spcFirstLastPara="1" rIns="91425" wrap="square" tIns="91425">
+          <a:bodyPr spcFirstLastPara="1" wrap="square" lIns="91425" tIns="91425" rIns="91425" bIns="91425" anchor="ctr" anchorCtr="0">
             <a:noAutofit/>
           </a:bodyPr>
           <a:lstStyle>
@@ -2636,9 +2714,11 @@
       <p:sp>
         <p:nvSpPr>
           <p:cNvPr id="64" name="Google Shape;64;p11"/>
-          <p:cNvSpPr txBox="1"/>
+          <p:cNvSpPr txBox="1">
+            <a:spLocks noGrp="1"/>
+          </p:cNvSpPr>
           <p:nvPr>
-            <p:ph idx="1" type="body"/>
+            <p:ph type="body" idx="1"/>
           </p:nvPr>
         </p:nvSpPr>
         <p:spPr>
@@ -2651,11 +2731,11 @@
           </a:prstGeom>
         </p:spPr>
         <p:txBody>
-          <a:bodyPr anchorCtr="0" anchor="t" bIns="91425" lIns="91425" spcFirstLastPara="1" rIns="91425" wrap="square" tIns="91425">
+          <a:bodyPr spcFirstLastPara="1" wrap="square" lIns="91425" tIns="91425" rIns="91425" bIns="91425" anchor="t" anchorCtr="0">
             <a:noAutofit/>
           </a:bodyPr>
           <a:lstStyle>
-            <a:lvl1pPr indent="-342900" lvl="0" marL="457200" algn="ctr">
+            <a:lvl1pPr marL="457200" lvl="0" indent="-342900" algn="ctr">
               <a:spcBef>
                 <a:spcPts val="0"/>
               </a:spcBef>
@@ -2666,7 +2746,7 @@
               <a:buChar char="●"/>
               <a:defRPr/>
             </a:lvl1pPr>
-            <a:lvl2pPr indent="-317500" lvl="1" marL="914400" algn="ctr">
+            <a:lvl2pPr marL="914400" lvl="1" indent="-317500" algn="ctr">
               <a:spcBef>
                 <a:spcPts val="1600"/>
               </a:spcBef>
@@ -2677,7 +2757,7 @@
               <a:buChar char="○"/>
               <a:defRPr/>
             </a:lvl2pPr>
-            <a:lvl3pPr indent="-317500" lvl="2" marL="1371600" algn="ctr">
+            <a:lvl3pPr marL="1371600" lvl="2" indent="-317500" algn="ctr">
               <a:spcBef>
                 <a:spcPts val="1600"/>
               </a:spcBef>
@@ -2688,7 +2768,7 @@
               <a:buChar char="■"/>
               <a:defRPr/>
             </a:lvl3pPr>
-            <a:lvl4pPr indent="-317500" lvl="3" marL="1828800" algn="ctr">
+            <a:lvl4pPr marL="1828800" lvl="3" indent="-317500" algn="ctr">
               <a:spcBef>
                 <a:spcPts val="1600"/>
               </a:spcBef>
@@ -2699,7 +2779,7 @@
               <a:buChar char="●"/>
               <a:defRPr/>
             </a:lvl4pPr>
-            <a:lvl5pPr indent="-317500" lvl="4" marL="2286000" algn="ctr">
+            <a:lvl5pPr marL="2286000" lvl="4" indent="-317500" algn="ctr">
               <a:spcBef>
                 <a:spcPts val="1600"/>
               </a:spcBef>
@@ -2710,7 +2790,7 @@
               <a:buChar char="○"/>
               <a:defRPr/>
             </a:lvl5pPr>
-            <a:lvl6pPr indent="-317500" lvl="5" marL="2743200" algn="ctr">
+            <a:lvl6pPr marL="2743200" lvl="5" indent="-317500" algn="ctr">
               <a:spcBef>
                 <a:spcPts val="1600"/>
               </a:spcBef>
@@ -2721,7 +2801,7 @@
               <a:buChar char="■"/>
               <a:defRPr/>
             </a:lvl6pPr>
-            <a:lvl7pPr indent="-317500" lvl="6" marL="3200400" algn="ctr">
+            <a:lvl7pPr marL="3200400" lvl="6" indent="-317500" algn="ctr">
               <a:spcBef>
                 <a:spcPts val="1600"/>
               </a:spcBef>
@@ -2732,7 +2812,7 @@
               <a:buChar char="●"/>
               <a:defRPr/>
             </a:lvl7pPr>
-            <a:lvl8pPr indent="-317500" lvl="7" marL="3657600" algn="ctr">
+            <a:lvl8pPr marL="3657600" lvl="7" indent="-317500" algn="ctr">
               <a:spcBef>
                 <a:spcPts val="1600"/>
               </a:spcBef>
@@ -2743,7 +2823,7 @@
               <a:buChar char="○"/>
               <a:defRPr/>
             </a:lvl8pPr>
-            <a:lvl9pPr indent="-317500" lvl="8" marL="4114800" algn="ctr">
+            <a:lvl9pPr marL="4114800" lvl="8" indent="-317500" algn="ctr">
               <a:spcBef>
                 <a:spcPts val="1600"/>
               </a:spcBef>
@@ -2755,15 +2835,19 @@
               <a:defRPr/>
             </a:lvl9pPr>
           </a:lstStyle>
-          <a:p/>
+          <a:p>
+            <a:endParaRPr/>
+          </a:p>
         </p:txBody>
       </p:sp>
       <p:sp>
         <p:nvSpPr>
           <p:cNvPr id="65" name="Google Shape;65;p11"/>
-          <p:cNvSpPr txBox="1"/>
+          <p:cNvSpPr txBox="1">
+            <a:spLocks noGrp="1"/>
+          </p:cNvSpPr>
           <p:nvPr>
-            <p:ph idx="12" type="sldNum"/>
+            <p:ph type="sldNum" idx="12"/>
           </p:nvPr>
         </p:nvSpPr>
         <p:spPr>
@@ -2776,7 +2860,7 @@
           </a:prstGeom>
         </p:spPr>
         <p:txBody>
-          <a:bodyPr anchorCtr="0" anchor="ctr" bIns="91425" lIns="91425" spcFirstLastPara="1" rIns="91425" wrap="square" tIns="91425">
+          <a:bodyPr spcFirstLastPara="1" wrap="square" lIns="91425" tIns="91425" rIns="91425" bIns="91425" anchor="ctr" anchorCtr="0">
             <a:noAutofit/>
           </a:bodyPr>
           <a:lstStyle>
@@ -2818,7 +2902,7 @@
             </a:lvl9pPr>
           </a:lstStyle>
           <a:p>
-            <a:pPr indent="0" lvl="0" marL="0" rtl="0" algn="r">
+            <a:pPr marL="0" lvl="0" indent="0" algn="r" rtl="0">
               <a:spcBef>
                 <a:spcPts val="0"/>
               </a:spcBef>
@@ -2829,7 +2913,7 @@
             </a:pPr>
             <a:fld id="{00000000-1234-1234-1234-123412341234}" type="slidenum">
               <a:rPr lang="it"/>
-              <a:t>‹#›</a:t>
+              <a:t>‹N›</a:t>
             </a:fld>
             <a:endParaRPr/>
           </a:p>
@@ -2844,11 +2928,11 @@
 </file>
 
 <file path=ppt/slideLayouts/slideLayout11.xml><?xml version="1.0" encoding="utf-8"?>
-<p:sldLayout xmlns:a="http://schemas.openxmlformats.org/drawingml/2006/main" xmlns:r="http://schemas.openxmlformats.org/officeDocument/2006/relationships" xmlns:mc="http://schemas.openxmlformats.org/markup-compatibility/2006" xmlns:mv="urn:schemas-microsoft-com:mac:vml" xmlns:p="http://schemas.openxmlformats.org/presentationml/2006/main" xmlns:c="http://schemas.openxmlformats.org/drawingml/2006/chart" xmlns:dgm="http://schemas.openxmlformats.org/drawingml/2006/diagram" xmlns:o="urn:schemas-microsoft-com:office:office" xmlns:v="urn:schemas-microsoft-com:vml" xmlns:pvml="urn:schemas-microsoft-com:office:powerpoint" xmlns:com="http://schemas.openxmlformats.org/drawingml/2006/compatibility" xmlns:p14="http://schemas.microsoft.com/office/powerpoint/2010/main" xmlns:p15="http://schemas.microsoft.com/office/powerpoint/2012/main" xmlns:ahyp="http://schemas.microsoft.com/office/drawing/2018/hyperlinkcolor" matchingName="Blank" type="blank">
+<p:sldLayout xmlns:a="http://schemas.openxmlformats.org/drawingml/2006/main" xmlns:r="http://schemas.openxmlformats.org/officeDocument/2006/relationships" xmlns:p="http://schemas.openxmlformats.org/presentationml/2006/main" matchingName="Blank" type="blank">
   <p:cSld name="BLANK">
     <p:spTree>
       <p:nvGrpSpPr>
-        <p:cNvPr id="66" name="Shape 66"/>
+        <p:cNvPr id="1" name="Shape 66"/>
         <p:cNvGrpSpPr/>
         <p:nvPr/>
       </p:nvGrpSpPr>
@@ -2863,9 +2947,11 @@
       <p:sp>
         <p:nvSpPr>
           <p:cNvPr id="67" name="Google Shape;67;p12"/>
-          <p:cNvSpPr txBox="1"/>
+          <p:cNvSpPr txBox="1">
+            <a:spLocks noGrp="1"/>
+          </p:cNvSpPr>
           <p:nvPr>
-            <p:ph idx="12" type="sldNum"/>
+            <p:ph type="sldNum" idx="12"/>
           </p:nvPr>
         </p:nvSpPr>
         <p:spPr>
@@ -2878,7 +2964,7 @@
           </a:prstGeom>
         </p:spPr>
         <p:txBody>
-          <a:bodyPr anchorCtr="0" anchor="ctr" bIns="91425" lIns="91425" spcFirstLastPara="1" rIns="91425" wrap="square" tIns="91425">
+          <a:bodyPr spcFirstLastPara="1" wrap="square" lIns="91425" tIns="91425" rIns="91425" bIns="91425" anchor="ctr" anchorCtr="0">
             <a:noAutofit/>
           </a:bodyPr>
           <a:lstStyle>
@@ -2920,7 +3006,7 @@
             </a:lvl9pPr>
           </a:lstStyle>
           <a:p>
-            <a:pPr indent="0" lvl="0" marL="0" rtl="0" algn="r">
+            <a:pPr marL="0" lvl="0" indent="0" algn="r" rtl="0">
               <a:spcBef>
                 <a:spcPts val="0"/>
               </a:spcBef>
@@ -2931,7 +3017,7 @@
             </a:pPr>
             <a:fld id="{00000000-1234-1234-1234-123412341234}" type="slidenum">
               <a:rPr lang="it"/>
-              <a:t>‹#›</a:t>
+              <a:t>‹N›</a:t>
             </a:fld>
             <a:endParaRPr/>
           </a:p>
@@ -2946,18 +3032,19 @@
 </file>
 
 <file path=ppt/slideLayouts/slideLayout2.xml><?xml version="1.0" encoding="utf-8"?>
-<p:sldLayout xmlns:a="http://schemas.openxmlformats.org/drawingml/2006/main" xmlns:r="http://schemas.openxmlformats.org/officeDocument/2006/relationships" xmlns:mc="http://schemas.openxmlformats.org/markup-compatibility/2006" xmlns:mv="urn:schemas-microsoft-com:mac:vml" xmlns:p="http://schemas.openxmlformats.org/presentationml/2006/main" xmlns:c="http://schemas.openxmlformats.org/drawingml/2006/chart" xmlns:dgm="http://schemas.openxmlformats.org/drawingml/2006/diagram" xmlns:o="urn:schemas-microsoft-com:office:office" xmlns:v="urn:schemas-microsoft-com:vml" xmlns:pvml="urn:schemas-microsoft-com:office:powerpoint" xmlns:com="http://schemas.openxmlformats.org/drawingml/2006/compatibility" xmlns:p14="http://schemas.microsoft.com/office/powerpoint/2010/main" xmlns:p15="http://schemas.microsoft.com/office/powerpoint/2012/main" xmlns:ahyp="http://schemas.microsoft.com/office/drawing/2018/hyperlinkcolor" matchingName="Section header" type="secHead">
+<p:sldLayout xmlns:a="http://schemas.openxmlformats.org/drawingml/2006/main" xmlns:r="http://schemas.openxmlformats.org/officeDocument/2006/relationships" xmlns:p="http://schemas.openxmlformats.org/presentationml/2006/main" matchingName="Section header" type="secHead">
   <p:cSld name="SECTION_HEADER">
     <p:bg>
       <p:bgPr>
         <a:solidFill>
           <a:schemeClr val="dk1"/>
         </a:solidFill>
+        <a:effectLst/>
       </p:bgPr>
     </p:bg>
     <p:spTree>
       <p:nvGrpSpPr>
-        <p:cNvPr id="16" name="Shape 16"/>
+        <p:cNvPr id="1" name="Shape 16"/>
         <p:cNvGrpSpPr/>
         <p:nvPr/>
       </p:nvGrpSpPr>
@@ -2984,14 +3071,14 @@
             <a:avLst/>
           </a:prstGeom>
           <a:noFill/>
-          <a:ln cap="flat" cmpd="sng" w="38100">
+          <a:ln w="38100" cap="flat" cmpd="sng">
             <a:solidFill>
               <a:schemeClr val="lt1"/>
             </a:solidFill>
             <a:prstDash val="solid"/>
             <a:round/>
-            <a:headEnd len="sm" w="sm" type="none"/>
-            <a:tailEnd len="sm" w="sm" type="none"/>
+            <a:headEnd type="none" w="sm" len="sm"/>
+            <a:tailEnd type="none" w="sm" len="sm"/>
           </a:ln>
         </p:spPr>
       </p:cxnSp>
@@ -3010,21 +3097,23 @@
             <a:avLst/>
           </a:prstGeom>
           <a:noFill/>
-          <a:ln cap="flat" cmpd="sng" w="19050">
+          <a:ln w="19050" cap="flat" cmpd="sng">
             <a:solidFill>
               <a:schemeClr val="lt1"/>
             </a:solidFill>
             <a:prstDash val="solid"/>
             <a:round/>
-            <a:headEnd len="sm" w="sm" type="none"/>
-            <a:tailEnd len="sm" w="sm" type="none"/>
+            <a:headEnd type="none" w="sm" len="sm"/>
+            <a:tailEnd type="none" w="sm" len="sm"/>
           </a:ln>
         </p:spPr>
       </p:cxnSp>
       <p:sp>
         <p:nvSpPr>
           <p:cNvPr id="19" name="Google Shape;19;p3"/>
-          <p:cNvSpPr txBox="1"/>
+          <p:cNvSpPr txBox="1">
+            <a:spLocks noGrp="1"/>
+          </p:cNvSpPr>
           <p:nvPr>
             <p:ph type="title"/>
           </p:nvPr>
@@ -3039,7 +3128,7 @@
           </a:prstGeom>
         </p:spPr>
         <p:txBody>
-          <a:bodyPr anchorCtr="0" anchor="ctr" bIns="91425" lIns="91425" spcFirstLastPara="1" rIns="91425" wrap="square" tIns="91425">
+          <a:bodyPr spcFirstLastPara="1" wrap="square" lIns="91425" tIns="91425" rIns="91425" bIns="91425" anchor="ctr" anchorCtr="0">
             <a:noAutofit/>
           </a:bodyPr>
           <a:lstStyle>
@@ -3206,15 +3295,19 @@
               </a:defRPr>
             </a:lvl9pPr>
           </a:lstStyle>
-          <a:p/>
+          <a:p>
+            <a:endParaRPr/>
+          </a:p>
         </p:txBody>
       </p:sp>
       <p:sp>
         <p:nvSpPr>
           <p:cNvPr id="20" name="Google Shape;20;p3"/>
-          <p:cNvSpPr txBox="1"/>
+          <p:cNvSpPr txBox="1">
+            <a:spLocks noGrp="1"/>
+          </p:cNvSpPr>
           <p:nvPr>
-            <p:ph idx="12" type="sldNum"/>
+            <p:ph type="sldNum" idx="12"/>
           </p:nvPr>
         </p:nvSpPr>
         <p:spPr>
@@ -3227,7 +3320,7 @@
           </a:prstGeom>
         </p:spPr>
         <p:txBody>
-          <a:bodyPr anchorCtr="0" anchor="ctr" bIns="91425" lIns="91425" spcFirstLastPara="1" rIns="91425" wrap="square" tIns="91425">
+          <a:bodyPr spcFirstLastPara="1" wrap="square" lIns="91425" tIns="91425" rIns="91425" bIns="91425" anchor="ctr" anchorCtr="0">
             <a:noAutofit/>
           </a:bodyPr>
           <a:lstStyle>
@@ -3305,7 +3398,7 @@
             </a:lvl9pPr>
           </a:lstStyle>
           <a:p>
-            <a:pPr indent="0" lvl="0" marL="0" rtl="0" algn="r">
+            <a:pPr marL="0" lvl="0" indent="0" algn="r" rtl="0">
               <a:spcBef>
                 <a:spcPts val="0"/>
               </a:spcBef>
@@ -3316,7 +3409,7 @@
             </a:pPr>
             <a:fld id="{00000000-1234-1234-1234-123412341234}" type="slidenum">
               <a:rPr lang="it"/>
-              <a:t>‹#›</a:t>
+              <a:t>‹N›</a:t>
             </a:fld>
             <a:endParaRPr/>
           </a:p>
@@ -3331,11 +3424,11 @@
 </file>
 
 <file path=ppt/slideLayouts/slideLayout3.xml><?xml version="1.0" encoding="utf-8"?>
-<p:sldLayout xmlns:a="http://schemas.openxmlformats.org/drawingml/2006/main" xmlns:r="http://schemas.openxmlformats.org/officeDocument/2006/relationships" xmlns:mc="http://schemas.openxmlformats.org/markup-compatibility/2006" xmlns:mv="urn:schemas-microsoft-com:mac:vml" xmlns:p="http://schemas.openxmlformats.org/presentationml/2006/main" xmlns:c="http://schemas.openxmlformats.org/drawingml/2006/chart" xmlns:dgm="http://schemas.openxmlformats.org/drawingml/2006/diagram" xmlns:o="urn:schemas-microsoft-com:office:office" xmlns:v="urn:schemas-microsoft-com:vml" xmlns:pvml="urn:schemas-microsoft-com:office:powerpoint" xmlns:com="http://schemas.openxmlformats.org/drawingml/2006/compatibility" xmlns:p14="http://schemas.microsoft.com/office/powerpoint/2010/main" xmlns:p15="http://schemas.microsoft.com/office/powerpoint/2012/main" xmlns:ahyp="http://schemas.microsoft.com/office/drawing/2018/hyperlinkcolor" matchingName="Title and body" type="tx">
+<p:sldLayout xmlns:a="http://schemas.openxmlformats.org/drawingml/2006/main" xmlns:r="http://schemas.openxmlformats.org/officeDocument/2006/relationships" xmlns:p="http://schemas.openxmlformats.org/presentationml/2006/main" matchingName="Title and body" type="tx">
   <p:cSld name="TITLE_AND_BODY">
     <p:spTree>
       <p:nvGrpSpPr>
-        <p:cNvPr id="21" name="Shape 21"/>
+        <p:cNvPr id="1" name="Shape 21"/>
         <p:cNvGrpSpPr/>
         <p:nvPr/>
       </p:nvGrpSpPr>
@@ -3362,14 +3455,14 @@
             <a:avLst/>
           </a:prstGeom>
           <a:noFill/>
-          <a:ln cap="flat" cmpd="sng" w="38100">
+          <a:ln w="38100" cap="flat" cmpd="sng">
             <a:solidFill>
               <a:schemeClr val="dk2"/>
             </a:solidFill>
             <a:prstDash val="solid"/>
             <a:round/>
-            <a:headEnd len="sm" w="sm" type="none"/>
-            <a:tailEnd len="sm" w="sm" type="none"/>
+            <a:headEnd type="none" w="sm" len="sm"/>
+            <a:tailEnd type="none" w="sm" len="sm"/>
           </a:ln>
         </p:spPr>
       </p:cxnSp>
@@ -3388,14 +3481,14 @@
             <a:avLst/>
           </a:prstGeom>
           <a:noFill/>
-          <a:ln cap="flat" cmpd="sng" w="19050">
+          <a:ln w="19050" cap="flat" cmpd="sng">
             <a:solidFill>
               <a:schemeClr val="dk2"/>
             </a:solidFill>
             <a:prstDash val="solid"/>
             <a:round/>
-            <a:headEnd len="sm" w="sm" type="none"/>
-            <a:tailEnd len="sm" w="sm" type="none"/>
+            <a:headEnd type="none" w="sm" len="sm"/>
+            <a:tailEnd type="none" w="sm" len="sm"/>
           </a:ln>
         </p:spPr>
       </p:cxnSp>
@@ -3414,21 +3507,23 @@
             <a:avLst/>
           </a:prstGeom>
           <a:noFill/>
-          <a:ln cap="flat" cmpd="sng" w="19050">
+          <a:ln w="19050" cap="flat" cmpd="sng">
             <a:solidFill>
               <a:schemeClr val="dk2"/>
             </a:solidFill>
             <a:prstDash val="solid"/>
             <a:round/>
-            <a:headEnd len="sm" w="sm" type="none"/>
-            <a:tailEnd len="sm" w="sm" type="none"/>
+            <a:headEnd type="none" w="sm" len="sm"/>
+            <a:tailEnd type="none" w="sm" len="sm"/>
           </a:ln>
         </p:spPr>
       </p:cxnSp>
       <p:sp>
         <p:nvSpPr>
           <p:cNvPr id="25" name="Google Shape;25;p4"/>
-          <p:cNvSpPr txBox="1"/>
+          <p:cNvSpPr txBox="1">
+            <a:spLocks noGrp="1"/>
+          </p:cNvSpPr>
           <p:nvPr>
             <p:ph type="title"/>
           </p:nvPr>
@@ -3443,7 +3538,7 @@
           </a:prstGeom>
         </p:spPr>
         <p:txBody>
-          <a:bodyPr anchorCtr="0" anchor="t" bIns="91425" lIns="91425" spcFirstLastPara="1" rIns="91425" wrap="square" tIns="91425">
+          <a:bodyPr spcFirstLastPara="1" wrap="square" lIns="91425" tIns="91425" rIns="91425" bIns="91425" anchor="t" anchorCtr="0">
             <a:noAutofit/>
           </a:bodyPr>
           <a:lstStyle>
@@ -3547,15 +3642,19 @@
               <a:defRPr/>
             </a:lvl9pPr>
           </a:lstStyle>
-          <a:p/>
+          <a:p>
+            <a:endParaRPr/>
+          </a:p>
         </p:txBody>
       </p:sp>
       <p:sp>
         <p:nvSpPr>
           <p:cNvPr id="26" name="Google Shape;26;p4"/>
-          <p:cNvSpPr txBox="1"/>
+          <p:cNvSpPr txBox="1">
+            <a:spLocks noGrp="1"/>
+          </p:cNvSpPr>
           <p:nvPr>
-            <p:ph idx="1" type="body"/>
+            <p:ph type="body" idx="1"/>
           </p:nvPr>
         </p:nvSpPr>
         <p:spPr>
@@ -3568,11 +3667,11 @@
           </a:prstGeom>
         </p:spPr>
         <p:txBody>
-          <a:bodyPr anchorCtr="0" anchor="t" bIns="91425" lIns="91425" spcFirstLastPara="1" rIns="91425" wrap="square" tIns="91425">
+          <a:bodyPr spcFirstLastPara="1" wrap="square" lIns="91425" tIns="91425" rIns="91425" bIns="91425" anchor="t" anchorCtr="0">
             <a:noAutofit/>
           </a:bodyPr>
           <a:lstStyle>
-            <a:lvl1pPr indent="-342900" lvl="0" marL="457200">
+            <a:lvl1pPr marL="457200" lvl="0" indent="-342900">
               <a:spcBef>
                 <a:spcPts val="0"/>
               </a:spcBef>
@@ -3583,7 +3682,7 @@
               <a:buChar char="●"/>
               <a:defRPr/>
             </a:lvl1pPr>
-            <a:lvl2pPr indent="-317500" lvl="1" marL="914400">
+            <a:lvl2pPr marL="914400" lvl="1" indent="-317500">
               <a:spcBef>
                 <a:spcPts val="1600"/>
               </a:spcBef>
@@ -3594,7 +3693,7 @@
               <a:buChar char="○"/>
               <a:defRPr/>
             </a:lvl2pPr>
-            <a:lvl3pPr indent="-317500" lvl="2" marL="1371600">
+            <a:lvl3pPr marL="1371600" lvl="2" indent="-317500">
               <a:spcBef>
                 <a:spcPts val="1600"/>
               </a:spcBef>
@@ -3605,7 +3704,7 @@
               <a:buChar char="■"/>
               <a:defRPr/>
             </a:lvl3pPr>
-            <a:lvl4pPr indent="-317500" lvl="3" marL="1828800">
+            <a:lvl4pPr marL="1828800" lvl="3" indent="-317500">
               <a:spcBef>
                 <a:spcPts val="1600"/>
               </a:spcBef>
@@ -3616,7 +3715,7 @@
               <a:buChar char="●"/>
               <a:defRPr/>
             </a:lvl4pPr>
-            <a:lvl5pPr indent="-317500" lvl="4" marL="2286000">
+            <a:lvl5pPr marL="2286000" lvl="4" indent="-317500">
               <a:spcBef>
                 <a:spcPts val="1600"/>
               </a:spcBef>
@@ -3627,7 +3726,7 @@
               <a:buChar char="○"/>
               <a:defRPr/>
             </a:lvl5pPr>
-            <a:lvl6pPr indent="-317500" lvl="5" marL="2743200">
+            <a:lvl6pPr marL="2743200" lvl="5" indent="-317500">
               <a:spcBef>
                 <a:spcPts val="1600"/>
               </a:spcBef>
@@ -3638,7 +3737,7 @@
               <a:buChar char="■"/>
               <a:defRPr/>
             </a:lvl6pPr>
-            <a:lvl7pPr indent="-317500" lvl="6" marL="3200400">
+            <a:lvl7pPr marL="3200400" lvl="6" indent="-317500">
               <a:spcBef>
                 <a:spcPts val="1600"/>
               </a:spcBef>
@@ -3649,7 +3748,7 @@
               <a:buChar char="●"/>
               <a:defRPr/>
             </a:lvl7pPr>
-            <a:lvl8pPr indent="-317500" lvl="7" marL="3657600">
+            <a:lvl8pPr marL="3657600" lvl="7" indent="-317500">
               <a:spcBef>
                 <a:spcPts val="1600"/>
               </a:spcBef>
@@ -3660,7 +3759,7 @@
               <a:buChar char="○"/>
               <a:defRPr/>
             </a:lvl8pPr>
-            <a:lvl9pPr indent="-317500" lvl="8" marL="4114800">
+            <a:lvl9pPr marL="4114800" lvl="8" indent="-317500">
               <a:spcBef>
                 <a:spcPts val="1600"/>
               </a:spcBef>
@@ -3672,15 +3771,19 @@
               <a:defRPr/>
             </a:lvl9pPr>
           </a:lstStyle>
-          <a:p/>
+          <a:p>
+            <a:endParaRPr/>
+          </a:p>
         </p:txBody>
       </p:sp>
       <p:sp>
         <p:nvSpPr>
           <p:cNvPr id="27" name="Google Shape;27;p4"/>
-          <p:cNvSpPr txBox="1"/>
+          <p:cNvSpPr txBox="1">
+            <a:spLocks noGrp="1"/>
+          </p:cNvSpPr>
           <p:nvPr>
-            <p:ph idx="12" type="sldNum"/>
+            <p:ph type="sldNum" idx="12"/>
           </p:nvPr>
         </p:nvSpPr>
         <p:spPr>
@@ -3693,7 +3796,7 @@
           </a:prstGeom>
         </p:spPr>
         <p:txBody>
-          <a:bodyPr anchorCtr="0" anchor="ctr" bIns="91425" lIns="91425" spcFirstLastPara="1" rIns="91425" wrap="square" tIns="91425">
+          <a:bodyPr spcFirstLastPara="1" wrap="square" lIns="91425" tIns="91425" rIns="91425" bIns="91425" anchor="ctr" anchorCtr="0">
             <a:noAutofit/>
           </a:bodyPr>
           <a:lstStyle>
@@ -3735,7 +3838,7 @@
             </a:lvl9pPr>
           </a:lstStyle>
           <a:p>
-            <a:pPr indent="0" lvl="0" marL="0" rtl="0" algn="r">
+            <a:pPr marL="0" lvl="0" indent="0" algn="r" rtl="0">
               <a:spcBef>
                 <a:spcPts val="0"/>
               </a:spcBef>
@@ -3746,7 +3849,7 @@
             </a:pPr>
             <a:fld id="{00000000-1234-1234-1234-123412341234}" type="slidenum">
               <a:rPr lang="it"/>
-              <a:t>‹#›</a:t>
+              <a:t>‹N›</a:t>
             </a:fld>
             <a:endParaRPr/>
           </a:p>
@@ -3761,11 +3864,11 @@
 </file>
 
 <file path=ppt/slideLayouts/slideLayout4.xml><?xml version="1.0" encoding="utf-8"?>
-<p:sldLayout xmlns:a="http://schemas.openxmlformats.org/drawingml/2006/main" xmlns:r="http://schemas.openxmlformats.org/officeDocument/2006/relationships" xmlns:mc="http://schemas.openxmlformats.org/markup-compatibility/2006" xmlns:mv="urn:schemas-microsoft-com:mac:vml" xmlns:p="http://schemas.openxmlformats.org/presentationml/2006/main" xmlns:c="http://schemas.openxmlformats.org/drawingml/2006/chart" xmlns:dgm="http://schemas.openxmlformats.org/drawingml/2006/diagram" xmlns:o="urn:schemas-microsoft-com:office:office" xmlns:v="urn:schemas-microsoft-com:vml" xmlns:pvml="urn:schemas-microsoft-com:office:powerpoint" xmlns:com="http://schemas.openxmlformats.org/drawingml/2006/compatibility" xmlns:p14="http://schemas.microsoft.com/office/powerpoint/2010/main" xmlns:p15="http://schemas.microsoft.com/office/powerpoint/2012/main" xmlns:ahyp="http://schemas.microsoft.com/office/drawing/2018/hyperlinkcolor" matchingName="Title and two columns" type="twoColTx">
+<p:sldLayout xmlns:a="http://schemas.openxmlformats.org/drawingml/2006/main" xmlns:r="http://schemas.openxmlformats.org/officeDocument/2006/relationships" xmlns:p="http://schemas.openxmlformats.org/presentationml/2006/main" matchingName="Title and two columns" type="twoColTx">
   <p:cSld name="TITLE_AND_TWO_COLUMNS">
     <p:spTree>
       <p:nvGrpSpPr>
-        <p:cNvPr id="28" name="Shape 28"/>
+        <p:cNvPr id="1" name="Shape 28"/>
         <p:cNvGrpSpPr/>
         <p:nvPr/>
       </p:nvGrpSpPr>
@@ -3792,14 +3895,14 @@
             <a:avLst/>
           </a:prstGeom>
           <a:noFill/>
-          <a:ln cap="flat" cmpd="sng" w="38100">
+          <a:ln w="38100" cap="flat" cmpd="sng">
             <a:solidFill>
               <a:schemeClr val="dk2"/>
             </a:solidFill>
             <a:prstDash val="solid"/>
             <a:round/>
-            <a:headEnd len="sm" w="sm" type="none"/>
-            <a:tailEnd len="sm" w="sm" type="none"/>
+            <a:headEnd type="none" w="sm" len="sm"/>
+            <a:tailEnd type="none" w="sm" len="sm"/>
           </a:ln>
         </p:spPr>
       </p:cxnSp>
@@ -3818,14 +3921,14 @@
             <a:avLst/>
           </a:prstGeom>
           <a:noFill/>
-          <a:ln cap="flat" cmpd="sng" w="19050">
+          <a:ln w="19050" cap="flat" cmpd="sng">
             <a:solidFill>
               <a:schemeClr val="dk2"/>
             </a:solidFill>
             <a:prstDash val="solid"/>
             <a:round/>
-            <a:headEnd len="sm" w="sm" type="none"/>
-            <a:tailEnd len="sm" w="sm" type="none"/>
+            <a:headEnd type="none" w="sm" len="sm"/>
+            <a:tailEnd type="none" w="sm" len="sm"/>
           </a:ln>
         </p:spPr>
       </p:cxnSp>
@@ -3844,21 +3947,23 @@
             <a:avLst/>
           </a:prstGeom>
           <a:noFill/>
-          <a:ln cap="flat" cmpd="sng" w="19050">
+          <a:ln w="19050" cap="flat" cmpd="sng">
             <a:solidFill>
               <a:schemeClr val="dk2"/>
             </a:solidFill>
             <a:prstDash val="solid"/>
             <a:round/>
-            <a:headEnd len="sm" w="sm" type="none"/>
-            <a:tailEnd len="sm" w="sm" type="none"/>
+            <a:headEnd type="none" w="sm" len="sm"/>
+            <a:tailEnd type="none" w="sm" len="sm"/>
           </a:ln>
         </p:spPr>
       </p:cxnSp>
       <p:sp>
         <p:nvSpPr>
           <p:cNvPr id="32" name="Google Shape;32;p5"/>
-          <p:cNvSpPr txBox="1"/>
+          <p:cNvSpPr txBox="1">
+            <a:spLocks noGrp="1"/>
+          </p:cNvSpPr>
           <p:nvPr>
             <p:ph type="title"/>
           </p:nvPr>
@@ -3873,7 +3978,7 @@
           </a:prstGeom>
         </p:spPr>
         <p:txBody>
-          <a:bodyPr anchorCtr="0" anchor="t" bIns="91425" lIns="91425" spcFirstLastPara="1" rIns="91425" wrap="square" tIns="91425">
+          <a:bodyPr spcFirstLastPara="1" wrap="square" lIns="91425" tIns="91425" rIns="91425" bIns="91425" anchor="t" anchorCtr="0">
             <a:noAutofit/>
           </a:bodyPr>
           <a:lstStyle>
@@ -3977,15 +4082,19 @@
               <a:defRPr/>
             </a:lvl9pPr>
           </a:lstStyle>
-          <a:p/>
+          <a:p>
+            <a:endParaRPr/>
+          </a:p>
         </p:txBody>
       </p:sp>
       <p:sp>
         <p:nvSpPr>
           <p:cNvPr id="33" name="Google Shape;33;p5"/>
-          <p:cNvSpPr txBox="1"/>
+          <p:cNvSpPr txBox="1">
+            <a:spLocks noGrp="1"/>
+          </p:cNvSpPr>
           <p:nvPr>
-            <p:ph idx="1" type="body"/>
+            <p:ph type="body" idx="1"/>
           </p:nvPr>
         </p:nvSpPr>
         <p:spPr>
@@ -3998,11 +4107,11 @@
           </a:prstGeom>
         </p:spPr>
         <p:txBody>
-          <a:bodyPr anchorCtr="0" anchor="t" bIns="91425" lIns="91425" spcFirstLastPara="1" rIns="91425" wrap="square" tIns="91425">
+          <a:bodyPr spcFirstLastPara="1" wrap="square" lIns="91425" tIns="91425" rIns="91425" bIns="91425" anchor="t" anchorCtr="0">
             <a:noAutofit/>
           </a:bodyPr>
           <a:lstStyle>
-            <a:lvl1pPr indent="-317500" lvl="0" marL="457200">
+            <a:lvl1pPr marL="457200" lvl="0" indent="-317500">
               <a:spcBef>
                 <a:spcPts val="0"/>
               </a:spcBef>
@@ -4013,7 +4122,7 @@
               <a:buChar char="●"/>
               <a:defRPr sz="1400"/>
             </a:lvl1pPr>
-            <a:lvl2pPr indent="-304800" lvl="1" marL="914400">
+            <a:lvl2pPr marL="914400" lvl="1" indent="-304800">
               <a:spcBef>
                 <a:spcPts val="1600"/>
               </a:spcBef>
@@ -4024,7 +4133,7 @@
               <a:buChar char="○"/>
               <a:defRPr sz="1200"/>
             </a:lvl2pPr>
-            <a:lvl3pPr indent="-304800" lvl="2" marL="1371600">
+            <a:lvl3pPr marL="1371600" lvl="2" indent="-304800">
               <a:spcBef>
                 <a:spcPts val="1600"/>
               </a:spcBef>
@@ -4035,7 +4144,7 @@
               <a:buChar char="■"/>
               <a:defRPr sz="1200"/>
             </a:lvl3pPr>
-            <a:lvl4pPr indent="-304800" lvl="3" marL="1828800">
+            <a:lvl4pPr marL="1828800" lvl="3" indent="-304800">
               <a:spcBef>
                 <a:spcPts val="1600"/>
               </a:spcBef>
@@ -4046,7 +4155,7 @@
               <a:buChar char="●"/>
               <a:defRPr sz="1200"/>
             </a:lvl4pPr>
-            <a:lvl5pPr indent="-304800" lvl="4" marL="2286000">
+            <a:lvl5pPr marL="2286000" lvl="4" indent="-304800">
               <a:spcBef>
                 <a:spcPts val="1600"/>
               </a:spcBef>
@@ -4057,7 +4166,7 @@
               <a:buChar char="○"/>
               <a:defRPr sz="1200"/>
             </a:lvl5pPr>
-            <a:lvl6pPr indent="-304800" lvl="5" marL="2743200">
+            <a:lvl6pPr marL="2743200" lvl="5" indent="-304800">
               <a:spcBef>
                 <a:spcPts val="1600"/>
               </a:spcBef>
@@ -4068,7 +4177,7 @@
               <a:buChar char="■"/>
               <a:defRPr sz="1200"/>
             </a:lvl6pPr>
-            <a:lvl7pPr indent="-304800" lvl="6" marL="3200400">
+            <a:lvl7pPr marL="3200400" lvl="6" indent="-304800">
               <a:spcBef>
                 <a:spcPts val="1600"/>
               </a:spcBef>
@@ -4079,7 +4188,7 @@
               <a:buChar char="●"/>
               <a:defRPr sz="1200"/>
             </a:lvl7pPr>
-            <a:lvl8pPr indent="-304800" lvl="7" marL="3657600">
+            <a:lvl8pPr marL="3657600" lvl="7" indent="-304800">
               <a:spcBef>
                 <a:spcPts val="1600"/>
               </a:spcBef>
@@ -4090,7 +4199,7 @@
               <a:buChar char="○"/>
               <a:defRPr sz="1200"/>
             </a:lvl8pPr>
-            <a:lvl9pPr indent="-304800" lvl="8" marL="4114800">
+            <a:lvl9pPr marL="4114800" lvl="8" indent="-304800">
               <a:spcBef>
                 <a:spcPts val="1600"/>
               </a:spcBef>
@@ -4102,15 +4211,19 @@
               <a:defRPr sz="1200"/>
             </a:lvl9pPr>
           </a:lstStyle>
-          <a:p/>
+          <a:p>
+            <a:endParaRPr/>
+          </a:p>
         </p:txBody>
       </p:sp>
       <p:sp>
         <p:nvSpPr>
           <p:cNvPr id="34" name="Google Shape;34;p5"/>
-          <p:cNvSpPr txBox="1"/>
+          <p:cNvSpPr txBox="1">
+            <a:spLocks noGrp="1"/>
+          </p:cNvSpPr>
           <p:nvPr>
-            <p:ph idx="2" type="body"/>
+            <p:ph type="body" idx="2"/>
           </p:nvPr>
         </p:nvSpPr>
         <p:spPr>
@@ -4123,11 +4236,11 @@
           </a:prstGeom>
         </p:spPr>
         <p:txBody>
-          <a:bodyPr anchorCtr="0" anchor="t" bIns="91425" lIns="91425" spcFirstLastPara="1" rIns="91425" wrap="square" tIns="91425">
+          <a:bodyPr spcFirstLastPara="1" wrap="square" lIns="91425" tIns="91425" rIns="91425" bIns="91425" anchor="t" anchorCtr="0">
             <a:noAutofit/>
           </a:bodyPr>
           <a:lstStyle>
-            <a:lvl1pPr indent="-317500" lvl="0" marL="457200">
+            <a:lvl1pPr marL="457200" lvl="0" indent="-317500">
               <a:spcBef>
                 <a:spcPts val="0"/>
               </a:spcBef>
@@ -4138,7 +4251,7 @@
               <a:buChar char="●"/>
               <a:defRPr sz="1400"/>
             </a:lvl1pPr>
-            <a:lvl2pPr indent="-304800" lvl="1" marL="914400">
+            <a:lvl2pPr marL="914400" lvl="1" indent="-304800">
               <a:spcBef>
                 <a:spcPts val="1600"/>
               </a:spcBef>
@@ -4149,7 +4262,7 @@
               <a:buChar char="○"/>
               <a:defRPr sz="1200"/>
             </a:lvl2pPr>
-            <a:lvl3pPr indent="-304800" lvl="2" marL="1371600">
+            <a:lvl3pPr marL="1371600" lvl="2" indent="-304800">
               <a:spcBef>
                 <a:spcPts val="1600"/>
               </a:spcBef>
@@ -4160,7 +4273,7 @@
               <a:buChar char="■"/>
               <a:defRPr sz="1200"/>
             </a:lvl3pPr>
-            <a:lvl4pPr indent="-304800" lvl="3" marL="1828800">
+            <a:lvl4pPr marL="1828800" lvl="3" indent="-304800">
               <a:spcBef>
                 <a:spcPts val="1600"/>
               </a:spcBef>
@@ -4171,7 +4284,7 @@
               <a:buChar char="●"/>
               <a:defRPr sz="1200"/>
             </a:lvl4pPr>
-            <a:lvl5pPr indent="-304800" lvl="4" marL="2286000">
+            <a:lvl5pPr marL="2286000" lvl="4" indent="-304800">
               <a:spcBef>
                 <a:spcPts val="1600"/>
               </a:spcBef>
@@ -4182,7 +4295,7 @@
               <a:buChar char="○"/>
               <a:defRPr sz="1200"/>
             </a:lvl5pPr>
-            <a:lvl6pPr indent="-304800" lvl="5" marL="2743200">
+            <a:lvl6pPr marL="2743200" lvl="5" indent="-304800">
               <a:spcBef>
                 <a:spcPts val="1600"/>
               </a:spcBef>
@@ -4193,7 +4306,7 @@
               <a:buChar char="■"/>
               <a:defRPr sz="1200"/>
             </a:lvl6pPr>
-            <a:lvl7pPr indent="-304800" lvl="6" marL="3200400">
+            <a:lvl7pPr marL="3200400" lvl="6" indent="-304800">
               <a:spcBef>
                 <a:spcPts val="1600"/>
               </a:spcBef>
@@ -4204,7 +4317,7 @@
               <a:buChar char="●"/>
               <a:defRPr sz="1200"/>
             </a:lvl7pPr>
-            <a:lvl8pPr indent="-304800" lvl="7" marL="3657600">
+            <a:lvl8pPr marL="3657600" lvl="7" indent="-304800">
               <a:spcBef>
                 <a:spcPts val="1600"/>
               </a:spcBef>
@@ -4215,7 +4328,7 @@
               <a:buChar char="○"/>
               <a:defRPr sz="1200"/>
             </a:lvl8pPr>
-            <a:lvl9pPr indent="-304800" lvl="8" marL="4114800">
+            <a:lvl9pPr marL="4114800" lvl="8" indent="-304800">
               <a:spcBef>
                 <a:spcPts val="1600"/>
               </a:spcBef>
@@ -4227,15 +4340,19 @@
               <a:defRPr sz="1200"/>
             </a:lvl9pPr>
           </a:lstStyle>
-          <a:p/>
+          <a:p>
+            <a:endParaRPr/>
+          </a:p>
         </p:txBody>
       </p:sp>
       <p:sp>
         <p:nvSpPr>
           <p:cNvPr id="35" name="Google Shape;35;p5"/>
-          <p:cNvSpPr txBox="1"/>
+          <p:cNvSpPr txBox="1">
+            <a:spLocks noGrp="1"/>
+          </p:cNvSpPr>
           <p:nvPr>
-            <p:ph idx="12" type="sldNum"/>
+            <p:ph type="sldNum" idx="12"/>
           </p:nvPr>
         </p:nvSpPr>
         <p:spPr>
@@ -4248,7 +4365,7 @@
           </a:prstGeom>
         </p:spPr>
         <p:txBody>
-          <a:bodyPr anchorCtr="0" anchor="ctr" bIns="91425" lIns="91425" spcFirstLastPara="1" rIns="91425" wrap="square" tIns="91425">
+          <a:bodyPr spcFirstLastPara="1" wrap="square" lIns="91425" tIns="91425" rIns="91425" bIns="91425" anchor="ctr" anchorCtr="0">
             <a:noAutofit/>
           </a:bodyPr>
           <a:lstStyle>
@@ -4290,7 +4407,7 @@
             </a:lvl9pPr>
           </a:lstStyle>
           <a:p>
-            <a:pPr indent="0" lvl="0" marL="0" rtl="0" algn="r">
+            <a:pPr marL="0" lvl="0" indent="0" algn="r" rtl="0">
               <a:spcBef>
                 <a:spcPts val="0"/>
               </a:spcBef>
@@ -4301,7 +4418,7 @@
             </a:pPr>
             <a:fld id="{00000000-1234-1234-1234-123412341234}" type="slidenum">
               <a:rPr lang="it"/>
-              <a:t>‹#›</a:t>
+              <a:t>‹N›</a:t>
             </a:fld>
             <a:endParaRPr/>
           </a:p>
@@ -4316,11 +4433,11 @@
 </file>
 
 <file path=ppt/slideLayouts/slideLayout5.xml><?xml version="1.0" encoding="utf-8"?>
-<p:sldLayout xmlns:a="http://schemas.openxmlformats.org/drawingml/2006/main" xmlns:r="http://schemas.openxmlformats.org/officeDocument/2006/relationships" xmlns:mc="http://schemas.openxmlformats.org/markup-compatibility/2006" xmlns:mv="urn:schemas-microsoft-com:mac:vml" xmlns:p="http://schemas.openxmlformats.org/presentationml/2006/main" xmlns:c="http://schemas.openxmlformats.org/drawingml/2006/chart" xmlns:dgm="http://schemas.openxmlformats.org/drawingml/2006/diagram" xmlns:o="urn:schemas-microsoft-com:office:office" xmlns:v="urn:schemas-microsoft-com:vml" xmlns:pvml="urn:schemas-microsoft-com:office:powerpoint" xmlns:com="http://schemas.openxmlformats.org/drawingml/2006/compatibility" xmlns:p14="http://schemas.microsoft.com/office/powerpoint/2010/main" xmlns:p15="http://schemas.microsoft.com/office/powerpoint/2012/main" xmlns:ahyp="http://schemas.microsoft.com/office/drawing/2018/hyperlinkcolor" matchingName="Title only" type="titleOnly">
+<p:sldLayout xmlns:a="http://schemas.openxmlformats.org/drawingml/2006/main" xmlns:r="http://schemas.openxmlformats.org/officeDocument/2006/relationships" xmlns:p="http://schemas.openxmlformats.org/presentationml/2006/main" matchingName="Title only" type="titleOnly">
   <p:cSld name="TITLE_ONLY">
     <p:spTree>
       <p:nvGrpSpPr>
-        <p:cNvPr id="36" name="Shape 36"/>
+        <p:cNvPr id="1" name="Shape 36"/>
         <p:cNvGrpSpPr/>
         <p:nvPr/>
       </p:nvGrpSpPr>
@@ -4335,7 +4452,9 @@
       <p:sp>
         <p:nvSpPr>
           <p:cNvPr id="37" name="Google Shape;37;p6"/>
-          <p:cNvSpPr txBox="1"/>
+          <p:cNvSpPr txBox="1">
+            <a:spLocks noGrp="1"/>
+          </p:cNvSpPr>
           <p:nvPr>
             <p:ph type="title"/>
           </p:nvPr>
@@ -4350,7 +4469,7 @@
           </a:prstGeom>
         </p:spPr>
         <p:txBody>
-          <a:bodyPr anchorCtr="0" anchor="t" bIns="91425" lIns="91425" spcFirstLastPara="1" rIns="91425" wrap="square" tIns="91425">
+          <a:bodyPr spcFirstLastPara="1" wrap="square" lIns="91425" tIns="91425" rIns="91425" bIns="91425" anchor="t" anchorCtr="0">
             <a:noAutofit/>
           </a:bodyPr>
           <a:lstStyle>
@@ -4454,15 +4573,19 @@
               <a:defRPr/>
             </a:lvl9pPr>
           </a:lstStyle>
-          <a:p/>
+          <a:p>
+            <a:endParaRPr/>
+          </a:p>
         </p:txBody>
       </p:sp>
       <p:sp>
         <p:nvSpPr>
           <p:cNvPr id="38" name="Google Shape;38;p6"/>
-          <p:cNvSpPr txBox="1"/>
+          <p:cNvSpPr txBox="1">
+            <a:spLocks noGrp="1"/>
+          </p:cNvSpPr>
           <p:nvPr>
-            <p:ph idx="12" type="sldNum"/>
+            <p:ph type="sldNum" idx="12"/>
           </p:nvPr>
         </p:nvSpPr>
         <p:spPr>
@@ -4475,7 +4598,7 @@
           </a:prstGeom>
         </p:spPr>
         <p:txBody>
-          <a:bodyPr anchorCtr="0" anchor="ctr" bIns="91425" lIns="91425" spcFirstLastPara="1" rIns="91425" wrap="square" tIns="91425">
+          <a:bodyPr spcFirstLastPara="1" wrap="square" lIns="91425" tIns="91425" rIns="91425" bIns="91425" anchor="ctr" anchorCtr="0">
             <a:noAutofit/>
           </a:bodyPr>
           <a:lstStyle>
@@ -4517,7 +4640,7 @@
             </a:lvl9pPr>
           </a:lstStyle>
           <a:p>
-            <a:pPr indent="0" lvl="0" marL="0" rtl="0" algn="r">
+            <a:pPr marL="0" lvl="0" indent="0" algn="r" rtl="0">
               <a:spcBef>
                 <a:spcPts val="0"/>
               </a:spcBef>
@@ -4528,7 +4651,7 @@
             </a:pPr>
             <a:fld id="{00000000-1234-1234-1234-123412341234}" type="slidenum">
               <a:rPr lang="it"/>
-              <a:t>‹#›</a:t>
+              <a:t>‹N›</a:t>
             </a:fld>
             <a:endParaRPr/>
           </a:p>
@@ -4543,11 +4666,11 @@
 </file>
 
 <file path=ppt/slideLayouts/slideLayout6.xml><?xml version="1.0" encoding="utf-8"?>
-<p:sldLayout xmlns:a="http://schemas.openxmlformats.org/drawingml/2006/main" xmlns:r="http://schemas.openxmlformats.org/officeDocument/2006/relationships" xmlns:mc="http://schemas.openxmlformats.org/markup-compatibility/2006" xmlns:mv="urn:schemas-microsoft-com:mac:vml" xmlns:p="http://schemas.openxmlformats.org/presentationml/2006/main" xmlns:c="http://schemas.openxmlformats.org/drawingml/2006/chart" xmlns:dgm="http://schemas.openxmlformats.org/drawingml/2006/diagram" xmlns:o="urn:schemas-microsoft-com:office:office" xmlns:v="urn:schemas-microsoft-com:vml" xmlns:pvml="urn:schemas-microsoft-com:office:powerpoint" xmlns:com="http://schemas.openxmlformats.org/drawingml/2006/compatibility" xmlns:p14="http://schemas.microsoft.com/office/powerpoint/2010/main" xmlns:p15="http://schemas.microsoft.com/office/powerpoint/2012/main" xmlns:ahyp="http://schemas.microsoft.com/office/drawing/2018/hyperlinkcolor" matchingName="One column text">
+<p:sldLayout xmlns:a="http://schemas.openxmlformats.org/drawingml/2006/main" xmlns:r="http://schemas.openxmlformats.org/officeDocument/2006/relationships" xmlns:p="http://schemas.openxmlformats.org/presentationml/2006/main" matchingName="One column text">
   <p:cSld name="ONE_COLUMN_TEXT">
     <p:spTree>
       <p:nvGrpSpPr>
-        <p:cNvPr id="39" name="Shape 39"/>
+        <p:cNvPr id="1" name="Shape 39"/>
         <p:cNvGrpSpPr/>
         <p:nvPr/>
       </p:nvGrpSpPr>
@@ -4574,21 +4697,23 @@
             <a:avLst/>
           </a:prstGeom>
           <a:noFill/>
-          <a:ln cap="flat" cmpd="sng" w="19050">
+          <a:ln w="19050" cap="flat" cmpd="sng">
             <a:solidFill>
               <a:schemeClr val="dk2"/>
             </a:solidFill>
             <a:prstDash val="solid"/>
             <a:round/>
-            <a:headEnd len="sm" w="sm" type="none"/>
-            <a:tailEnd len="sm" w="sm" type="none"/>
+            <a:headEnd type="none" w="sm" len="sm"/>
+            <a:tailEnd type="none" w="sm" len="sm"/>
           </a:ln>
         </p:spPr>
       </p:cxnSp>
       <p:sp>
         <p:nvSpPr>
           <p:cNvPr id="41" name="Google Shape;41;p7"/>
-          <p:cNvSpPr txBox="1"/>
+          <p:cNvSpPr txBox="1">
+            <a:spLocks noGrp="1"/>
+          </p:cNvSpPr>
           <p:nvPr>
             <p:ph type="title"/>
           </p:nvPr>
@@ -4603,7 +4728,7 @@
           </a:prstGeom>
         </p:spPr>
         <p:txBody>
-          <a:bodyPr anchorCtr="0" anchor="b" bIns="91425" lIns="91425" spcFirstLastPara="1" rIns="91425" wrap="square" tIns="91425">
+          <a:bodyPr spcFirstLastPara="1" wrap="square" lIns="91425" tIns="91425" rIns="91425" bIns="91425" anchor="b" anchorCtr="0">
             <a:noAutofit/>
           </a:bodyPr>
           <a:lstStyle>
@@ -4707,15 +4832,19 @@
               <a:defRPr sz="2400"/>
             </a:lvl9pPr>
           </a:lstStyle>
-          <a:p/>
+          <a:p>
+            <a:endParaRPr/>
+          </a:p>
         </p:txBody>
       </p:sp>
       <p:sp>
         <p:nvSpPr>
           <p:cNvPr id="42" name="Google Shape;42;p7"/>
-          <p:cNvSpPr txBox="1"/>
+          <p:cNvSpPr txBox="1">
+            <a:spLocks noGrp="1"/>
+          </p:cNvSpPr>
           <p:nvPr>
-            <p:ph idx="1" type="body"/>
+            <p:ph type="body" idx="1"/>
           </p:nvPr>
         </p:nvSpPr>
         <p:spPr>
@@ -4728,11 +4857,11 @@
           </a:prstGeom>
         </p:spPr>
         <p:txBody>
-          <a:bodyPr anchorCtr="0" anchor="t" bIns="91425" lIns="91425" spcFirstLastPara="1" rIns="91425" wrap="square" tIns="91425">
+          <a:bodyPr spcFirstLastPara="1" wrap="square" lIns="91425" tIns="91425" rIns="91425" bIns="91425" anchor="t" anchorCtr="0">
             <a:noAutofit/>
           </a:bodyPr>
           <a:lstStyle>
-            <a:lvl1pPr indent="-304800" lvl="0" marL="457200">
+            <a:lvl1pPr marL="457200" lvl="0" indent="-304800">
               <a:spcBef>
                 <a:spcPts val="0"/>
               </a:spcBef>
@@ -4743,7 +4872,7 @@
               <a:buChar char="●"/>
               <a:defRPr sz="1200"/>
             </a:lvl1pPr>
-            <a:lvl2pPr indent="-304800" lvl="1" marL="914400">
+            <a:lvl2pPr marL="914400" lvl="1" indent="-304800">
               <a:spcBef>
                 <a:spcPts val="1600"/>
               </a:spcBef>
@@ -4754,7 +4883,7 @@
               <a:buChar char="○"/>
               <a:defRPr sz="1200"/>
             </a:lvl2pPr>
-            <a:lvl3pPr indent="-304800" lvl="2" marL="1371600">
+            <a:lvl3pPr marL="1371600" lvl="2" indent="-304800">
               <a:spcBef>
                 <a:spcPts val="1600"/>
               </a:spcBef>
@@ -4765,7 +4894,7 @@
               <a:buChar char="■"/>
               <a:defRPr sz="1200"/>
             </a:lvl3pPr>
-            <a:lvl4pPr indent="-304800" lvl="3" marL="1828800">
+            <a:lvl4pPr marL="1828800" lvl="3" indent="-304800">
               <a:spcBef>
                 <a:spcPts val="1600"/>
               </a:spcBef>
@@ -4776,7 +4905,7 @@
               <a:buChar char="●"/>
               <a:defRPr sz="1200"/>
             </a:lvl4pPr>
-            <a:lvl5pPr indent="-304800" lvl="4" marL="2286000">
+            <a:lvl5pPr marL="2286000" lvl="4" indent="-304800">
               <a:spcBef>
                 <a:spcPts val="1600"/>
               </a:spcBef>
@@ -4787,7 +4916,7 @@
               <a:buChar char="○"/>
               <a:defRPr sz="1200"/>
             </a:lvl5pPr>
-            <a:lvl6pPr indent="-304800" lvl="5" marL="2743200">
+            <a:lvl6pPr marL="2743200" lvl="5" indent="-304800">
               <a:spcBef>
                 <a:spcPts val="1600"/>
               </a:spcBef>
@@ -4798,7 +4927,7 @@
               <a:buChar char="■"/>
               <a:defRPr sz="1200"/>
             </a:lvl6pPr>
-            <a:lvl7pPr indent="-304800" lvl="6" marL="3200400">
+            <a:lvl7pPr marL="3200400" lvl="6" indent="-304800">
               <a:spcBef>
                 <a:spcPts val="1600"/>
               </a:spcBef>
@@ -4809,7 +4938,7 @@
               <a:buChar char="●"/>
               <a:defRPr sz="1200"/>
             </a:lvl7pPr>
-            <a:lvl8pPr indent="-304800" lvl="7" marL="3657600">
+            <a:lvl8pPr marL="3657600" lvl="7" indent="-304800">
               <a:spcBef>
                 <a:spcPts val="1600"/>
               </a:spcBef>
@@ -4820,7 +4949,7 @@
               <a:buChar char="○"/>
               <a:defRPr sz="1200"/>
             </a:lvl8pPr>
-            <a:lvl9pPr indent="-304800" lvl="8" marL="4114800">
+            <a:lvl9pPr marL="4114800" lvl="8" indent="-304800">
               <a:spcBef>
                 <a:spcPts val="1600"/>
               </a:spcBef>
@@ -4832,15 +4961,19 @@
               <a:defRPr sz="1200"/>
             </a:lvl9pPr>
           </a:lstStyle>
-          <a:p/>
+          <a:p>
+            <a:endParaRPr/>
+          </a:p>
         </p:txBody>
       </p:sp>
       <p:sp>
         <p:nvSpPr>
           <p:cNvPr id="43" name="Google Shape;43;p7"/>
-          <p:cNvSpPr txBox="1"/>
+          <p:cNvSpPr txBox="1">
+            <a:spLocks noGrp="1"/>
+          </p:cNvSpPr>
           <p:nvPr>
-            <p:ph idx="12" type="sldNum"/>
+            <p:ph type="sldNum" idx="12"/>
           </p:nvPr>
         </p:nvSpPr>
         <p:spPr>
@@ -4853,7 +4986,7 @@
           </a:prstGeom>
         </p:spPr>
         <p:txBody>
-          <a:bodyPr anchorCtr="0" anchor="ctr" bIns="91425" lIns="91425" spcFirstLastPara="1" rIns="91425" wrap="square" tIns="91425">
+          <a:bodyPr spcFirstLastPara="1" wrap="square" lIns="91425" tIns="91425" rIns="91425" bIns="91425" anchor="ctr" anchorCtr="0">
             <a:noAutofit/>
           </a:bodyPr>
           <a:lstStyle>
@@ -4895,7 +5028,7 @@
             </a:lvl9pPr>
           </a:lstStyle>
           <a:p>
-            <a:pPr indent="0" lvl="0" marL="0" rtl="0" algn="r">
+            <a:pPr marL="0" lvl="0" indent="0" algn="r" rtl="0">
               <a:spcBef>
                 <a:spcPts val="0"/>
               </a:spcBef>
@@ -4906,7 +5039,7 @@
             </a:pPr>
             <a:fld id="{00000000-1234-1234-1234-123412341234}" type="slidenum">
               <a:rPr lang="it"/>
-              <a:t>‹#›</a:t>
+              <a:t>‹N›</a:t>
             </a:fld>
             <a:endParaRPr/>
           </a:p>
@@ -4921,18 +5054,19 @@
 </file>
 
 <file path=ppt/slideLayouts/slideLayout7.xml><?xml version="1.0" encoding="utf-8"?>
-<p:sldLayout xmlns:a="http://schemas.openxmlformats.org/drawingml/2006/main" xmlns:r="http://schemas.openxmlformats.org/officeDocument/2006/relationships" xmlns:mc="http://schemas.openxmlformats.org/markup-compatibility/2006" xmlns:mv="urn:schemas-microsoft-com:mac:vml" xmlns:p="http://schemas.openxmlformats.org/presentationml/2006/main" xmlns:c="http://schemas.openxmlformats.org/drawingml/2006/chart" xmlns:dgm="http://schemas.openxmlformats.org/drawingml/2006/diagram" xmlns:o="urn:schemas-microsoft-com:office:office" xmlns:v="urn:schemas-microsoft-com:vml" xmlns:pvml="urn:schemas-microsoft-com:office:powerpoint" xmlns:com="http://schemas.openxmlformats.org/drawingml/2006/compatibility" xmlns:p14="http://schemas.microsoft.com/office/powerpoint/2010/main" xmlns:p15="http://schemas.microsoft.com/office/powerpoint/2012/main" xmlns:ahyp="http://schemas.microsoft.com/office/drawing/2018/hyperlinkcolor" matchingName="Main point">
+<p:sldLayout xmlns:a="http://schemas.openxmlformats.org/drawingml/2006/main" xmlns:r="http://schemas.openxmlformats.org/officeDocument/2006/relationships" xmlns:p="http://schemas.openxmlformats.org/presentationml/2006/main" matchingName="Main point">
   <p:cSld name="MAIN_POINT">
     <p:bg>
       <p:bgPr>
         <a:solidFill>
           <a:schemeClr val="lt2"/>
         </a:solidFill>
+        <a:effectLst/>
       </p:bgPr>
     </p:bg>
     <p:spTree>
       <p:nvGrpSpPr>
-        <p:cNvPr id="44" name="Shape 44"/>
+        <p:cNvPr id="1" name="Shape 44"/>
         <p:cNvGrpSpPr/>
         <p:nvPr/>
       </p:nvGrpSpPr>
@@ -4959,21 +5093,23 @@
             <a:avLst/>
           </a:prstGeom>
           <a:noFill/>
-          <a:ln cap="flat" cmpd="sng" w="19050">
+          <a:ln w="19050" cap="flat" cmpd="sng">
             <a:solidFill>
               <a:schemeClr val="lt1"/>
             </a:solidFill>
             <a:prstDash val="solid"/>
             <a:round/>
-            <a:headEnd len="sm" w="sm" type="none"/>
-            <a:tailEnd len="sm" w="sm" type="none"/>
+            <a:headEnd type="none" w="sm" len="sm"/>
+            <a:tailEnd type="none" w="sm" len="sm"/>
           </a:ln>
         </p:spPr>
       </p:cxnSp>
       <p:sp>
         <p:nvSpPr>
           <p:cNvPr id="46" name="Google Shape;46;p8"/>
-          <p:cNvSpPr txBox="1"/>
+          <p:cNvSpPr txBox="1">
+            <a:spLocks noGrp="1"/>
+          </p:cNvSpPr>
           <p:nvPr>
             <p:ph type="title"/>
           </p:nvPr>
@@ -4988,7 +5124,7 @@
           </a:prstGeom>
         </p:spPr>
         <p:txBody>
-          <a:bodyPr anchorCtr="0" anchor="ctr" bIns="91425" lIns="91425" spcFirstLastPara="1" rIns="91425" wrap="square" tIns="91425">
+          <a:bodyPr spcFirstLastPara="1" wrap="square" lIns="91425" tIns="91425" rIns="91425" bIns="91425" anchor="ctr" anchorCtr="0">
             <a:noAutofit/>
           </a:bodyPr>
           <a:lstStyle>
@@ -5155,15 +5291,19 @@
               </a:defRPr>
             </a:lvl9pPr>
           </a:lstStyle>
-          <a:p/>
+          <a:p>
+            <a:endParaRPr/>
+          </a:p>
         </p:txBody>
       </p:sp>
       <p:sp>
         <p:nvSpPr>
           <p:cNvPr id="47" name="Google Shape;47;p8"/>
-          <p:cNvSpPr txBox="1"/>
+          <p:cNvSpPr txBox="1">
+            <a:spLocks noGrp="1"/>
+          </p:cNvSpPr>
           <p:nvPr>
-            <p:ph idx="12" type="sldNum"/>
+            <p:ph type="sldNum" idx="12"/>
           </p:nvPr>
         </p:nvSpPr>
         <p:spPr>
@@ -5176,7 +5316,7 @@
           </a:prstGeom>
         </p:spPr>
         <p:txBody>
-          <a:bodyPr anchorCtr="0" anchor="ctr" bIns="91425" lIns="91425" spcFirstLastPara="1" rIns="91425" wrap="square" tIns="91425">
+          <a:bodyPr spcFirstLastPara="1" wrap="square" lIns="91425" tIns="91425" rIns="91425" bIns="91425" anchor="ctr" anchorCtr="0">
             <a:noAutofit/>
           </a:bodyPr>
           <a:lstStyle>
@@ -5254,7 +5394,7 @@
             </a:lvl9pPr>
           </a:lstStyle>
           <a:p>
-            <a:pPr indent="0" lvl="0" marL="0" rtl="0" algn="r">
+            <a:pPr marL="0" lvl="0" indent="0" algn="r" rtl="0">
               <a:spcBef>
                 <a:spcPts val="0"/>
               </a:spcBef>
@@ -5265,7 +5405,7 @@
             </a:pPr>
             <a:fld id="{00000000-1234-1234-1234-123412341234}" type="slidenum">
               <a:rPr lang="it"/>
-              <a:t>‹#›</a:t>
+              <a:t>‹N›</a:t>
             </a:fld>
             <a:endParaRPr/>
           </a:p>
@@ -5280,11 +5420,11 @@
 </file>
 
 <file path=ppt/slideLayouts/slideLayout8.xml><?xml version="1.0" encoding="utf-8"?>
-<p:sldLayout xmlns:a="http://schemas.openxmlformats.org/drawingml/2006/main" xmlns:r="http://schemas.openxmlformats.org/officeDocument/2006/relationships" xmlns:mc="http://schemas.openxmlformats.org/markup-compatibility/2006" xmlns:mv="urn:schemas-microsoft-com:mac:vml" xmlns:p="http://schemas.openxmlformats.org/presentationml/2006/main" xmlns:c="http://schemas.openxmlformats.org/drawingml/2006/chart" xmlns:dgm="http://schemas.openxmlformats.org/drawingml/2006/diagram" xmlns:o="urn:schemas-microsoft-com:office:office" xmlns:v="urn:schemas-microsoft-com:vml" xmlns:pvml="urn:schemas-microsoft-com:office:powerpoint" xmlns:com="http://schemas.openxmlformats.org/drawingml/2006/compatibility" xmlns:p14="http://schemas.microsoft.com/office/powerpoint/2010/main" xmlns:p15="http://schemas.microsoft.com/office/powerpoint/2012/main" xmlns:ahyp="http://schemas.microsoft.com/office/drawing/2018/hyperlinkcolor" matchingName="Section title and description">
+<p:sldLayout xmlns:a="http://schemas.openxmlformats.org/drawingml/2006/main" xmlns:r="http://schemas.openxmlformats.org/officeDocument/2006/relationships" xmlns:p="http://schemas.openxmlformats.org/presentationml/2006/main" matchingName="Section title and description">
   <p:cSld name="SECTION_TITLE_AND_DESCRIPTION">
     <p:spTree>
       <p:nvGrpSpPr>
-        <p:cNvPr id="48" name="Shape 48"/>
+        <p:cNvPr id="1" name="Shape 48"/>
         <p:cNvGrpSpPr/>
         <p:nvPr/>
       </p:nvGrpSpPr>
@@ -5318,12 +5458,12 @@
           </a:ln>
         </p:spPr>
         <p:txBody>
-          <a:bodyPr anchorCtr="0" anchor="ctr" bIns="91425" lIns="91425" spcFirstLastPara="1" rIns="91425" wrap="square" tIns="91425">
+          <a:bodyPr spcFirstLastPara="1" wrap="square" lIns="91425" tIns="91425" rIns="91425" bIns="91425" anchor="ctr" anchorCtr="0">
             <a:noAutofit/>
           </a:bodyPr>
           <a:lstStyle/>
           <a:p>
-            <a:pPr indent="0" lvl="0" marL="0" rtl="0" algn="l">
+            <a:pPr marL="0" lvl="0" indent="0" algn="l" rtl="0">
               <a:spcBef>
                 <a:spcPts val="0"/>
               </a:spcBef>
@@ -5332,9 +5472,6 @@
               </a:spcAft>
               <a:buNone/>
             </a:pPr>
-            <a:r>
-              <a:t/>
-            </a:r>
             <a:endParaRPr/>
           </a:p>
         </p:txBody>
@@ -5354,21 +5491,23 @@
             <a:avLst/>
           </a:prstGeom>
           <a:noFill/>
-          <a:ln cap="flat" cmpd="sng" w="19050">
+          <a:ln w="19050" cap="flat" cmpd="sng">
             <a:solidFill>
               <a:schemeClr val="lt1"/>
             </a:solidFill>
             <a:prstDash val="solid"/>
             <a:round/>
-            <a:headEnd len="sm" w="sm" type="none"/>
-            <a:tailEnd len="sm" w="sm" type="none"/>
+            <a:headEnd type="none" w="sm" len="sm"/>
+            <a:tailEnd type="none" w="sm" len="sm"/>
           </a:ln>
         </p:spPr>
       </p:cxnSp>
       <p:sp>
         <p:nvSpPr>
           <p:cNvPr id="51" name="Google Shape;51;p9"/>
-          <p:cNvSpPr txBox="1"/>
+          <p:cNvSpPr txBox="1">
+            <a:spLocks noGrp="1"/>
+          </p:cNvSpPr>
           <p:nvPr>
             <p:ph type="title"/>
           </p:nvPr>
@@ -5383,7 +5522,7 @@
           </a:prstGeom>
         </p:spPr>
         <p:txBody>
-          <a:bodyPr anchorCtr="0" anchor="b" bIns="91425" lIns="91425" spcFirstLastPara="1" rIns="91425" wrap="square" tIns="91425">
+          <a:bodyPr spcFirstLastPara="1" wrap="square" lIns="91425" tIns="91425" rIns="91425" bIns="91425" anchor="b" anchorCtr="0">
             <a:noAutofit/>
           </a:bodyPr>
           <a:lstStyle>
@@ -5550,15 +5689,19 @@
               </a:defRPr>
             </a:lvl9pPr>
           </a:lstStyle>
-          <a:p/>
+          <a:p>
+            <a:endParaRPr/>
+          </a:p>
         </p:txBody>
       </p:sp>
       <p:sp>
         <p:nvSpPr>
           <p:cNvPr id="52" name="Google Shape;52;p9"/>
-          <p:cNvSpPr txBox="1"/>
+          <p:cNvSpPr txBox="1">
+            <a:spLocks noGrp="1"/>
+          </p:cNvSpPr>
           <p:nvPr>
-            <p:ph idx="1" type="subTitle"/>
+            <p:ph type="subTitle" idx="1"/>
           </p:nvPr>
         </p:nvSpPr>
         <p:spPr>
@@ -5571,7 +5714,7 @@
           </a:prstGeom>
         </p:spPr>
         <p:txBody>
-          <a:bodyPr anchorCtr="0" anchor="t" bIns="91425" lIns="91425" spcFirstLastPara="1" rIns="91425" wrap="square" tIns="91425">
+          <a:bodyPr spcFirstLastPara="1" wrap="square" lIns="91425" tIns="91425" rIns="91425" bIns="91425" anchor="t" anchorCtr="0">
             <a:noAutofit/>
           </a:bodyPr>
           <a:lstStyle>
@@ -5702,15 +5845,19 @@
               <a:defRPr sz="2100"/>
             </a:lvl9pPr>
           </a:lstStyle>
-          <a:p/>
+          <a:p>
+            <a:endParaRPr/>
+          </a:p>
         </p:txBody>
       </p:sp>
       <p:sp>
         <p:nvSpPr>
           <p:cNvPr id="53" name="Google Shape;53;p9"/>
-          <p:cNvSpPr txBox="1"/>
+          <p:cNvSpPr txBox="1">
+            <a:spLocks noGrp="1"/>
+          </p:cNvSpPr>
           <p:nvPr>
-            <p:ph idx="2" type="body"/>
+            <p:ph type="body" idx="2"/>
           </p:nvPr>
         </p:nvSpPr>
         <p:spPr>
@@ -5723,11 +5870,11 @@
           </a:prstGeom>
         </p:spPr>
         <p:txBody>
-          <a:bodyPr anchorCtr="0" anchor="ctr" bIns="91425" lIns="91425" spcFirstLastPara="1" rIns="91425" wrap="square" tIns="91425">
+          <a:bodyPr spcFirstLastPara="1" wrap="square" lIns="91425" tIns="91425" rIns="91425" bIns="91425" anchor="ctr" anchorCtr="0">
             <a:noAutofit/>
           </a:bodyPr>
           <a:lstStyle>
-            <a:lvl1pPr indent="-342900" lvl="0" marL="457200">
+            <a:lvl1pPr marL="457200" lvl="0" indent="-342900">
               <a:spcBef>
                 <a:spcPts val="0"/>
               </a:spcBef>
@@ -5745,7 +5892,7 @@
                 </a:solidFill>
               </a:defRPr>
             </a:lvl1pPr>
-            <a:lvl2pPr indent="-317500" lvl="1" marL="914400">
+            <a:lvl2pPr marL="914400" lvl="1" indent="-317500">
               <a:spcBef>
                 <a:spcPts val="1600"/>
               </a:spcBef>
@@ -5763,7 +5910,7 @@
                 </a:solidFill>
               </a:defRPr>
             </a:lvl2pPr>
-            <a:lvl3pPr indent="-317500" lvl="2" marL="1371600">
+            <a:lvl3pPr marL="1371600" lvl="2" indent="-317500">
               <a:spcBef>
                 <a:spcPts val="1600"/>
               </a:spcBef>
@@ -5781,7 +5928,7 @@
                 </a:solidFill>
               </a:defRPr>
             </a:lvl3pPr>
-            <a:lvl4pPr indent="-317500" lvl="3" marL="1828800">
+            <a:lvl4pPr marL="1828800" lvl="3" indent="-317500">
               <a:spcBef>
                 <a:spcPts val="1600"/>
               </a:spcBef>
@@ -5799,7 +5946,7 @@
                 </a:solidFill>
               </a:defRPr>
             </a:lvl4pPr>
-            <a:lvl5pPr indent="-317500" lvl="4" marL="2286000">
+            <a:lvl5pPr marL="2286000" lvl="4" indent="-317500">
               <a:spcBef>
                 <a:spcPts val="1600"/>
               </a:spcBef>
@@ -5817,7 +5964,7 @@
                 </a:solidFill>
               </a:defRPr>
             </a:lvl5pPr>
-            <a:lvl6pPr indent="-317500" lvl="5" marL="2743200">
+            <a:lvl6pPr marL="2743200" lvl="5" indent="-317500">
               <a:spcBef>
                 <a:spcPts val="1600"/>
               </a:spcBef>
@@ -5835,7 +5982,7 @@
                 </a:solidFill>
               </a:defRPr>
             </a:lvl6pPr>
-            <a:lvl7pPr indent="-317500" lvl="6" marL="3200400">
+            <a:lvl7pPr marL="3200400" lvl="6" indent="-317500">
               <a:spcBef>
                 <a:spcPts val="1600"/>
               </a:spcBef>
@@ -5853,7 +6000,7 @@
                 </a:solidFill>
               </a:defRPr>
             </a:lvl7pPr>
-            <a:lvl8pPr indent="-317500" lvl="7" marL="3657600">
+            <a:lvl8pPr marL="3657600" lvl="7" indent="-317500">
               <a:spcBef>
                 <a:spcPts val="1600"/>
               </a:spcBef>
@@ -5871,7 +6018,7 @@
                 </a:solidFill>
               </a:defRPr>
             </a:lvl8pPr>
-            <a:lvl9pPr indent="-317500" lvl="8" marL="4114800">
+            <a:lvl9pPr marL="4114800" lvl="8" indent="-317500">
               <a:spcBef>
                 <a:spcPts val="1600"/>
               </a:spcBef>
@@ -5890,15 +6037,19 @@
               </a:defRPr>
             </a:lvl9pPr>
           </a:lstStyle>
-          <a:p/>
+          <a:p>
+            <a:endParaRPr/>
+          </a:p>
         </p:txBody>
       </p:sp>
       <p:sp>
         <p:nvSpPr>
           <p:cNvPr id="54" name="Google Shape;54;p9"/>
-          <p:cNvSpPr txBox="1"/>
+          <p:cNvSpPr txBox="1">
+            <a:spLocks noGrp="1"/>
+          </p:cNvSpPr>
           <p:nvPr>
-            <p:ph idx="12" type="sldNum"/>
+            <p:ph type="sldNum" idx="12"/>
           </p:nvPr>
         </p:nvSpPr>
         <p:spPr>
@@ -5911,7 +6062,7 @@
           </a:prstGeom>
         </p:spPr>
         <p:txBody>
-          <a:bodyPr anchorCtr="0" anchor="ctr" bIns="91425" lIns="91425" spcFirstLastPara="1" rIns="91425" wrap="square" tIns="91425">
+          <a:bodyPr spcFirstLastPara="1" wrap="square" lIns="91425" tIns="91425" rIns="91425" bIns="91425" anchor="ctr" anchorCtr="0">
             <a:noAutofit/>
           </a:bodyPr>
           <a:lstStyle>
@@ -5989,7 +6140,7 @@
             </a:lvl9pPr>
           </a:lstStyle>
           <a:p>
-            <a:pPr indent="0" lvl="0" marL="0" rtl="0" algn="r">
+            <a:pPr marL="0" lvl="0" indent="0" algn="r" rtl="0">
               <a:spcBef>
                 <a:spcPts val="0"/>
               </a:spcBef>
@@ -6000,7 +6151,7 @@
             </a:pPr>
             <a:fld id="{00000000-1234-1234-1234-123412341234}" type="slidenum">
               <a:rPr lang="it"/>
-              <a:t>‹#›</a:t>
+              <a:t>‹N›</a:t>
             </a:fld>
             <a:endParaRPr/>
           </a:p>
@@ -6015,11 +6166,11 @@
 </file>
 
 <file path=ppt/slideLayouts/slideLayout9.xml><?xml version="1.0" encoding="utf-8"?>
-<p:sldLayout xmlns:a="http://schemas.openxmlformats.org/drawingml/2006/main" xmlns:r="http://schemas.openxmlformats.org/officeDocument/2006/relationships" xmlns:mc="http://schemas.openxmlformats.org/markup-compatibility/2006" xmlns:mv="urn:schemas-microsoft-com:mac:vml" xmlns:p="http://schemas.openxmlformats.org/presentationml/2006/main" xmlns:c="http://schemas.openxmlformats.org/drawingml/2006/chart" xmlns:dgm="http://schemas.openxmlformats.org/drawingml/2006/diagram" xmlns:o="urn:schemas-microsoft-com:office:office" xmlns:v="urn:schemas-microsoft-com:vml" xmlns:pvml="urn:schemas-microsoft-com:office:powerpoint" xmlns:com="http://schemas.openxmlformats.org/drawingml/2006/compatibility" xmlns:p14="http://schemas.microsoft.com/office/powerpoint/2010/main" xmlns:p15="http://schemas.microsoft.com/office/powerpoint/2012/main" xmlns:ahyp="http://schemas.microsoft.com/office/drawing/2018/hyperlinkcolor" matchingName="Caption">
+<p:sldLayout xmlns:a="http://schemas.openxmlformats.org/drawingml/2006/main" xmlns:r="http://schemas.openxmlformats.org/officeDocument/2006/relationships" xmlns:p="http://schemas.openxmlformats.org/presentationml/2006/main" matchingName="Caption">
   <p:cSld name="CAPTION_ONLY">
     <p:spTree>
       <p:nvGrpSpPr>
-        <p:cNvPr id="55" name="Shape 55"/>
+        <p:cNvPr id="1" name="Shape 55"/>
         <p:cNvGrpSpPr/>
         <p:nvPr/>
       </p:nvGrpSpPr>
@@ -6046,14 +6197,14 @@
             <a:avLst/>
           </a:prstGeom>
           <a:noFill/>
-          <a:ln cap="flat" cmpd="sng" w="19050">
+          <a:ln w="19050" cap="flat" cmpd="sng">
             <a:solidFill>
               <a:schemeClr val="dk2"/>
             </a:solidFill>
             <a:prstDash val="solid"/>
             <a:round/>
-            <a:headEnd len="sm" w="sm" type="none"/>
-            <a:tailEnd len="sm" w="sm" type="none"/>
+            <a:headEnd type="none" w="sm" len="sm"/>
+            <a:tailEnd type="none" w="sm" len="sm"/>
           </a:ln>
         </p:spPr>
       </p:cxnSp>
@@ -6072,23 +6223,25 @@
             <a:avLst/>
           </a:prstGeom>
           <a:noFill/>
-          <a:ln cap="flat" cmpd="sng" w="19050">
+          <a:ln w="19050" cap="flat" cmpd="sng">
             <a:solidFill>
               <a:schemeClr val="dk2"/>
             </a:solidFill>
             <a:prstDash val="solid"/>
             <a:round/>
-            <a:headEnd len="sm" w="sm" type="none"/>
-            <a:tailEnd len="sm" w="sm" type="none"/>
+            <a:headEnd type="none" w="sm" len="sm"/>
+            <a:tailEnd type="none" w="sm" len="sm"/>
           </a:ln>
         </p:spPr>
       </p:cxnSp>
       <p:sp>
         <p:nvSpPr>
           <p:cNvPr id="58" name="Google Shape;58;p10"/>
-          <p:cNvSpPr txBox="1"/>
+          <p:cNvSpPr txBox="1">
+            <a:spLocks noGrp="1"/>
+          </p:cNvSpPr>
           <p:nvPr>
-            <p:ph idx="1" type="body"/>
+            <p:ph type="body" idx="1"/>
           </p:nvPr>
         </p:nvSpPr>
         <p:spPr>
@@ -6101,11 +6254,11 @@
           </a:prstGeom>
         </p:spPr>
         <p:txBody>
-          <a:bodyPr anchorCtr="0" anchor="ctr" bIns="91425" lIns="91425" spcFirstLastPara="1" rIns="91425" wrap="square" tIns="91425">
+          <a:bodyPr spcFirstLastPara="1" wrap="square" lIns="91425" tIns="91425" rIns="91425" bIns="91425" anchor="ctr" anchorCtr="0">
             <a:noAutofit/>
           </a:bodyPr>
           <a:lstStyle>
-            <a:lvl1pPr indent="-228600" lvl="0" marL="457200">
+            <a:lvl1pPr marL="457200" lvl="0" indent="-228600">
               <a:lnSpc>
                 <a:spcPct val="100000"/>
               </a:lnSpc>
@@ -6120,15 +6273,19 @@
               <a:defRPr/>
             </a:lvl1pPr>
           </a:lstStyle>
-          <a:p/>
+          <a:p>
+            <a:endParaRPr/>
+          </a:p>
         </p:txBody>
       </p:sp>
       <p:sp>
         <p:nvSpPr>
           <p:cNvPr id="59" name="Google Shape;59;p10"/>
-          <p:cNvSpPr txBox="1"/>
+          <p:cNvSpPr txBox="1">
+            <a:spLocks noGrp="1"/>
+          </p:cNvSpPr>
           <p:nvPr>
-            <p:ph idx="12" type="sldNum"/>
+            <p:ph type="sldNum" idx="12"/>
           </p:nvPr>
         </p:nvSpPr>
         <p:spPr>
@@ -6141,7 +6298,7 @@
           </a:prstGeom>
         </p:spPr>
         <p:txBody>
-          <a:bodyPr anchorCtr="0" anchor="ctr" bIns="91425" lIns="91425" spcFirstLastPara="1" rIns="91425" wrap="square" tIns="91425">
+          <a:bodyPr spcFirstLastPara="1" wrap="square" lIns="91425" tIns="91425" rIns="91425" bIns="91425" anchor="ctr" anchorCtr="0">
             <a:noAutofit/>
           </a:bodyPr>
           <a:lstStyle>
@@ -6183,7 +6340,7 @@
             </a:lvl9pPr>
           </a:lstStyle>
           <a:p>
-            <a:pPr indent="0" lvl="0" marL="0" rtl="0" algn="r">
+            <a:pPr marL="0" lvl="0" indent="0" algn="r" rtl="0">
               <a:spcBef>
                 <a:spcPts val="0"/>
               </a:spcBef>
@@ -6194,7 +6351,7 @@
             </a:pPr>
             <a:fld id="{00000000-1234-1234-1234-123412341234}" type="slidenum">
               <a:rPr lang="it"/>
-              <a:t>‹#›</a:t>
+              <a:t>‹N›</a:t>
             </a:fld>
             <a:endParaRPr/>
           </a:p>
@@ -6209,18 +6366,19 @@
 </file>
 
 <file path=ppt/slideMasters/slideMaster1.xml><?xml version="1.0" encoding="utf-8"?>
-<p:sldMaster xmlns:a="http://schemas.openxmlformats.org/drawingml/2006/main" xmlns:r="http://schemas.openxmlformats.org/officeDocument/2006/relationships" xmlns:mc="http://schemas.openxmlformats.org/markup-compatibility/2006" xmlns:mv="urn:schemas-microsoft-com:mac:vml" xmlns:p="http://schemas.openxmlformats.org/presentationml/2006/main" xmlns:c="http://schemas.openxmlformats.org/drawingml/2006/chart" xmlns:dgm="http://schemas.openxmlformats.org/drawingml/2006/diagram" xmlns:o="urn:schemas-microsoft-com:office:office" xmlns:v="urn:schemas-microsoft-com:vml" xmlns:pvml="urn:schemas-microsoft-com:office:powerpoint" xmlns:com="http://schemas.openxmlformats.org/drawingml/2006/compatibility" xmlns:p14="http://schemas.microsoft.com/office/powerpoint/2010/main" xmlns:p15="http://schemas.microsoft.com/office/powerpoint/2012/main" xmlns:ahyp="http://schemas.microsoft.com/office/drawing/2018/hyperlinkcolor">
+<p:sldMaster xmlns:a="http://schemas.openxmlformats.org/drawingml/2006/main" xmlns:r="http://schemas.openxmlformats.org/officeDocument/2006/relationships" xmlns:p="http://schemas.openxmlformats.org/presentationml/2006/main">
   <p:cSld name="swiss-2">
     <p:bg>
       <p:bgPr>
         <a:solidFill>
           <a:schemeClr val="lt1"/>
         </a:solidFill>
+        <a:effectLst/>
       </p:bgPr>
     </p:bg>
     <p:spTree>
       <p:nvGrpSpPr>
-        <p:cNvPr id="5" name="Shape 5"/>
+        <p:cNvPr id="1" name="Shape 5"/>
         <p:cNvGrpSpPr/>
         <p:nvPr/>
       </p:nvGrpSpPr>
@@ -6235,7 +6393,9 @@
       <p:sp>
         <p:nvSpPr>
           <p:cNvPr id="6" name="Google Shape;6;p1"/>
-          <p:cNvSpPr txBox="1"/>
+          <p:cNvSpPr txBox="1">
+            <a:spLocks noGrp="1"/>
+          </p:cNvSpPr>
           <p:nvPr>
             <p:ph type="title"/>
           </p:nvPr>
@@ -6254,7 +6414,7 @@
           </a:ln>
         </p:spPr>
         <p:txBody>
-          <a:bodyPr anchorCtr="0" anchor="t" bIns="91425" lIns="91425" spcFirstLastPara="1" rIns="91425" wrap="square" tIns="91425">
+          <a:bodyPr spcFirstLastPara="1" wrap="square" lIns="91425" tIns="91425" rIns="91425" bIns="91425" anchor="t" anchorCtr="0">
             <a:noAutofit/>
           </a:bodyPr>
           <a:lstStyle>
@@ -6271,7 +6431,7 @@
               <a:buSzPts val="3000"/>
               <a:buFont typeface="Raleway"/>
               <a:buNone/>
-              <a:defRPr b="1" sz="3000">
+              <a:defRPr sz="3000" b="1">
                 <a:solidFill>
                   <a:schemeClr val="dk2"/>
                 </a:solidFill>
@@ -6294,7 +6454,7 @@
               <a:buSzPts val="3000"/>
               <a:buFont typeface="Raleway"/>
               <a:buNone/>
-              <a:defRPr b="1" sz="3000">
+              <a:defRPr sz="3000" b="1">
                 <a:solidFill>
                   <a:schemeClr val="dk2"/>
                 </a:solidFill>
@@ -6317,7 +6477,7 @@
               <a:buSzPts val="3000"/>
               <a:buFont typeface="Raleway"/>
               <a:buNone/>
-              <a:defRPr b="1" sz="3000">
+              <a:defRPr sz="3000" b="1">
                 <a:solidFill>
                   <a:schemeClr val="dk2"/>
                 </a:solidFill>
@@ -6340,7 +6500,7 @@
               <a:buSzPts val="3000"/>
               <a:buFont typeface="Raleway"/>
               <a:buNone/>
-              <a:defRPr b="1" sz="3000">
+              <a:defRPr sz="3000" b="1">
                 <a:solidFill>
                   <a:schemeClr val="dk2"/>
                 </a:solidFill>
@@ -6363,7 +6523,7 @@
               <a:buSzPts val="3000"/>
               <a:buFont typeface="Raleway"/>
               <a:buNone/>
-              <a:defRPr b="1" sz="3000">
+              <a:defRPr sz="3000" b="1">
                 <a:solidFill>
                   <a:schemeClr val="dk2"/>
                 </a:solidFill>
@@ -6386,7 +6546,7 @@
               <a:buSzPts val="3000"/>
               <a:buFont typeface="Raleway"/>
               <a:buNone/>
-              <a:defRPr b="1" sz="3000">
+              <a:defRPr sz="3000" b="1">
                 <a:solidFill>
                   <a:schemeClr val="dk2"/>
                 </a:solidFill>
@@ -6409,7 +6569,7 @@
               <a:buSzPts val="3000"/>
               <a:buFont typeface="Raleway"/>
               <a:buNone/>
-              <a:defRPr b="1" sz="3000">
+              <a:defRPr sz="3000" b="1">
                 <a:solidFill>
                   <a:schemeClr val="dk2"/>
                 </a:solidFill>
@@ -6432,7 +6592,7 @@
               <a:buSzPts val="3000"/>
               <a:buFont typeface="Raleway"/>
               <a:buNone/>
-              <a:defRPr b="1" sz="3000">
+              <a:defRPr sz="3000" b="1">
                 <a:solidFill>
                   <a:schemeClr val="dk2"/>
                 </a:solidFill>
@@ -6455,7 +6615,7 @@
               <a:buSzPts val="3000"/>
               <a:buFont typeface="Raleway"/>
               <a:buNone/>
-              <a:defRPr b="1" sz="3000">
+              <a:defRPr sz="3000" b="1">
                 <a:solidFill>
                   <a:schemeClr val="dk2"/>
                 </a:solidFill>
@@ -6466,15 +6626,19 @@
               </a:defRPr>
             </a:lvl9pPr>
           </a:lstStyle>
-          <a:p/>
+          <a:p>
+            <a:endParaRPr/>
+          </a:p>
         </p:txBody>
       </p:sp>
       <p:sp>
         <p:nvSpPr>
           <p:cNvPr id="7" name="Google Shape;7;p1"/>
-          <p:cNvSpPr txBox="1"/>
+          <p:cNvSpPr txBox="1">
+            <a:spLocks noGrp="1"/>
+          </p:cNvSpPr>
           <p:nvPr>
-            <p:ph idx="1" type="body"/>
+            <p:ph type="body" idx="1"/>
           </p:nvPr>
         </p:nvSpPr>
         <p:spPr>
@@ -6491,11 +6655,11 @@
           </a:ln>
         </p:spPr>
         <p:txBody>
-          <a:bodyPr anchorCtr="0" anchor="t" bIns="91425" lIns="91425" spcFirstLastPara="1" rIns="91425" wrap="square" tIns="91425">
+          <a:bodyPr spcFirstLastPara="1" wrap="square" lIns="91425" tIns="91425" rIns="91425" bIns="91425" anchor="t" anchorCtr="0">
             <a:noAutofit/>
           </a:bodyPr>
           <a:lstStyle>
-            <a:lvl1pPr indent="-342900" lvl="0" marL="457200">
+            <a:lvl1pPr marL="457200" lvl="0" indent="-342900">
               <a:lnSpc>
                 <a:spcPct val="115000"/>
               </a:lnSpc>
@@ -6521,7 +6685,7 @@
                 <a:sym typeface="Lato"/>
               </a:defRPr>
             </a:lvl1pPr>
-            <a:lvl2pPr indent="-317500" lvl="1" marL="914400">
+            <a:lvl2pPr marL="914400" lvl="1" indent="-317500">
               <a:lnSpc>
                 <a:spcPct val="115000"/>
               </a:lnSpc>
@@ -6547,7 +6711,7 @@
                 <a:sym typeface="Lato"/>
               </a:defRPr>
             </a:lvl2pPr>
-            <a:lvl3pPr indent="-317500" lvl="2" marL="1371600">
+            <a:lvl3pPr marL="1371600" lvl="2" indent="-317500">
               <a:lnSpc>
                 <a:spcPct val="115000"/>
               </a:lnSpc>
@@ -6573,7 +6737,7 @@
                 <a:sym typeface="Lato"/>
               </a:defRPr>
             </a:lvl3pPr>
-            <a:lvl4pPr indent="-317500" lvl="3" marL="1828800">
+            <a:lvl4pPr marL="1828800" lvl="3" indent="-317500">
               <a:lnSpc>
                 <a:spcPct val="115000"/>
               </a:lnSpc>
@@ -6599,7 +6763,7 @@
                 <a:sym typeface="Lato"/>
               </a:defRPr>
             </a:lvl4pPr>
-            <a:lvl5pPr indent="-317500" lvl="4" marL="2286000">
+            <a:lvl5pPr marL="2286000" lvl="4" indent="-317500">
               <a:lnSpc>
                 <a:spcPct val="115000"/>
               </a:lnSpc>
@@ -6625,7 +6789,7 @@
                 <a:sym typeface="Lato"/>
               </a:defRPr>
             </a:lvl5pPr>
-            <a:lvl6pPr indent="-317500" lvl="5" marL="2743200">
+            <a:lvl6pPr marL="2743200" lvl="5" indent="-317500">
               <a:lnSpc>
                 <a:spcPct val="115000"/>
               </a:lnSpc>
@@ -6651,7 +6815,7 @@
                 <a:sym typeface="Lato"/>
               </a:defRPr>
             </a:lvl6pPr>
-            <a:lvl7pPr indent="-317500" lvl="6" marL="3200400">
+            <a:lvl7pPr marL="3200400" lvl="6" indent="-317500">
               <a:lnSpc>
                 <a:spcPct val="115000"/>
               </a:lnSpc>
@@ -6677,7 +6841,7 @@
                 <a:sym typeface="Lato"/>
               </a:defRPr>
             </a:lvl7pPr>
-            <a:lvl8pPr indent="-317500" lvl="7" marL="3657600">
+            <a:lvl8pPr marL="3657600" lvl="7" indent="-317500">
               <a:lnSpc>
                 <a:spcPct val="115000"/>
               </a:lnSpc>
@@ -6703,7 +6867,7 @@
                 <a:sym typeface="Lato"/>
               </a:defRPr>
             </a:lvl8pPr>
-            <a:lvl9pPr indent="-317500" lvl="8" marL="4114800">
+            <a:lvl9pPr marL="4114800" lvl="8" indent="-317500">
               <a:lnSpc>
                 <a:spcPct val="115000"/>
               </a:lnSpc>
@@ -6730,15 +6894,19 @@
               </a:defRPr>
             </a:lvl9pPr>
           </a:lstStyle>
-          <a:p/>
+          <a:p>
+            <a:endParaRPr/>
+          </a:p>
         </p:txBody>
       </p:sp>
       <p:sp>
         <p:nvSpPr>
           <p:cNvPr id="8" name="Google Shape;8;p1"/>
-          <p:cNvSpPr txBox="1"/>
+          <p:cNvSpPr txBox="1">
+            <a:spLocks noGrp="1"/>
+          </p:cNvSpPr>
           <p:nvPr>
-            <p:ph idx="12" type="sldNum"/>
+            <p:ph type="sldNum" idx="12"/>
           </p:nvPr>
         </p:nvSpPr>
         <p:spPr>
@@ -6755,7 +6923,7 @@
           </a:ln>
         </p:spPr>
         <p:txBody>
-          <a:bodyPr anchorCtr="0" anchor="ctr" bIns="91425" lIns="91425" spcFirstLastPara="1" rIns="91425" wrap="square" tIns="91425">
+          <a:bodyPr spcFirstLastPara="1" wrap="square" lIns="91425" tIns="91425" rIns="91425" bIns="91425" anchor="ctr" anchorCtr="0">
             <a:noAutofit/>
           </a:bodyPr>
           <a:lstStyle>
@@ -6869,7 +7037,7 @@
             </a:lvl9pPr>
           </a:lstStyle>
           <a:p>
-            <a:pPr indent="0" lvl="0" marL="0" rtl="0" algn="r">
+            <a:pPr marL="0" lvl="0" indent="0" algn="r" rtl="0">
               <a:spcBef>
                 <a:spcPts val="0"/>
               </a:spcBef>
@@ -6880,7 +7048,7 @@
             </a:pPr>
             <a:fld id="{00000000-1234-1234-1234-123412341234}" type="slidenum">
               <a:rPr lang="it"/>
-              <a:t>‹#›</a:t>
+              <a:t>‹N›</a:t>
             </a:fld>
             <a:endParaRPr/>
           </a:p>
@@ -6888,7 +7056,7 @@
       </p:sp>
     </p:spTree>
   </p:cSld>
-  <p:clrMap accent1="accent1" accent2="accent2" accent3="accent3" accent4="accent4" accent5="accent5" accent6="accent6" bg1="lt1" bg2="dk2" tx1="dk1" tx2="lt2" folHlink="folHlink" hlink="hlink"/>
+  <p:clrMap bg1="lt1" tx1="dk1" bg2="dk2" tx2="lt2" accent1="accent1" accent2="accent2" accent3="accent3" accent4="accent4" accent5="accent5" accent6="accent6" hlink="hlink" folHlink="folHlink"/>
   <p:sldLayoutIdLst>
     <p:sldLayoutId id="2147483648" r:id="rId1"/>
     <p:sldLayoutId id="2147483649" r:id="rId2"/>
@@ -6902,10 +7070,10 @@
     <p:sldLayoutId id="2147483657" r:id="rId10"/>
     <p:sldLayoutId id="2147483658" r:id="rId11"/>
   </p:sldLayoutIdLst>
-  <p:hf dt="0" ftr="0" hdr="0" sldNum="0"/>
+  <p:hf sldNum="0" hdr="0" ftr="0" dt="0"/>
   <p:txStyles>
     <p:titleStyle>
-      <a:defPPr lvl="0" marR="0" rtl="0" algn="l">
+      <a:defPPr marR="0" lvl="0" algn="l" rtl="0">
         <a:lnSpc>
           <a:spcPct val="100000"/>
         </a:lnSpc>
@@ -6916,7 +7084,7 @@
           <a:spcPts val="0"/>
         </a:spcAft>
       </a:defPPr>
-      <a:lvl1pPr lvl="0" marR="0" rtl="0" algn="l">
+      <a:lvl1pPr marR="0" lvl="0" algn="l" rtl="0">
         <a:lnSpc>
           <a:spcPct val="100000"/>
         </a:lnSpc>
@@ -6930,7 +7098,7 @@
           <a:srgbClr val="000000"/>
         </a:buClr>
         <a:buFont typeface="Arial"/>
-        <a:defRPr b="0" i="0" sz="1400" u="none" cap="none" strike="noStrike">
+        <a:defRPr sz="1400" b="0" i="0" u="none" strike="noStrike" cap="none">
           <a:solidFill>
             <a:srgbClr val="000000"/>
           </a:solidFill>
@@ -6940,7 +7108,7 @@
           <a:sym typeface="Arial"/>
         </a:defRPr>
       </a:lvl1pPr>
-      <a:lvl2pPr lvl="1" marR="0" rtl="0" algn="l">
+      <a:lvl2pPr marR="0" lvl="1" algn="l" rtl="0">
         <a:lnSpc>
           <a:spcPct val="100000"/>
         </a:lnSpc>
@@ -6954,7 +7122,7 @@
           <a:srgbClr val="000000"/>
         </a:buClr>
         <a:buFont typeface="Arial"/>
-        <a:defRPr b="0" i="0" sz="1400" u="none" cap="none" strike="noStrike">
+        <a:defRPr sz="1400" b="0" i="0" u="none" strike="noStrike" cap="none">
           <a:solidFill>
             <a:srgbClr val="000000"/>
           </a:solidFill>
@@ -6964,7 +7132,7 @@
           <a:sym typeface="Arial"/>
         </a:defRPr>
       </a:lvl2pPr>
-      <a:lvl3pPr lvl="2" marR="0" rtl="0" algn="l">
+      <a:lvl3pPr marR="0" lvl="2" algn="l" rtl="0">
         <a:lnSpc>
           <a:spcPct val="100000"/>
         </a:lnSpc>
@@ -6978,7 +7146,7 @@
           <a:srgbClr val="000000"/>
         </a:buClr>
         <a:buFont typeface="Arial"/>
-        <a:defRPr b="0" i="0" sz="1400" u="none" cap="none" strike="noStrike">
+        <a:defRPr sz="1400" b="0" i="0" u="none" strike="noStrike" cap="none">
           <a:solidFill>
             <a:srgbClr val="000000"/>
           </a:solidFill>
@@ -6988,7 +7156,7 @@
           <a:sym typeface="Arial"/>
         </a:defRPr>
       </a:lvl3pPr>
-      <a:lvl4pPr lvl="3" marR="0" rtl="0" algn="l">
+      <a:lvl4pPr marR="0" lvl="3" algn="l" rtl="0">
         <a:lnSpc>
           <a:spcPct val="100000"/>
         </a:lnSpc>
@@ -7002,7 +7170,7 @@
           <a:srgbClr val="000000"/>
         </a:buClr>
         <a:buFont typeface="Arial"/>
-        <a:defRPr b="0" i="0" sz="1400" u="none" cap="none" strike="noStrike">
+        <a:defRPr sz="1400" b="0" i="0" u="none" strike="noStrike" cap="none">
           <a:solidFill>
             <a:srgbClr val="000000"/>
           </a:solidFill>
@@ -7012,7 +7180,7 @@
           <a:sym typeface="Arial"/>
         </a:defRPr>
       </a:lvl4pPr>
-      <a:lvl5pPr lvl="4" marR="0" rtl="0" algn="l">
+      <a:lvl5pPr marR="0" lvl="4" algn="l" rtl="0">
         <a:lnSpc>
           <a:spcPct val="100000"/>
         </a:lnSpc>
@@ -7026,7 +7194,7 @@
           <a:srgbClr val="000000"/>
         </a:buClr>
         <a:buFont typeface="Arial"/>
-        <a:defRPr b="0" i="0" sz="1400" u="none" cap="none" strike="noStrike">
+        <a:defRPr sz="1400" b="0" i="0" u="none" strike="noStrike" cap="none">
           <a:solidFill>
             <a:srgbClr val="000000"/>
           </a:solidFill>
@@ -7036,7 +7204,7 @@
           <a:sym typeface="Arial"/>
         </a:defRPr>
       </a:lvl5pPr>
-      <a:lvl6pPr lvl="5" marR="0" rtl="0" algn="l">
+      <a:lvl6pPr marR="0" lvl="5" algn="l" rtl="0">
         <a:lnSpc>
           <a:spcPct val="100000"/>
         </a:lnSpc>
@@ -7050,7 +7218,7 @@
           <a:srgbClr val="000000"/>
         </a:buClr>
         <a:buFont typeface="Arial"/>
-        <a:defRPr b="0" i="0" sz="1400" u="none" cap="none" strike="noStrike">
+        <a:defRPr sz="1400" b="0" i="0" u="none" strike="noStrike" cap="none">
           <a:solidFill>
             <a:srgbClr val="000000"/>
           </a:solidFill>
@@ -7060,7 +7228,7 @@
           <a:sym typeface="Arial"/>
         </a:defRPr>
       </a:lvl6pPr>
-      <a:lvl7pPr lvl="6" marR="0" rtl="0" algn="l">
+      <a:lvl7pPr marR="0" lvl="6" algn="l" rtl="0">
         <a:lnSpc>
           <a:spcPct val="100000"/>
         </a:lnSpc>
@@ -7074,7 +7242,7 @@
           <a:srgbClr val="000000"/>
         </a:buClr>
         <a:buFont typeface="Arial"/>
-        <a:defRPr b="0" i="0" sz="1400" u="none" cap="none" strike="noStrike">
+        <a:defRPr sz="1400" b="0" i="0" u="none" strike="noStrike" cap="none">
           <a:solidFill>
             <a:srgbClr val="000000"/>
           </a:solidFill>
@@ -7084,7 +7252,7 @@
           <a:sym typeface="Arial"/>
         </a:defRPr>
       </a:lvl7pPr>
-      <a:lvl8pPr lvl="7" marR="0" rtl="0" algn="l">
+      <a:lvl8pPr marR="0" lvl="7" algn="l" rtl="0">
         <a:lnSpc>
           <a:spcPct val="100000"/>
         </a:lnSpc>
@@ -7098,7 +7266,7 @@
           <a:srgbClr val="000000"/>
         </a:buClr>
         <a:buFont typeface="Arial"/>
-        <a:defRPr b="0" i="0" sz="1400" u="none" cap="none" strike="noStrike">
+        <a:defRPr sz="1400" b="0" i="0" u="none" strike="noStrike" cap="none">
           <a:solidFill>
             <a:srgbClr val="000000"/>
           </a:solidFill>
@@ -7108,7 +7276,7 @@
           <a:sym typeface="Arial"/>
         </a:defRPr>
       </a:lvl8pPr>
-      <a:lvl9pPr lvl="8" marR="0" rtl="0" algn="l">
+      <a:lvl9pPr marR="0" lvl="8" algn="l" rtl="0">
         <a:lnSpc>
           <a:spcPct val="100000"/>
         </a:lnSpc>
@@ -7122,7 +7290,7 @@
           <a:srgbClr val="000000"/>
         </a:buClr>
         <a:buFont typeface="Arial"/>
-        <a:defRPr b="0" i="0" sz="1400" u="none" cap="none" strike="noStrike">
+        <a:defRPr sz="1400" b="0" i="0" u="none" strike="noStrike" cap="none">
           <a:solidFill>
             <a:srgbClr val="000000"/>
           </a:solidFill>
@@ -7134,7 +7302,7 @@
       </a:lvl9pPr>
     </p:titleStyle>
     <p:bodyStyle>
-      <a:defPPr lvl="0" marR="0" rtl="0" algn="l">
+      <a:defPPr marR="0" lvl="0" algn="l" rtl="0">
         <a:lnSpc>
           <a:spcPct val="100000"/>
         </a:lnSpc>
@@ -7145,7 +7313,7 @@
           <a:spcPts val="0"/>
         </a:spcAft>
       </a:defPPr>
-      <a:lvl1pPr lvl="0" marR="0" rtl="0" algn="l">
+      <a:lvl1pPr marR="0" lvl="0" algn="l" rtl="0">
         <a:lnSpc>
           <a:spcPct val="100000"/>
         </a:lnSpc>
@@ -7159,7 +7327,7 @@
           <a:srgbClr val="000000"/>
         </a:buClr>
         <a:buFont typeface="Arial"/>
-        <a:defRPr b="0" i="0" sz="1400" u="none" cap="none" strike="noStrike">
+        <a:defRPr sz="1400" b="0" i="0" u="none" strike="noStrike" cap="none">
           <a:solidFill>
             <a:srgbClr val="000000"/>
           </a:solidFill>
@@ -7169,7 +7337,7 @@
           <a:sym typeface="Arial"/>
         </a:defRPr>
       </a:lvl1pPr>
-      <a:lvl2pPr lvl="1" marR="0" rtl="0" algn="l">
+      <a:lvl2pPr marR="0" lvl="1" algn="l" rtl="0">
         <a:lnSpc>
           <a:spcPct val="100000"/>
         </a:lnSpc>
@@ -7183,7 +7351,7 @@
           <a:srgbClr val="000000"/>
         </a:buClr>
         <a:buFont typeface="Arial"/>
-        <a:defRPr b="0" i="0" sz="1400" u="none" cap="none" strike="noStrike">
+        <a:defRPr sz="1400" b="0" i="0" u="none" strike="noStrike" cap="none">
           <a:solidFill>
             <a:srgbClr val="000000"/>
           </a:solidFill>
@@ -7193,7 +7361,7 @@
           <a:sym typeface="Arial"/>
         </a:defRPr>
       </a:lvl2pPr>
-      <a:lvl3pPr lvl="2" marR="0" rtl="0" algn="l">
+      <a:lvl3pPr marR="0" lvl="2" algn="l" rtl="0">
         <a:lnSpc>
           <a:spcPct val="100000"/>
         </a:lnSpc>
@@ -7207,7 +7375,7 @@
           <a:srgbClr val="000000"/>
         </a:buClr>
         <a:buFont typeface="Arial"/>
-        <a:defRPr b="0" i="0" sz="1400" u="none" cap="none" strike="noStrike">
+        <a:defRPr sz="1400" b="0" i="0" u="none" strike="noStrike" cap="none">
           <a:solidFill>
             <a:srgbClr val="000000"/>
           </a:solidFill>
@@ -7217,7 +7385,7 @@
           <a:sym typeface="Arial"/>
         </a:defRPr>
       </a:lvl3pPr>
-      <a:lvl4pPr lvl="3" marR="0" rtl="0" algn="l">
+      <a:lvl4pPr marR="0" lvl="3" algn="l" rtl="0">
         <a:lnSpc>
           <a:spcPct val="100000"/>
         </a:lnSpc>
@@ -7231,7 +7399,7 @@
           <a:srgbClr val="000000"/>
         </a:buClr>
         <a:buFont typeface="Arial"/>
-        <a:defRPr b="0" i="0" sz="1400" u="none" cap="none" strike="noStrike">
+        <a:defRPr sz="1400" b="0" i="0" u="none" strike="noStrike" cap="none">
           <a:solidFill>
             <a:srgbClr val="000000"/>
           </a:solidFill>
@@ -7241,7 +7409,7 @@
           <a:sym typeface="Arial"/>
         </a:defRPr>
       </a:lvl4pPr>
-      <a:lvl5pPr lvl="4" marR="0" rtl="0" algn="l">
+      <a:lvl5pPr marR="0" lvl="4" algn="l" rtl="0">
         <a:lnSpc>
           <a:spcPct val="100000"/>
         </a:lnSpc>
@@ -7255,7 +7423,7 @@
           <a:srgbClr val="000000"/>
         </a:buClr>
         <a:buFont typeface="Arial"/>
-        <a:defRPr b="0" i="0" sz="1400" u="none" cap="none" strike="noStrike">
+        <a:defRPr sz="1400" b="0" i="0" u="none" strike="noStrike" cap="none">
           <a:solidFill>
             <a:srgbClr val="000000"/>
           </a:solidFill>
@@ -7265,7 +7433,7 @@
           <a:sym typeface="Arial"/>
         </a:defRPr>
       </a:lvl5pPr>
-      <a:lvl6pPr lvl="5" marR="0" rtl="0" algn="l">
+      <a:lvl6pPr marR="0" lvl="5" algn="l" rtl="0">
         <a:lnSpc>
           <a:spcPct val="100000"/>
         </a:lnSpc>
@@ -7279,7 +7447,7 @@
           <a:srgbClr val="000000"/>
         </a:buClr>
         <a:buFont typeface="Arial"/>
-        <a:defRPr b="0" i="0" sz="1400" u="none" cap="none" strike="noStrike">
+        <a:defRPr sz="1400" b="0" i="0" u="none" strike="noStrike" cap="none">
           <a:solidFill>
             <a:srgbClr val="000000"/>
           </a:solidFill>
@@ -7289,7 +7457,7 @@
           <a:sym typeface="Arial"/>
         </a:defRPr>
       </a:lvl6pPr>
-      <a:lvl7pPr lvl="6" marR="0" rtl="0" algn="l">
+      <a:lvl7pPr marR="0" lvl="6" algn="l" rtl="0">
         <a:lnSpc>
           <a:spcPct val="100000"/>
         </a:lnSpc>
@@ -7303,7 +7471,7 @@
           <a:srgbClr val="000000"/>
         </a:buClr>
         <a:buFont typeface="Arial"/>
-        <a:defRPr b="0" i="0" sz="1400" u="none" cap="none" strike="noStrike">
+        <a:defRPr sz="1400" b="0" i="0" u="none" strike="noStrike" cap="none">
           <a:solidFill>
             <a:srgbClr val="000000"/>
           </a:solidFill>
@@ -7313,7 +7481,7 @@
           <a:sym typeface="Arial"/>
         </a:defRPr>
       </a:lvl7pPr>
-      <a:lvl8pPr lvl="7" marR="0" rtl="0" algn="l">
+      <a:lvl8pPr marR="0" lvl="7" algn="l" rtl="0">
         <a:lnSpc>
           <a:spcPct val="100000"/>
         </a:lnSpc>
@@ -7327,7 +7495,7 @@
           <a:srgbClr val="000000"/>
         </a:buClr>
         <a:buFont typeface="Arial"/>
-        <a:defRPr b="0" i="0" sz="1400" u="none" cap="none" strike="noStrike">
+        <a:defRPr sz="1400" b="0" i="0" u="none" strike="noStrike" cap="none">
           <a:solidFill>
             <a:srgbClr val="000000"/>
           </a:solidFill>
@@ -7337,7 +7505,7 @@
           <a:sym typeface="Arial"/>
         </a:defRPr>
       </a:lvl8pPr>
-      <a:lvl9pPr lvl="8" marR="0" rtl="0" algn="l">
+      <a:lvl9pPr marR="0" lvl="8" algn="l" rtl="0">
         <a:lnSpc>
           <a:spcPct val="100000"/>
         </a:lnSpc>
@@ -7351,7 +7519,7 @@
           <a:srgbClr val="000000"/>
         </a:buClr>
         <a:buFont typeface="Arial"/>
-        <a:defRPr b="0" i="0" sz="1400" u="none" cap="none" strike="noStrike">
+        <a:defRPr sz="1400" b="0" i="0" u="none" strike="noStrike" cap="none">
           <a:solidFill>
             <a:srgbClr val="000000"/>
           </a:solidFill>
@@ -7363,7 +7531,7 @@
       </a:lvl9pPr>
     </p:bodyStyle>
     <p:otherStyle>
-      <a:defPPr lvl="0" marR="0" rtl="0" algn="l">
+      <a:defPPr marR="0" lvl="0" algn="l" rtl="0">
         <a:lnSpc>
           <a:spcPct val="100000"/>
         </a:lnSpc>
@@ -7374,7 +7542,7 @@
           <a:spcPts val="0"/>
         </a:spcAft>
       </a:defPPr>
-      <a:lvl1pPr lvl="0" marR="0" rtl="0" algn="l">
+      <a:lvl1pPr marR="0" lvl="0" algn="l" rtl="0">
         <a:lnSpc>
           <a:spcPct val="100000"/>
         </a:lnSpc>
@@ -7388,7 +7556,7 @@
           <a:srgbClr val="000000"/>
         </a:buClr>
         <a:buFont typeface="Arial"/>
-        <a:defRPr b="0" i="0" sz="1400" u="none" cap="none" strike="noStrike">
+        <a:defRPr sz="1400" b="0" i="0" u="none" strike="noStrike" cap="none">
           <a:solidFill>
             <a:srgbClr val="000000"/>
           </a:solidFill>
@@ -7398,7 +7566,7 @@
           <a:sym typeface="Arial"/>
         </a:defRPr>
       </a:lvl1pPr>
-      <a:lvl2pPr lvl="1" marR="0" rtl="0" algn="l">
+      <a:lvl2pPr marR="0" lvl="1" algn="l" rtl="0">
         <a:lnSpc>
           <a:spcPct val="100000"/>
         </a:lnSpc>
@@ -7412,7 +7580,7 @@
           <a:srgbClr val="000000"/>
         </a:buClr>
         <a:buFont typeface="Arial"/>
-        <a:defRPr b="0" i="0" sz="1400" u="none" cap="none" strike="noStrike">
+        <a:defRPr sz="1400" b="0" i="0" u="none" strike="noStrike" cap="none">
           <a:solidFill>
             <a:srgbClr val="000000"/>
           </a:solidFill>
@@ -7422,7 +7590,7 @@
           <a:sym typeface="Arial"/>
         </a:defRPr>
       </a:lvl2pPr>
-      <a:lvl3pPr lvl="2" marR="0" rtl="0" algn="l">
+      <a:lvl3pPr marR="0" lvl="2" algn="l" rtl="0">
         <a:lnSpc>
           <a:spcPct val="100000"/>
         </a:lnSpc>
@@ -7436,7 +7604,7 @@
           <a:srgbClr val="000000"/>
         </a:buClr>
         <a:buFont typeface="Arial"/>
-        <a:defRPr b="0" i="0" sz="1400" u="none" cap="none" strike="noStrike">
+        <a:defRPr sz="1400" b="0" i="0" u="none" strike="noStrike" cap="none">
           <a:solidFill>
             <a:srgbClr val="000000"/>
           </a:solidFill>
@@ -7446,7 +7614,7 @@
           <a:sym typeface="Arial"/>
         </a:defRPr>
       </a:lvl3pPr>
-      <a:lvl4pPr lvl="3" marR="0" rtl="0" algn="l">
+      <a:lvl4pPr marR="0" lvl="3" algn="l" rtl="0">
         <a:lnSpc>
           <a:spcPct val="100000"/>
         </a:lnSpc>
@@ -7460,7 +7628,7 @@
           <a:srgbClr val="000000"/>
         </a:buClr>
         <a:buFont typeface="Arial"/>
-        <a:defRPr b="0" i="0" sz="1400" u="none" cap="none" strike="noStrike">
+        <a:defRPr sz="1400" b="0" i="0" u="none" strike="noStrike" cap="none">
           <a:solidFill>
             <a:srgbClr val="000000"/>
           </a:solidFill>
@@ -7470,7 +7638,7 @@
           <a:sym typeface="Arial"/>
         </a:defRPr>
       </a:lvl4pPr>
-      <a:lvl5pPr lvl="4" marR="0" rtl="0" algn="l">
+      <a:lvl5pPr marR="0" lvl="4" algn="l" rtl="0">
         <a:lnSpc>
           <a:spcPct val="100000"/>
         </a:lnSpc>
@@ -7484,7 +7652,7 @@
           <a:srgbClr val="000000"/>
         </a:buClr>
         <a:buFont typeface="Arial"/>
-        <a:defRPr b="0" i="0" sz="1400" u="none" cap="none" strike="noStrike">
+        <a:defRPr sz="1400" b="0" i="0" u="none" strike="noStrike" cap="none">
           <a:solidFill>
             <a:srgbClr val="000000"/>
           </a:solidFill>
@@ -7494,7 +7662,7 @@
           <a:sym typeface="Arial"/>
         </a:defRPr>
       </a:lvl5pPr>
-      <a:lvl6pPr lvl="5" marR="0" rtl="0" algn="l">
+      <a:lvl6pPr marR="0" lvl="5" algn="l" rtl="0">
         <a:lnSpc>
           <a:spcPct val="100000"/>
         </a:lnSpc>
@@ -7508,7 +7676,7 @@
           <a:srgbClr val="000000"/>
         </a:buClr>
         <a:buFont typeface="Arial"/>
-        <a:defRPr b="0" i="0" sz="1400" u="none" cap="none" strike="noStrike">
+        <a:defRPr sz="1400" b="0" i="0" u="none" strike="noStrike" cap="none">
           <a:solidFill>
             <a:srgbClr val="000000"/>
           </a:solidFill>
@@ -7518,7 +7686,7 @@
           <a:sym typeface="Arial"/>
         </a:defRPr>
       </a:lvl6pPr>
-      <a:lvl7pPr lvl="6" marR="0" rtl="0" algn="l">
+      <a:lvl7pPr marR="0" lvl="6" algn="l" rtl="0">
         <a:lnSpc>
           <a:spcPct val="100000"/>
         </a:lnSpc>
@@ -7532,7 +7700,7 @@
           <a:srgbClr val="000000"/>
         </a:buClr>
         <a:buFont typeface="Arial"/>
-        <a:defRPr b="0" i="0" sz="1400" u="none" cap="none" strike="noStrike">
+        <a:defRPr sz="1400" b="0" i="0" u="none" strike="noStrike" cap="none">
           <a:solidFill>
             <a:srgbClr val="000000"/>
           </a:solidFill>
@@ -7542,7 +7710,7 @@
           <a:sym typeface="Arial"/>
         </a:defRPr>
       </a:lvl7pPr>
-      <a:lvl8pPr lvl="7" marR="0" rtl="0" algn="l">
+      <a:lvl8pPr marR="0" lvl="7" algn="l" rtl="0">
         <a:lnSpc>
           <a:spcPct val="100000"/>
         </a:lnSpc>
@@ -7556,7 +7724,7 @@
           <a:srgbClr val="000000"/>
         </a:buClr>
         <a:buFont typeface="Arial"/>
-        <a:defRPr b="0" i="0" sz="1400" u="none" cap="none" strike="noStrike">
+        <a:defRPr sz="1400" b="0" i="0" u="none" strike="noStrike" cap="none">
           <a:solidFill>
             <a:srgbClr val="000000"/>
           </a:solidFill>
@@ -7566,7 +7734,7 @@
           <a:sym typeface="Arial"/>
         </a:defRPr>
       </a:lvl8pPr>
-      <a:lvl9pPr lvl="8" marR="0" rtl="0" algn="l">
+      <a:lvl9pPr marR="0" lvl="8" algn="l" rtl="0">
         <a:lnSpc>
           <a:spcPct val="100000"/>
         </a:lnSpc>
@@ -7580,7 +7748,7 @@
           <a:srgbClr val="000000"/>
         </a:buClr>
         <a:buFont typeface="Arial"/>
-        <a:defRPr b="0" i="0" sz="1400" u="none" cap="none" strike="noStrike">
+        <a:defRPr sz="1400" b="0" i="0" u="none" strike="noStrike" cap="none">
           <a:solidFill>
             <a:srgbClr val="000000"/>
           </a:solidFill>
@@ -7596,11 +7764,11 @@
 </file>
 
 <file path=ppt/slides/slide1.xml><?xml version="1.0" encoding="utf-8"?>
-<p:sld xmlns:a="http://schemas.openxmlformats.org/drawingml/2006/main" xmlns:r="http://schemas.openxmlformats.org/officeDocument/2006/relationships" xmlns:mc="http://schemas.openxmlformats.org/markup-compatibility/2006" xmlns:mv="urn:schemas-microsoft-com:mac:vml" xmlns:p="http://schemas.openxmlformats.org/presentationml/2006/main" xmlns:c="http://schemas.openxmlformats.org/drawingml/2006/chart" xmlns:dgm="http://schemas.openxmlformats.org/drawingml/2006/diagram" xmlns:o="urn:schemas-microsoft-com:office:office" xmlns:v="urn:schemas-microsoft-com:vml" xmlns:pvml="urn:schemas-microsoft-com:office:powerpoint" xmlns:com="http://schemas.openxmlformats.org/drawingml/2006/compatibility" xmlns:p14="http://schemas.microsoft.com/office/powerpoint/2010/main" xmlns:p15="http://schemas.microsoft.com/office/powerpoint/2012/main" xmlns:ahyp="http://schemas.microsoft.com/office/drawing/2018/hyperlinkcolor">
+<p:sld xmlns:a="http://schemas.openxmlformats.org/drawingml/2006/main" xmlns:r="http://schemas.openxmlformats.org/officeDocument/2006/relationships" xmlns:p="http://schemas.openxmlformats.org/presentationml/2006/main">
   <p:cSld>
     <p:spTree>
       <p:nvGrpSpPr>
-        <p:cNvPr id="71" name="Shape 71"/>
+        <p:cNvPr id="1" name="Shape 71"/>
         <p:cNvGrpSpPr/>
         <p:nvPr/>
       </p:nvGrpSpPr>
@@ -7615,7 +7783,9 @@
       <p:sp>
         <p:nvSpPr>
           <p:cNvPr id="72" name="Google Shape;72;p13"/>
-          <p:cNvSpPr txBox="1"/>
+          <p:cNvSpPr txBox="1">
+            <a:spLocks noGrp="1"/>
+          </p:cNvSpPr>
           <p:nvPr>
             <p:ph type="ctrTitle"/>
           </p:nvPr>
@@ -7630,12 +7800,12 @@
           </a:prstGeom>
         </p:spPr>
         <p:txBody>
-          <a:bodyPr anchorCtr="0" anchor="t" bIns="91425" lIns="91425" spcFirstLastPara="1" rIns="91425" wrap="square" tIns="91425">
+          <a:bodyPr spcFirstLastPara="1" wrap="square" lIns="91425" tIns="91425" rIns="91425" bIns="91425" anchor="t" anchorCtr="0">
             <a:noAutofit/>
           </a:bodyPr>
           <a:lstStyle/>
           <a:p>
-            <a:pPr indent="0" lvl="0" marL="0" rtl="0" algn="l">
+            <a:pPr marL="0" lvl="0" indent="0" algn="l" rtl="0">
               <a:spcBef>
                 <a:spcPts val="0"/>
               </a:spcBef>
@@ -7655,9 +7825,11 @@
       <p:sp>
         <p:nvSpPr>
           <p:cNvPr id="73" name="Google Shape;73;p13"/>
-          <p:cNvSpPr txBox="1"/>
+          <p:cNvSpPr txBox="1">
+            <a:spLocks noGrp="1"/>
+          </p:cNvSpPr>
           <p:nvPr>
-            <p:ph idx="1" type="subTitle"/>
+            <p:ph type="subTitle" idx="1"/>
           </p:nvPr>
         </p:nvSpPr>
         <p:spPr>
@@ -7670,12 +7842,12 @@
           </a:prstGeom>
         </p:spPr>
         <p:txBody>
-          <a:bodyPr anchorCtr="0" anchor="b" bIns="91425" lIns="91425" spcFirstLastPara="1" rIns="91425" wrap="square" tIns="91425">
+          <a:bodyPr spcFirstLastPara="1" wrap="square" lIns="91425" tIns="91425" rIns="91425" bIns="91425" anchor="b" anchorCtr="0">
             <a:noAutofit/>
           </a:bodyPr>
           <a:lstStyle/>
           <a:p>
-            <a:pPr indent="0" lvl="0" marL="0" rtl="0" algn="l">
+            <a:pPr marL="0" lvl="0" indent="0" algn="l" rtl="0">
               <a:spcBef>
                 <a:spcPts val="0"/>
               </a:spcBef>
@@ -7701,11 +7873,11 @@
 </file>
 
 <file path=ppt/slides/slide10.xml><?xml version="1.0" encoding="utf-8"?>
-<p:sld xmlns:a="http://schemas.openxmlformats.org/drawingml/2006/main" xmlns:r="http://schemas.openxmlformats.org/officeDocument/2006/relationships" xmlns:mc="http://schemas.openxmlformats.org/markup-compatibility/2006" xmlns:mv="urn:schemas-microsoft-com:mac:vml" xmlns:p="http://schemas.openxmlformats.org/presentationml/2006/main" xmlns:c="http://schemas.openxmlformats.org/drawingml/2006/chart" xmlns:dgm="http://schemas.openxmlformats.org/drawingml/2006/diagram" xmlns:o="urn:schemas-microsoft-com:office:office" xmlns:v="urn:schemas-microsoft-com:vml" xmlns:pvml="urn:schemas-microsoft-com:office:powerpoint" xmlns:com="http://schemas.openxmlformats.org/drawingml/2006/compatibility" xmlns:p14="http://schemas.microsoft.com/office/powerpoint/2010/main" xmlns:p15="http://schemas.microsoft.com/office/powerpoint/2012/main" xmlns:ahyp="http://schemas.microsoft.com/office/drawing/2018/hyperlinkcolor">
+<p:sld xmlns:a="http://schemas.openxmlformats.org/drawingml/2006/main" xmlns:r="http://schemas.openxmlformats.org/officeDocument/2006/relationships" xmlns:p="http://schemas.openxmlformats.org/presentationml/2006/main">
   <p:cSld>
     <p:spTree>
       <p:nvGrpSpPr>
-        <p:cNvPr id="148" name="Shape 148"/>
+        <p:cNvPr id="1" name="Shape 148"/>
         <p:cNvGrpSpPr/>
         <p:nvPr/>
       </p:nvGrpSpPr>
@@ -7720,7 +7892,9 @@
       <p:sp>
         <p:nvSpPr>
           <p:cNvPr id="149" name="Google Shape;149;p22"/>
-          <p:cNvSpPr txBox="1"/>
+          <p:cNvSpPr txBox="1">
+            <a:spLocks noGrp="1"/>
+          </p:cNvSpPr>
           <p:nvPr>
             <p:ph type="title"/>
           </p:nvPr>
@@ -7735,12 +7909,12 @@
           </a:prstGeom>
         </p:spPr>
         <p:txBody>
-          <a:bodyPr anchorCtr="0" anchor="ctr" bIns="91425" lIns="91425" spcFirstLastPara="1" rIns="91425" wrap="square" tIns="91425">
+          <a:bodyPr spcFirstLastPara="1" wrap="square" lIns="91425" tIns="91425" rIns="91425" bIns="91425" anchor="ctr" anchorCtr="0">
             <a:noAutofit/>
           </a:bodyPr>
           <a:lstStyle/>
           <a:p>
-            <a:pPr indent="0" lvl="0" marL="0" rtl="0" algn="ctr">
+            <a:pPr marL="0" lvl="0" indent="0" algn="ctr" rtl="0">
               <a:spcBef>
                 <a:spcPts val="0"/>
               </a:spcBef>
@@ -7765,8 +7939,8 @@
         </p:nvSpPr>
         <p:spPr>
           <a:xfrm>
-            <a:off x="2842995" y="4298861"/>
-            <a:ext cx="6008700" cy="590700"/>
+            <a:off x="2711700" y="4267056"/>
+            <a:ext cx="6432300" cy="590700"/>
           </a:xfrm>
           <a:prstGeom prst="rect">
             <a:avLst/>
@@ -7777,12 +7951,12 @@
           </a:ln>
         </p:spPr>
         <p:txBody>
-          <a:bodyPr anchorCtr="0" anchor="t" bIns="91425" lIns="91425" spcFirstLastPara="1" rIns="91425" wrap="square" tIns="91425">
+          <a:bodyPr spcFirstLastPara="1" wrap="square" lIns="91425" tIns="91425" rIns="91425" bIns="91425" anchor="t" anchorCtr="0">
             <a:noAutofit/>
           </a:bodyPr>
           <a:lstStyle/>
           <a:p>
-            <a:pPr indent="0" lvl="0" marL="0" rtl="0" algn="l">
+            <a:pPr marL="0" lvl="0" indent="0" algn="l" rtl="0">
               <a:spcBef>
                 <a:spcPts val="0"/>
               </a:spcBef>
@@ -7824,11 +7998,11 @@
 </file>
 
 <file path=ppt/slides/slide2.xml><?xml version="1.0" encoding="utf-8"?>
-<p:sld xmlns:a="http://schemas.openxmlformats.org/drawingml/2006/main" xmlns:r="http://schemas.openxmlformats.org/officeDocument/2006/relationships" xmlns:mc="http://schemas.openxmlformats.org/markup-compatibility/2006" xmlns:mv="urn:schemas-microsoft-com:mac:vml" xmlns:p="http://schemas.openxmlformats.org/presentationml/2006/main" xmlns:c="http://schemas.openxmlformats.org/drawingml/2006/chart" xmlns:dgm="http://schemas.openxmlformats.org/drawingml/2006/diagram" xmlns:o="urn:schemas-microsoft-com:office:office" xmlns:v="urn:schemas-microsoft-com:vml" xmlns:pvml="urn:schemas-microsoft-com:office:powerpoint" xmlns:com="http://schemas.openxmlformats.org/drawingml/2006/compatibility" xmlns:p14="http://schemas.microsoft.com/office/powerpoint/2010/main" xmlns:p15="http://schemas.microsoft.com/office/powerpoint/2012/main" xmlns:ahyp="http://schemas.microsoft.com/office/drawing/2018/hyperlinkcolor">
+<p:sld xmlns:a="http://schemas.openxmlformats.org/drawingml/2006/main" xmlns:r="http://schemas.openxmlformats.org/officeDocument/2006/relationships" xmlns:p="http://schemas.openxmlformats.org/presentationml/2006/main">
   <p:cSld>
     <p:spTree>
       <p:nvGrpSpPr>
-        <p:cNvPr id="77" name="Shape 77"/>
+        <p:cNvPr id="1" name="Shape 77"/>
         <p:cNvGrpSpPr/>
         <p:nvPr/>
       </p:nvGrpSpPr>
@@ -7843,9 +8017,11 @@
       <p:sp>
         <p:nvSpPr>
           <p:cNvPr id="78" name="Google Shape;78;p14"/>
-          <p:cNvSpPr txBox="1"/>
+          <p:cNvSpPr txBox="1">
+            <a:spLocks noGrp="1"/>
+          </p:cNvSpPr>
           <p:nvPr>
-            <p:ph idx="2" type="body"/>
+            <p:ph type="body" idx="2"/>
           </p:nvPr>
         </p:nvSpPr>
         <p:spPr>
@@ -7858,12 +8034,12 @@
           </a:prstGeom>
         </p:spPr>
         <p:txBody>
-          <a:bodyPr anchorCtr="0" anchor="t" bIns="91425" lIns="91425" spcFirstLastPara="1" rIns="91425" wrap="square" tIns="91425">
+          <a:bodyPr spcFirstLastPara="1" wrap="square" lIns="91425" tIns="91425" rIns="91425" bIns="91425" anchor="t" anchorCtr="0">
             <a:noAutofit/>
           </a:bodyPr>
           <a:lstStyle/>
           <a:p>
-            <a:pPr indent="0" lvl="0" marL="0" rtl="0" algn="l">
+            <a:pPr marL="0" lvl="0" indent="0" algn="l" rtl="0">
               <a:spcBef>
                 <a:spcPts val="0"/>
               </a:spcBef>
@@ -7873,13 +8049,13 @@
               <a:buNone/>
             </a:pPr>
             <a:r>
-              <a:rPr b="1" lang="it"/>
+              <a:rPr lang="it" b="1"/>
               <a:t>Il progetto “TRCinema” è una piattaforma web per la gestione di un cinema multisala.</a:t>
             </a:r>
             <a:endParaRPr b="1"/>
           </a:p>
           <a:p>
-            <a:pPr indent="-323850" lvl="0" marL="457200" rtl="0" algn="l">
+            <a:pPr marL="457200" lvl="0" indent="-323850" algn="l" rtl="0">
               <a:spcBef>
                 <a:spcPts val="1600"/>
               </a:spcBef>
@@ -7890,13 +8066,13 @@
               <a:buChar char="●"/>
             </a:pPr>
             <a:r>
-              <a:rPr b="1" lang="it" sz="1500"/>
+              <a:rPr lang="it" sz="1500" b="1"/>
               <a:t>Permette agli utenti di consultare i film, acquistare i biglietti e gestire le informazioni personali.</a:t>
             </a:r>
-            <a:endParaRPr b="1" sz="1500"/>
+            <a:endParaRPr sz="1500" b="1"/>
           </a:p>
           <a:p>
-            <a:pPr indent="-323850" lvl="0" marL="457200" rtl="0" algn="l">
+            <a:pPr marL="457200" lvl="0" indent="-323850" algn="l" rtl="0">
               <a:spcBef>
                 <a:spcPts val="1600"/>
               </a:spcBef>
@@ -7907,13 +8083,13 @@
               <a:buChar char="●"/>
             </a:pPr>
             <a:r>
-              <a:rPr b="1" lang="it" sz="1500"/>
+              <a:rPr lang="it" sz="1500" b="1"/>
               <a:t>Integra funzioni come l’invio automatico di email di conferma e reset della password.</a:t>
             </a:r>
-            <a:endParaRPr b="1" sz="1500"/>
+            <a:endParaRPr sz="1500" b="1"/>
           </a:p>
           <a:p>
-            <a:pPr indent="-323850" lvl="0" marL="457200" rtl="0" algn="l">
+            <a:pPr marL="457200" lvl="0" indent="-323850" algn="l" rtl="0">
               <a:spcBef>
                 <a:spcPts val="1600"/>
               </a:spcBef>
@@ -7924,13 +8100,13 @@
               <a:buChar char="●"/>
             </a:pPr>
             <a:r>
-              <a:rPr b="1" lang="it" sz="1500"/>
+              <a:rPr lang="it" sz="1500" b="1"/>
               <a:t>Prevede due tipi di utenti: “consumer” e “admin”.</a:t>
             </a:r>
-            <a:endParaRPr b="1" sz="1500"/>
+            <a:endParaRPr sz="1500" b="1"/>
           </a:p>
           <a:p>
-            <a:pPr indent="0" lvl="0" marL="0" rtl="0" algn="l">
+            <a:pPr marL="0" lvl="0" indent="0" algn="l" rtl="0">
               <a:spcBef>
                 <a:spcPts val="1600"/>
               </a:spcBef>
@@ -7939,13 +8115,10 @@
               </a:spcAft>
               <a:buNone/>
             </a:pPr>
-            <a:r>
-              <a:t/>
-            </a:r>
             <a:endParaRPr b="1"/>
           </a:p>
           <a:p>
-            <a:pPr indent="0" lvl="0" marL="0" rtl="0" algn="l">
+            <a:pPr marL="0" lvl="0" indent="0" algn="l" rtl="0">
               <a:spcBef>
                 <a:spcPts val="1600"/>
               </a:spcBef>
@@ -7954,13 +8127,10 @@
               </a:spcAft>
               <a:buNone/>
             </a:pPr>
-            <a:r>
-              <a:t/>
-            </a:r>
             <a:endParaRPr b="1"/>
           </a:p>
           <a:p>
-            <a:pPr indent="0" lvl="0" marL="0" rtl="0" algn="l">
+            <a:pPr marL="0" lvl="0" indent="0" algn="l" rtl="0">
               <a:spcBef>
                 <a:spcPts val="1600"/>
               </a:spcBef>
@@ -7969,9 +8139,6 @@
               </a:spcAft>
               <a:buNone/>
             </a:pPr>
-            <a:r>
-              <a:t/>
-            </a:r>
             <a:endParaRPr b="1"/>
           </a:p>
         </p:txBody>
@@ -8181,11 +8348,11 @@
 </file>
 
 <file path=ppt/slides/slide3.xml><?xml version="1.0" encoding="utf-8"?>
-<p:sld xmlns:a="http://schemas.openxmlformats.org/drawingml/2006/main" xmlns:r="http://schemas.openxmlformats.org/officeDocument/2006/relationships" xmlns:mc="http://schemas.openxmlformats.org/markup-compatibility/2006" xmlns:mv="urn:schemas-microsoft-com:mac:vml" xmlns:p="http://schemas.openxmlformats.org/presentationml/2006/main" xmlns:c="http://schemas.openxmlformats.org/drawingml/2006/chart" xmlns:dgm="http://schemas.openxmlformats.org/drawingml/2006/diagram" xmlns:o="urn:schemas-microsoft-com:office:office" xmlns:v="urn:schemas-microsoft-com:vml" xmlns:pvml="urn:schemas-microsoft-com:office:powerpoint" xmlns:com="http://schemas.openxmlformats.org/drawingml/2006/compatibility" xmlns:p14="http://schemas.microsoft.com/office/powerpoint/2010/main" xmlns:p15="http://schemas.microsoft.com/office/powerpoint/2012/main" xmlns:ahyp="http://schemas.microsoft.com/office/drawing/2018/hyperlinkcolor">
+<p:sld xmlns:a="http://schemas.openxmlformats.org/drawingml/2006/main" xmlns:r="http://schemas.openxmlformats.org/officeDocument/2006/relationships" xmlns:p="http://schemas.openxmlformats.org/presentationml/2006/main">
   <p:cSld>
     <p:spTree>
       <p:nvGrpSpPr>
-        <p:cNvPr id="89" name="Shape 89"/>
+        <p:cNvPr id="1" name="Shape 89"/>
         <p:cNvGrpSpPr/>
         <p:nvPr/>
       </p:nvGrpSpPr>
@@ -8200,7 +8367,9 @@
       <p:sp>
         <p:nvSpPr>
           <p:cNvPr id="90" name="Google Shape;90;p15"/>
-          <p:cNvSpPr txBox="1"/>
+          <p:cNvSpPr txBox="1">
+            <a:spLocks noGrp="1"/>
+          </p:cNvSpPr>
           <p:nvPr>
             <p:ph type="title"/>
           </p:nvPr>
@@ -8215,12 +8384,12 @@
           </a:prstGeom>
         </p:spPr>
         <p:txBody>
-          <a:bodyPr anchorCtr="0" anchor="t" bIns="91425" lIns="91425" spcFirstLastPara="1" rIns="91425" wrap="square" tIns="91425">
+          <a:bodyPr spcFirstLastPara="1" wrap="square" lIns="91425" tIns="91425" rIns="91425" bIns="91425" anchor="t" anchorCtr="0">
             <a:noAutofit/>
           </a:bodyPr>
           <a:lstStyle/>
           <a:p>
-            <a:pPr indent="0" lvl="0" marL="0" rtl="0" algn="l">
+            <a:pPr marL="0" lvl="0" indent="0" algn="l" rtl="0">
               <a:spcBef>
                 <a:spcPts val="0"/>
               </a:spcBef>
@@ -8240,9 +8409,11 @@
       <p:sp>
         <p:nvSpPr>
           <p:cNvPr id="91" name="Google Shape;91;p15"/>
-          <p:cNvSpPr txBox="1"/>
+          <p:cNvSpPr txBox="1">
+            <a:spLocks noGrp="1"/>
+          </p:cNvSpPr>
           <p:nvPr>
-            <p:ph idx="1" type="body"/>
+            <p:ph type="body" idx="1"/>
           </p:nvPr>
         </p:nvSpPr>
         <p:spPr>
@@ -8255,12 +8426,12 @@
           </a:prstGeom>
         </p:spPr>
         <p:txBody>
-          <a:bodyPr anchorCtr="0" anchor="t" bIns="91425" lIns="91425" spcFirstLastPara="1" rIns="91425" wrap="square" tIns="91425">
+          <a:bodyPr spcFirstLastPara="1" wrap="square" lIns="91425" tIns="91425" rIns="91425" bIns="91425" anchor="t" anchorCtr="0">
             <a:noAutofit/>
           </a:bodyPr>
           <a:lstStyle/>
           <a:p>
-            <a:pPr indent="0" lvl="0" marL="0" rtl="0" algn="l">
+            <a:pPr marL="0" lvl="0" indent="0" algn="l" rtl="0">
               <a:spcBef>
                 <a:spcPts val="0"/>
               </a:spcBef>
@@ -8270,45 +8441,21 @@
               <a:buNone/>
             </a:pPr>
             <a:r>
-              <a:rPr b="1" lang="it" sz="2000">
+              <a:rPr lang="it" sz="2000" b="1">
                 <a:solidFill>
                   <a:schemeClr val="dk1"/>
                 </a:solidFill>
               </a:rPr>
-              <a:t>“</a:t>
+              <a:t>“Client-Server”:</a:t>
             </a:r>
-            <a:r>
-              <a:rPr b="1" lang="it" sz="2000">
-                <a:solidFill>
-                  <a:schemeClr val="dk1"/>
-                </a:solidFill>
-              </a:rPr>
-              <a:t>Client-Server</a:t>
-            </a:r>
-            <a:r>
-              <a:rPr b="1" lang="it" sz="2000">
-                <a:solidFill>
-                  <a:schemeClr val="dk1"/>
-                </a:solidFill>
-              </a:rPr>
-              <a:t>”</a:t>
-            </a:r>
-            <a:r>
-              <a:rPr b="1" lang="it" sz="2000">
-                <a:solidFill>
-                  <a:schemeClr val="dk1"/>
-                </a:solidFill>
-              </a:rPr>
-              <a:t>:</a:t>
-            </a:r>
-            <a:endParaRPr b="1" sz="2000">
+            <a:endParaRPr sz="2000" b="1">
               <a:solidFill>
                 <a:schemeClr val="dk1"/>
               </a:solidFill>
             </a:endParaRPr>
           </a:p>
           <a:p>
-            <a:pPr indent="-304800" lvl="0" marL="457200" rtl="0" algn="l">
+            <a:pPr marL="457200" lvl="0" indent="-304800" algn="l" rtl="0">
               <a:spcBef>
                 <a:spcPts val="1600"/>
               </a:spcBef>
@@ -8325,7 +8472,7 @@
             <a:endParaRPr sz="1200"/>
           </a:p>
           <a:p>
-            <a:pPr indent="-304800" lvl="0" marL="457200" rtl="0" algn="l">
+            <a:pPr marL="457200" lvl="0" indent="-304800" algn="l" rtl="0">
               <a:spcBef>
                 <a:spcPts val="1200"/>
               </a:spcBef>
@@ -8342,7 +8489,7 @@
             <a:endParaRPr sz="1200"/>
           </a:p>
           <a:p>
-            <a:pPr indent="-304800" lvl="0" marL="457200" rtl="0" algn="l">
+            <a:pPr marL="457200" lvl="0" indent="-304800" algn="l" rtl="0">
               <a:spcBef>
                 <a:spcPts val="1200"/>
               </a:spcBef>
@@ -8425,11 +8572,11 @@
 </file>
 
 <file path=ppt/slides/slide4.xml><?xml version="1.0" encoding="utf-8"?>
-<p:sld xmlns:a="http://schemas.openxmlformats.org/drawingml/2006/main" xmlns:r="http://schemas.openxmlformats.org/officeDocument/2006/relationships" xmlns:mc="http://schemas.openxmlformats.org/markup-compatibility/2006" xmlns:mv="urn:schemas-microsoft-com:mac:vml" xmlns:p="http://schemas.openxmlformats.org/presentationml/2006/main" xmlns:c="http://schemas.openxmlformats.org/drawingml/2006/chart" xmlns:dgm="http://schemas.openxmlformats.org/drawingml/2006/diagram" xmlns:o="urn:schemas-microsoft-com:office:office" xmlns:v="urn:schemas-microsoft-com:vml" xmlns:pvml="urn:schemas-microsoft-com:office:powerpoint" xmlns:com="http://schemas.openxmlformats.org/drawingml/2006/compatibility" xmlns:p14="http://schemas.microsoft.com/office/powerpoint/2010/main" xmlns:p15="http://schemas.microsoft.com/office/powerpoint/2012/main" xmlns:ahyp="http://schemas.microsoft.com/office/drawing/2018/hyperlinkcolor">
+<p:sld xmlns:a="http://schemas.openxmlformats.org/drawingml/2006/main" xmlns:r="http://schemas.openxmlformats.org/officeDocument/2006/relationships" xmlns:p="http://schemas.openxmlformats.org/presentationml/2006/main">
   <p:cSld>
     <p:spTree>
       <p:nvGrpSpPr>
-        <p:cNvPr id="97" name="Shape 97"/>
+        <p:cNvPr id="1" name="Shape 97"/>
         <p:cNvGrpSpPr/>
         <p:nvPr/>
       </p:nvGrpSpPr>
@@ -8489,12 +8636,12 @@
           </a:ln>
         </p:spPr>
         <p:txBody>
-          <a:bodyPr anchorCtr="0" anchor="t" bIns="91425" lIns="91425" spcFirstLastPara="1" rIns="91425" wrap="square" tIns="91425">
+          <a:bodyPr spcFirstLastPara="1" wrap="square" lIns="91425" tIns="91425" rIns="91425" bIns="91425" anchor="t" anchorCtr="0">
             <a:noAutofit/>
           </a:bodyPr>
           <a:lstStyle/>
           <a:p>
-            <a:pPr indent="0" lvl="0" marL="0" rtl="0" algn="l">
+            <a:pPr marL="0" lvl="0" indent="0" algn="l" rtl="0">
               <a:spcBef>
                 <a:spcPts val="0"/>
               </a:spcBef>
@@ -8504,7 +8651,7 @@
               <a:buNone/>
             </a:pPr>
             <a:r>
-              <a:rPr b="1" lang="it" sz="2000">
+              <a:rPr lang="it" sz="2000" b="1">
                 <a:solidFill>
                   <a:schemeClr val="dk1"/>
                 </a:solidFill>
@@ -8515,7 +8662,7 @@
               </a:rPr>
               <a:t>Database:</a:t>
             </a:r>
-            <a:endParaRPr b="1" sz="2000">
+            <a:endParaRPr sz="2000" b="1">
               <a:solidFill>
                 <a:schemeClr val="dk1"/>
               </a:solidFill>
@@ -8526,7 +8673,7 @@
             </a:endParaRPr>
           </a:p>
           <a:p>
-            <a:pPr indent="0" lvl="0" marL="0" rtl="0" algn="l">
+            <a:pPr marL="0" lvl="0" indent="0" algn="l" rtl="0">
               <a:spcBef>
                 <a:spcPts val="0"/>
               </a:spcBef>
@@ -8535,9 +8682,6 @@
               </a:spcAft>
               <a:buNone/>
             </a:pPr>
-            <a:r>
-              <a:t/>
-            </a:r>
             <a:endParaRPr sz="1200">
               <a:solidFill>
                 <a:schemeClr val="dk2"/>
@@ -8549,7 +8693,7 @@
             </a:endParaRPr>
           </a:p>
           <a:p>
-            <a:pPr indent="-304800" lvl="0" marL="457200" rtl="0" algn="l">
+            <a:pPr marL="457200" lvl="0" indent="-304800" algn="l" rtl="0">
               <a:spcBef>
                 <a:spcPts val="0"/>
               </a:spcBef>
@@ -8586,7 +8730,7 @@
             </a:endParaRPr>
           </a:p>
           <a:p>
-            <a:pPr indent="-304800" lvl="0" marL="457200" rtl="0" algn="l">
+            <a:pPr marL="457200" lvl="0" indent="-304800" algn="l" rtl="0">
               <a:spcBef>
                 <a:spcPts val="0"/>
               </a:spcBef>
@@ -8623,7 +8767,7 @@
             </a:endParaRPr>
           </a:p>
           <a:p>
-            <a:pPr indent="-304800" lvl="0" marL="457200" rtl="0" algn="l">
+            <a:pPr marL="457200" lvl="0" indent="-304800" algn="l" rtl="0">
               <a:spcBef>
                 <a:spcPts val="0"/>
               </a:spcBef>
@@ -8660,7 +8804,7 @@
             </a:endParaRPr>
           </a:p>
           <a:p>
-            <a:pPr indent="-304800" lvl="0" marL="457200" rtl="0" algn="l">
+            <a:pPr marL="457200" lvl="0" indent="-304800" algn="l" rtl="0">
               <a:spcBef>
                 <a:spcPts val="0"/>
               </a:spcBef>
@@ -8697,7 +8841,7 @@
             </a:endParaRPr>
           </a:p>
           <a:p>
-            <a:pPr indent="-304800" lvl="0" marL="457200" rtl="0" algn="l">
+            <a:pPr marL="457200" lvl="0" indent="-304800" algn="l" rtl="0">
               <a:spcBef>
                 <a:spcPts val="0"/>
               </a:spcBef>
@@ -8734,7 +8878,7 @@
             </a:endParaRPr>
           </a:p>
           <a:p>
-            <a:pPr indent="-304800" lvl="0" marL="457200" rtl="0" algn="l">
+            <a:pPr marL="457200" lvl="0" indent="-304800" algn="l" rtl="0">
               <a:spcBef>
                 <a:spcPts val="0"/>
               </a:spcBef>
@@ -8837,11 +8981,11 @@
 </file>
 
 <file path=ppt/slides/slide5.xml><?xml version="1.0" encoding="utf-8"?>
-<p:sld xmlns:a="http://schemas.openxmlformats.org/drawingml/2006/main" xmlns:r="http://schemas.openxmlformats.org/officeDocument/2006/relationships" xmlns:mc="http://schemas.openxmlformats.org/markup-compatibility/2006" xmlns:mv="urn:schemas-microsoft-com:mac:vml" xmlns:p="http://schemas.openxmlformats.org/presentationml/2006/main" xmlns:c="http://schemas.openxmlformats.org/drawingml/2006/chart" xmlns:dgm="http://schemas.openxmlformats.org/drawingml/2006/diagram" xmlns:o="urn:schemas-microsoft-com:office:office" xmlns:v="urn:schemas-microsoft-com:vml" xmlns:pvml="urn:schemas-microsoft-com:office:powerpoint" xmlns:com="http://schemas.openxmlformats.org/drawingml/2006/compatibility" xmlns:p14="http://schemas.microsoft.com/office/powerpoint/2010/main" xmlns:p15="http://schemas.microsoft.com/office/powerpoint/2012/main" xmlns:ahyp="http://schemas.microsoft.com/office/drawing/2018/hyperlinkcolor">
+<p:sld xmlns:a="http://schemas.openxmlformats.org/drawingml/2006/main" xmlns:r="http://schemas.openxmlformats.org/officeDocument/2006/relationships" xmlns:p="http://schemas.openxmlformats.org/presentationml/2006/main">
   <p:cSld>
     <p:spTree>
       <p:nvGrpSpPr>
-        <p:cNvPr id="105" name="Shape 105"/>
+        <p:cNvPr id="1" name="Shape 105"/>
         <p:cNvGrpSpPr/>
         <p:nvPr/>
       </p:nvGrpSpPr>
@@ -8856,7 +9000,9 @@
       <p:sp>
         <p:nvSpPr>
           <p:cNvPr id="106" name="Google Shape;106;p17"/>
-          <p:cNvSpPr txBox="1"/>
+          <p:cNvSpPr txBox="1">
+            <a:spLocks noGrp="1"/>
+          </p:cNvSpPr>
           <p:nvPr>
             <p:ph type="title"/>
           </p:nvPr>
@@ -8871,12 +9017,12 @@
           </a:prstGeom>
         </p:spPr>
         <p:txBody>
-          <a:bodyPr anchorCtr="0" anchor="t" bIns="91425" lIns="91425" spcFirstLastPara="1" rIns="91425" wrap="square" tIns="91425">
+          <a:bodyPr spcFirstLastPara="1" wrap="square" lIns="91425" tIns="91425" rIns="91425" bIns="91425" anchor="t" anchorCtr="0">
             <a:noAutofit/>
           </a:bodyPr>
           <a:lstStyle/>
           <a:p>
-            <a:pPr indent="0" lvl="0" marL="0" rtl="0" algn="ctr">
+            <a:pPr marL="0" lvl="0" indent="0" algn="ctr" rtl="0">
               <a:spcBef>
                 <a:spcPts val="0"/>
               </a:spcBef>
@@ -8913,12 +9059,12 @@
           </a:ln>
         </p:spPr>
         <p:txBody>
-          <a:bodyPr anchorCtr="0" anchor="t" bIns="91425" lIns="91425" spcFirstLastPara="1" rIns="91425" wrap="square" tIns="91425">
+          <a:bodyPr spcFirstLastPara="1" wrap="square" lIns="91425" tIns="91425" rIns="91425" bIns="91425" anchor="t" anchorCtr="0">
             <a:noAutofit/>
           </a:bodyPr>
           <a:lstStyle/>
           <a:p>
-            <a:pPr indent="0" lvl="0" marL="0" rtl="0" algn="l">
+            <a:pPr marL="0" lvl="0" indent="0" algn="l" rtl="0">
               <a:spcBef>
                 <a:spcPts val="0"/>
               </a:spcBef>
@@ -8928,7 +9074,7 @@
               <a:buNone/>
             </a:pPr>
             <a:r>
-              <a:rPr b="1" lang="it" sz="1600">
+              <a:rPr lang="it" sz="1600" b="1">
                 <a:solidFill>
                   <a:schemeClr val="dk1"/>
                 </a:solidFill>
@@ -8939,7 +9085,7 @@
               </a:rPr>
               <a:t>“Middleware”:</a:t>
             </a:r>
-            <a:endParaRPr b="1" sz="1600">
+            <a:endParaRPr sz="1600" b="1">
               <a:solidFill>
                 <a:schemeClr val="dk1"/>
               </a:solidFill>
@@ -8950,7 +9096,7 @@
             </a:endParaRPr>
           </a:p>
           <a:p>
-            <a:pPr indent="0" lvl="0" marL="0" rtl="0" algn="l">
+            <a:pPr marL="0" lvl="0" indent="0" algn="l" rtl="0">
               <a:spcBef>
                 <a:spcPts val="0"/>
               </a:spcBef>
@@ -8959,10 +9105,7 @@
               </a:spcAft>
               <a:buNone/>
             </a:pPr>
-            <a:r>
-              <a:t/>
-            </a:r>
-            <a:endParaRPr b="1" sz="1300">
+            <a:endParaRPr sz="1300" b="1">
               <a:solidFill>
                 <a:schemeClr val="dk1"/>
               </a:solidFill>
@@ -8973,7 +9116,7 @@
             </a:endParaRPr>
           </a:p>
           <a:p>
-            <a:pPr indent="-317500" lvl="0" marL="457200" rtl="0" algn="l">
+            <a:pPr marL="457200" lvl="0" indent="-317500" algn="l" rtl="0">
               <a:spcBef>
                 <a:spcPts val="0"/>
               </a:spcBef>
@@ -9010,7 +9153,7 @@
             </a:endParaRPr>
           </a:p>
           <a:p>
-            <a:pPr indent="-317500" lvl="0" marL="457200" rtl="0" algn="l">
+            <a:pPr marL="457200" lvl="0" indent="-317500" algn="l" rtl="0">
               <a:spcBef>
                 <a:spcPts val="0"/>
               </a:spcBef>
@@ -9047,7 +9190,7 @@
             </a:endParaRPr>
           </a:p>
           <a:p>
-            <a:pPr indent="0" lvl="0" marL="0" rtl="0" algn="l">
+            <a:pPr marL="0" lvl="0" indent="0" algn="l" rtl="0">
               <a:spcBef>
                 <a:spcPts val="0"/>
               </a:spcBef>
@@ -9056,9 +9199,6 @@
               </a:spcAft>
               <a:buNone/>
             </a:pPr>
-            <a:r>
-              <a:t/>
-            </a:r>
             <a:endParaRPr sz="1600">
               <a:solidFill>
                 <a:schemeClr val="dk2"/>
@@ -9091,12 +9231,12 @@
           </a:ln>
         </p:spPr>
         <p:txBody>
-          <a:bodyPr anchorCtr="0" anchor="t" bIns="91425" lIns="91425" spcFirstLastPara="1" rIns="91425" wrap="square" tIns="91425">
+          <a:bodyPr spcFirstLastPara="1" wrap="square" lIns="91425" tIns="91425" rIns="91425" bIns="91425" anchor="t" anchorCtr="0">
             <a:spAutoFit/>
           </a:bodyPr>
           <a:lstStyle/>
           <a:p>
-            <a:pPr indent="0" lvl="0" marL="0" rtl="0" algn="l">
+            <a:pPr marL="0" lvl="0" indent="0" algn="l" rtl="0">
               <a:spcBef>
                 <a:spcPts val="0"/>
               </a:spcBef>
@@ -9106,7 +9246,7 @@
               <a:buNone/>
             </a:pPr>
             <a:r>
-              <a:rPr b="1" lang="it" sz="1600">
+              <a:rPr lang="it" sz="1600" b="1">
                 <a:solidFill>
                   <a:schemeClr val="dk1"/>
                 </a:solidFill>
@@ -9117,7 +9257,7 @@
               </a:rPr>
               <a:t>“Prepared statements”:</a:t>
             </a:r>
-            <a:endParaRPr b="1" sz="1600">
+            <a:endParaRPr sz="1600" b="1">
               <a:solidFill>
                 <a:schemeClr val="dk1"/>
               </a:solidFill>
@@ -9128,7 +9268,7 @@
             </a:endParaRPr>
           </a:p>
           <a:p>
-            <a:pPr indent="0" lvl="0" marL="0" rtl="0" algn="l">
+            <a:pPr marL="0" lvl="0" indent="0" algn="l" rtl="0">
               <a:spcBef>
                 <a:spcPts val="0"/>
               </a:spcBef>
@@ -9137,9 +9277,6 @@
               </a:spcAft>
               <a:buNone/>
             </a:pPr>
-            <a:r>
-              <a:t/>
-            </a:r>
             <a:endParaRPr>
               <a:solidFill>
                 <a:schemeClr val="dk2"/>
@@ -9151,7 +9288,7 @@
             </a:endParaRPr>
           </a:p>
           <a:p>
-            <a:pPr indent="-317500" lvl="0" marL="457200" rtl="0" algn="l">
+            <a:pPr marL="457200" lvl="0" indent="-317500" algn="l" rtl="0">
               <a:spcBef>
                 <a:spcPts val="0"/>
               </a:spcBef>
@@ -9209,12 +9346,12 @@
           </a:ln>
         </p:spPr>
         <p:txBody>
-          <a:bodyPr anchorCtr="0" anchor="t" bIns="91425" lIns="91425" spcFirstLastPara="1" rIns="91425" wrap="square" tIns="91425">
+          <a:bodyPr spcFirstLastPara="1" wrap="square" lIns="91425" tIns="91425" rIns="91425" bIns="91425" anchor="t" anchorCtr="0">
             <a:spAutoFit/>
           </a:bodyPr>
           <a:lstStyle/>
           <a:p>
-            <a:pPr indent="0" lvl="0" marL="0" rtl="0" algn="l">
+            <a:pPr marL="0" lvl="0" indent="0" algn="l" rtl="0">
               <a:spcBef>
                 <a:spcPts val="0"/>
               </a:spcBef>
@@ -9224,7 +9361,7 @@
               <a:buNone/>
             </a:pPr>
             <a:r>
-              <a:rPr b="1" lang="it" sz="1600">
+              <a:rPr lang="it" sz="1600" b="1">
                 <a:solidFill>
                   <a:schemeClr val="dk1"/>
                 </a:solidFill>
@@ -9235,7 +9372,7 @@
               </a:rPr>
               <a:t>“Hashing”:</a:t>
             </a:r>
-            <a:endParaRPr b="1" sz="1600">
+            <a:endParaRPr sz="1600" b="1">
               <a:solidFill>
                 <a:schemeClr val="dk1"/>
               </a:solidFill>
@@ -9246,7 +9383,7 @@
             </a:endParaRPr>
           </a:p>
           <a:p>
-            <a:pPr indent="0" lvl="0" marL="0" rtl="0" algn="l">
+            <a:pPr marL="0" lvl="0" indent="0" algn="l" rtl="0">
               <a:spcBef>
                 <a:spcPts val="0"/>
               </a:spcBef>
@@ -9255,9 +9392,6 @@
               </a:spcAft>
               <a:buNone/>
             </a:pPr>
-            <a:r>
-              <a:t/>
-            </a:r>
             <a:endParaRPr>
               <a:solidFill>
                 <a:schemeClr val="dk2"/>
@@ -9269,7 +9403,7 @@
             </a:endParaRPr>
           </a:p>
           <a:p>
-            <a:pPr indent="-317500" lvl="0" marL="457200" rtl="0" algn="l">
+            <a:pPr marL="457200" lvl="0" indent="-317500" algn="l" rtl="0">
               <a:spcBef>
                 <a:spcPts val="0"/>
               </a:spcBef>
@@ -9293,31 +9427,7 @@
                 <a:cs typeface="Lato"/>
                 <a:sym typeface="Lato"/>
               </a:rPr>
-              <a:t>Per la protezione delle password degli utenti, rendendole </a:t>
-            </a:r>
-            <a:r>
-              <a:rPr lang="it">
-                <a:solidFill>
-                  <a:schemeClr val="dk2"/>
-                </a:solidFill>
-                <a:latin typeface="Lato"/>
-                <a:ea typeface="Lato"/>
-                <a:cs typeface="Lato"/>
-                <a:sym typeface="Lato"/>
-              </a:rPr>
-              <a:t>illeggibili</a:t>
-            </a:r>
-            <a:r>
-              <a:rPr lang="it">
-                <a:solidFill>
-                  <a:schemeClr val="dk2"/>
-                </a:solidFill>
-                <a:latin typeface="Lato"/>
-                <a:ea typeface="Lato"/>
-                <a:cs typeface="Lato"/>
-                <a:sym typeface="Lato"/>
-              </a:rPr>
-              <a:t> e impedendo la loro ricostruzione in caso di accesso non autorizzato.</a:t>
+              <a:t>Per la protezione delle password degli utenti, rendendole illeggibili e impedendo la loro ricostruzione in caso di accesso non autorizzato.</a:t>
             </a:r>
             <a:endParaRPr>
               <a:solidFill>
@@ -9424,11 +9534,11 @@
 </file>
 
 <file path=ppt/slides/slide6.xml><?xml version="1.0" encoding="utf-8"?>
-<p:sld xmlns:a="http://schemas.openxmlformats.org/drawingml/2006/main" xmlns:r="http://schemas.openxmlformats.org/officeDocument/2006/relationships" xmlns:mc="http://schemas.openxmlformats.org/markup-compatibility/2006" xmlns:mv="urn:schemas-microsoft-com:mac:vml" xmlns:p="http://schemas.openxmlformats.org/presentationml/2006/main" xmlns:c="http://schemas.openxmlformats.org/drawingml/2006/chart" xmlns:dgm="http://schemas.openxmlformats.org/drawingml/2006/diagram" xmlns:o="urn:schemas-microsoft-com:office:office" xmlns:v="urn:schemas-microsoft-com:vml" xmlns:pvml="urn:schemas-microsoft-com:office:powerpoint" xmlns:com="http://schemas.openxmlformats.org/drawingml/2006/compatibility" xmlns:p14="http://schemas.microsoft.com/office/powerpoint/2010/main" xmlns:p15="http://schemas.microsoft.com/office/powerpoint/2012/main" xmlns:ahyp="http://schemas.microsoft.com/office/drawing/2018/hyperlinkcolor">
+<p:sld xmlns:a="http://schemas.openxmlformats.org/drawingml/2006/main" xmlns:r="http://schemas.openxmlformats.org/officeDocument/2006/relationships" xmlns:p="http://schemas.openxmlformats.org/presentationml/2006/main">
   <p:cSld>
     <p:spTree>
       <p:nvGrpSpPr>
-        <p:cNvPr id="116" name="Shape 116"/>
+        <p:cNvPr id="1" name="Shape 116"/>
         <p:cNvGrpSpPr/>
         <p:nvPr/>
       </p:nvGrpSpPr>
@@ -9443,7 +9553,9 @@
       <p:sp>
         <p:nvSpPr>
           <p:cNvPr id="117" name="Google Shape;117;p18"/>
-          <p:cNvSpPr txBox="1"/>
+          <p:cNvSpPr txBox="1">
+            <a:spLocks noGrp="1"/>
+          </p:cNvSpPr>
           <p:nvPr>
             <p:ph type="title"/>
           </p:nvPr>
@@ -9458,12 +9570,12 @@
           </a:prstGeom>
         </p:spPr>
         <p:txBody>
-          <a:bodyPr anchorCtr="0" anchor="t" bIns="91425" lIns="91425" spcFirstLastPara="1" rIns="91425" wrap="square" tIns="91425">
+          <a:bodyPr spcFirstLastPara="1" wrap="square" lIns="91425" tIns="91425" rIns="91425" bIns="91425" anchor="t" anchorCtr="0">
             <a:noAutofit/>
           </a:bodyPr>
           <a:lstStyle/>
           <a:p>
-            <a:pPr indent="0" lvl="0" marL="0" rtl="0" algn="ctr">
+            <a:pPr marL="0" lvl="0" indent="0" algn="ctr" rtl="0">
               <a:spcBef>
                 <a:spcPts val="0"/>
               </a:spcBef>
@@ -9474,15 +9586,7 @@
             </a:pPr>
             <a:r>
               <a:rPr lang="it"/>
-              <a:t>TECNOLOGIE, FRAMEWORK E STRUMENTI DI SVILUPPO </a:t>
-            </a:r>
-            <a:r>
-              <a:rPr lang="it"/>
-              <a:t>UTILIZZATI</a:t>
-            </a:r>
-            <a:r>
-              <a:rPr lang="it"/>
-              <a:t>:</a:t>
+              <a:t>TECNOLOGIE, FRAMEWORK E STRUMENTI DI SVILUPPO UTILIZZATI:</a:t>
             </a:r>
             <a:endParaRPr/>
           </a:p>
@@ -9508,12 +9612,12 @@
           </a:ln>
         </p:spPr>
         <p:txBody>
-          <a:bodyPr anchorCtr="0" anchor="t" bIns="91425" lIns="91425" spcFirstLastPara="1" rIns="91425" wrap="square" tIns="91425">
+          <a:bodyPr spcFirstLastPara="1" wrap="square" lIns="91425" tIns="91425" rIns="91425" bIns="91425" anchor="t" anchorCtr="0">
             <a:spAutoFit/>
           </a:bodyPr>
           <a:lstStyle/>
           <a:p>
-            <a:pPr indent="0" lvl="0" marL="0" rtl="0" algn="l">
+            <a:pPr marL="0" lvl="0" indent="0" algn="l" rtl="0">
               <a:spcBef>
                 <a:spcPts val="0"/>
               </a:spcBef>
@@ -9523,7 +9627,7 @@
               <a:buNone/>
             </a:pPr>
             <a:r>
-              <a:rPr b="1" lang="it" sz="1500">
+              <a:rPr lang="it" sz="1500" b="1">
                 <a:solidFill>
                   <a:schemeClr val="dk1"/>
                 </a:solidFill>
@@ -9534,7 +9638,7 @@
               </a:rPr>
               <a:t>“Strumenti di sviluppo”:</a:t>
             </a:r>
-            <a:endParaRPr b="1" sz="1500">
+            <a:endParaRPr sz="1500" b="1">
               <a:solidFill>
                 <a:schemeClr val="dk1"/>
               </a:solidFill>
@@ -9545,7 +9649,7 @@
             </a:endParaRPr>
           </a:p>
           <a:p>
-            <a:pPr indent="-317500" lvl="0" marL="457200" rtl="0" algn="l">
+            <a:pPr marL="457200" lvl="0" indent="-317500" algn="l" rtl="0">
               <a:spcBef>
                 <a:spcPts val="0"/>
               </a:spcBef>
@@ -9560,7 +9664,7 @@
               <a:buChar char="●"/>
             </a:pPr>
             <a:r>
-              <a:rPr b="1" lang="it">
+              <a:rPr lang="it" b="1">
                 <a:solidFill>
                   <a:schemeClr val="dk2"/>
                 </a:solidFill>
@@ -9591,7 +9695,7 @@
             </a:endParaRPr>
           </a:p>
           <a:p>
-            <a:pPr indent="-317500" lvl="0" marL="457200" rtl="0" algn="l">
+            <a:pPr marL="457200" lvl="0" indent="-317500" algn="l" rtl="0">
               <a:spcBef>
                 <a:spcPts val="0"/>
               </a:spcBef>
@@ -9606,7 +9710,7 @@
               <a:buChar char="●"/>
             </a:pPr>
             <a:r>
-              <a:rPr b="1" lang="it">
+              <a:rPr lang="it" b="1">
                 <a:solidFill>
                   <a:schemeClr val="dk2"/>
                 </a:solidFill>
@@ -9640,7 +9744,7 @@
             </a:endParaRPr>
           </a:p>
           <a:p>
-            <a:pPr indent="-317500" lvl="0" marL="457200" rtl="0" algn="l">
+            <a:pPr marL="457200" lvl="0" indent="-317500" algn="l" rtl="0">
               <a:spcBef>
                 <a:spcPts val="0"/>
               </a:spcBef>
@@ -9655,7 +9759,7 @@
               <a:buChar char="●"/>
             </a:pPr>
             <a:r>
-              <a:rPr b="1" lang="it">
+              <a:rPr lang="it" b="1">
                 <a:solidFill>
                   <a:schemeClr val="dk2"/>
                 </a:solidFill>
@@ -9710,12 +9814,12 @@
           </a:ln>
         </p:spPr>
         <p:txBody>
-          <a:bodyPr anchorCtr="0" anchor="t" bIns="91425" lIns="91425" spcFirstLastPara="1" rIns="91425" wrap="square" tIns="91425">
+          <a:bodyPr spcFirstLastPara="1" wrap="square" lIns="91425" tIns="91425" rIns="91425" bIns="91425" anchor="t" anchorCtr="0">
             <a:noAutofit/>
           </a:bodyPr>
           <a:lstStyle/>
           <a:p>
-            <a:pPr indent="0" lvl="0" marL="0" rtl="0" algn="l">
+            <a:pPr marL="0" lvl="0" indent="0" algn="l" rtl="0">
               <a:spcBef>
                 <a:spcPts val="0"/>
               </a:spcBef>
@@ -9725,7 +9829,7 @@
               <a:buNone/>
             </a:pPr>
             <a:r>
-              <a:rPr b="1" lang="it" sz="1500">
+              <a:rPr lang="it" sz="1500" b="1">
                 <a:solidFill>
                   <a:schemeClr val="dk1"/>
                 </a:solidFill>
@@ -9736,7 +9840,7 @@
               </a:rPr>
               <a:t>“Backend”:</a:t>
             </a:r>
-            <a:endParaRPr b="1" sz="1500">
+            <a:endParaRPr sz="1500" b="1">
               <a:solidFill>
                 <a:schemeClr val="dk1"/>
               </a:solidFill>
@@ -9747,7 +9851,7 @@
             </a:endParaRPr>
           </a:p>
           <a:p>
-            <a:pPr indent="-317500" lvl="0" marL="457200" rtl="0" algn="l">
+            <a:pPr marL="457200" lvl="0" indent="-317500" algn="l" rtl="0">
               <a:spcBef>
                 <a:spcPts val="0"/>
               </a:spcBef>
@@ -9762,7 +9866,7 @@
               <a:buChar char="●"/>
             </a:pPr>
             <a:r>
-              <a:rPr b="1" lang="it">
+              <a:rPr lang="it" b="1">
                 <a:solidFill>
                   <a:schemeClr val="dk2"/>
                 </a:solidFill>
@@ -9796,7 +9900,7 @@
             </a:endParaRPr>
           </a:p>
           <a:p>
-            <a:pPr indent="-317500" lvl="0" marL="457200" rtl="0" algn="l">
+            <a:pPr marL="457200" lvl="0" indent="-317500" algn="l" rtl="0">
               <a:spcBef>
                 <a:spcPts val="0"/>
               </a:spcBef>
@@ -9811,7 +9915,7 @@
               <a:buChar char="●"/>
             </a:pPr>
             <a:r>
-              <a:rPr b="1" lang="it">
+              <a:rPr lang="it" b="1">
                 <a:solidFill>
                   <a:schemeClr val="dk2"/>
                 </a:solidFill>
@@ -9820,19 +9924,7 @@
                 <a:cs typeface="Lato"/>
                 <a:sym typeface="Lato"/>
               </a:rPr>
-              <a:t>Express</a:t>
-            </a:r>
-            <a:r>
-              <a:rPr b="1" lang="it">
-                <a:solidFill>
-                  <a:schemeClr val="dk2"/>
-                </a:solidFill>
-                <a:latin typeface="Lato"/>
-                <a:ea typeface="Lato"/>
-                <a:cs typeface="Lato"/>
-                <a:sym typeface="Lato"/>
-              </a:rPr>
-              <a:t>.js:</a:t>
+              <a:t>Express.js:</a:t>
             </a:r>
             <a:r>
               <a:rPr lang="it">
@@ -9857,7 +9949,7 @@
             </a:endParaRPr>
           </a:p>
           <a:p>
-            <a:pPr indent="-317500" lvl="0" marL="457200" rtl="0" algn="l">
+            <a:pPr marL="457200" lvl="0" indent="-317500" algn="l" rtl="0">
               <a:spcBef>
                 <a:spcPts val="0"/>
               </a:spcBef>
@@ -9872,7 +9964,7 @@
               <a:buChar char="●"/>
             </a:pPr>
             <a:r>
-              <a:rPr b="1" lang="it">
+              <a:rPr lang="it" b="1">
                 <a:solidFill>
                   <a:schemeClr val="dk2"/>
                 </a:solidFill>
@@ -9906,7 +9998,7 @@
             </a:endParaRPr>
           </a:p>
           <a:p>
-            <a:pPr indent="-317500" lvl="0" marL="457200" rtl="0" algn="l">
+            <a:pPr marL="457200" lvl="0" indent="-317500" algn="l" rtl="0">
               <a:spcBef>
                 <a:spcPts val="0"/>
               </a:spcBef>
@@ -9921,7 +10013,7 @@
               <a:buChar char="●"/>
             </a:pPr>
             <a:r>
-              <a:rPr b="1" lang="it">
+              <a:rPr lang="it" b="1">
                 <a:solidFill>
                   <a:schemeClr val="dk2"/>
                 </a:solidFill>
@@ -9942,31 +10034,7 @@
                 <a:cs typeface="Lato"/>
                 <a:sym typeface="Lato"/>
               </a:rPr>
-              <a:t>JWT, bcryptjs e </a:t>
-            </a:r>
-            <a:r>
-              <a:rPr lang="it">
-                <a:solidFill>
-                  <a:schemeClr val="dk2"/>
-                </a:solidFill>
-                <a:latin typeface="Lato"/>
-                <a:ea typeface="Lato"/>
-                <a:cs typeface="Lato"/>
-                <a:sym typeface="Lato"/>
-              </a:rPr>
-              <a:t>crypto</a:t>
-            </a:r>
-            <a:r>
-              <a:rPr lang="it">
-                <a:solidFill>
-                  <a:schemeClr val="dk2"/>
-                </a:solidFill>
-                <a:latin typeface="Lato"/>
-                <a:ea typeface="Lato"/>
-                <a:cs typeface="Lato"/>
-                <a:sym typeface="Lato"/>
-              </a:rPr>
-              <a:t>.</a:t>
+              <a:t>JWT, bcryptjs e crypto.</a:t>
             </a:r>
             <a:endParaRPr>
               <a:solidFill>
@@ -9979,7 +10047,7 @@
             </a:endParaRPr>
           </a:p>
           <a:p>
-            <a:pPr indent="-317500" lvl="0" marL="457200" rtl="0" algn="l">
+            <a:pPr marL="457200" lvl="0" indent="-317500" algn="l" rtl="0">
               <a:spcBef>
                 <a:spcPts val="0"/>
               </a:spcBef>
@@ -9994,7 +10062,7 @@
               <a:buChar char="●"/>
             </a:pPr>
             <a:r>
-              <a:rPr b="1" lang="it">
+              <a:rPr lang="it" b="1">
                 <a:solidFill>
                   <a:schemeClr val="dk2"/>
                 </a:solidFill>
@@ -10028,7 +10096,7 @@
             </a:endParaRPr>
           </a:p>
           <a:p>
-            <a:pPr indent="-317500" lvl="0" marL="457200" rtl="0" algn="l">
+            <a:pPr marL="457200" lvl="0" indent="-317500" algn="l" rtl="0">
               <a:spcBef>
                 <a:spcPts val="0"/>
               </a:spcBef>
@@ -10043,7 +10111,7 @@
               <a:buChar char="●"/>
             </a:pPr>
             <a:r>
-              <a:rPr b="1" lang="it">
+              <a:rPr lang="it" b="1">
                 <a:solidFill>
                   <a:schemeClr val="dk2"/>
                 </a:solidFill>
@@ -10052,10 +10120,10 @@
                 <a:cs typeface="Lato"/>
                 <a:sym typeface="Lato"/>
               </a:rPr>
-              <a:t>Database</a:t>
+              <a:t>Database:</a:t>
             </a:r>
             <a:r>
-              <a:rPr b="1" lang="it">
+              <a:rPr lang="it">
                 <a:solidFill>
                   <a:schemeClr val="dk2"/>
                 </a:solidFill>
@@ -10064,31 +10132,7 @@
                 <a:cs typeface="Lato"/>
                 <a:sym typeface="Lato"/>
               </a:rPr>
-              <a:t>:</a:t>
-            </a:r>
-            <a:r>
-              <a:rPr lang="it">
-                <a:solidFill>
-                  <a:schemeClr val="dk2"/>
-                </a:solidFill>
-                <a:latin typeface="Lato"/>
-                <a:ea typeface="Lato"/>
-                <a:cs typeface="Lato"/>
-                <a:sym typeface="Lato"/>
-              </a:rPr>
-              <a:t> </a:t>
-            </a:r>
-            <a:r>
-              <a:rPr lang="it">
-                <a:solidFill>
-                  <a:schemeClr val="dk2"/>
-                </a:solidFill>
-                <a:latin typeface="Lato"/>
-                <a:ea typeface="Lato"/>
-                <a:cs typeface="Lato"/>
-                <a:sym typeface="Lato"/>
-              </a:rPr>
-              <a:t>MariaDB</a:t>
+              <a:t> MariaDB</a:t>
             </a:r>
             <a:endParaRPr>
               <a:solidFill>
@@ -10122,12 +10166,12 @@
           </a:ln>
         </p:spPr>
         <p:txBody>
-          <a:bodyPr anchorCtr="0" anchor="t" bIns="91425" lIns="91425" spcFirstLastPara="1" rIns="91425" wrap="square" tIns="91425">
+          <a:bodyPr spcFirstLastPara="1" wrap="square" lIns="91425" tIns="91425" rIns="91425" bIns="91425" anchor="t" anchorCtr="0">
             <a:noAutofit/>
           </a:bodyPr>
           <a:lstStyle/>
           <a:p>
-            <a:pPr indent="0" lvl="0" marL="0" rtl="0" algn="l">
+            <a:pPr marL="0" lvl="0" indent="0" algn="l" rtl="0">
               <a:spcBef>
                 <a:spcPts val="0"/>
               </a:spcBef>
@@ -10137,7 +10181,7 @@
               <a:buNone/>
             </a:pPr>
             <a:r>
-              <a:rPr b="1" lang="it" sz="1500">
+              <a:rPr lang="it" sz="1500" b="1">
                 <a:solidFill>
                   <a:schemeClr val="dk1"/>
                 </a:solidFill>
@@ -10148,7 +10192,7 @@
               </a:rPr>
               <a:t>“Frontend”:</a:t>
             </a:r>
-            <a:endParaRPr b="1" sz="1500">
+            <a:endParaRPr sz="1500" b="1">
               <a:solidFill>
                 <a:schemeClr val="dk1"/>
               </a:solidFill>
@@ -10159,7 +10203,7 @@
             </a:endParaRPr>
           </a:p>
           <a:p>
-            <a:pPr indent="-317500" lvl="0" marL="457200" rtl="0" algn="l">
+            <a:pPr marL="457200" lvl="0" indent="-317500" algn="l" rtl="0">
               <a:spcBef>
                 <a:spcPts val="0"/>
               </a:spcBef>
@@ -10174,7 +10218,7 @@
               <a:buChar char="●"/>
             </a:pPr>
             <a:r>
-              <a:rPr b="1" lang="it">
+              <a:rPr lang="it" b="1">
                 <a:solidFill>
                   <a:schemeClr val="dk2"/>
                 </a:solidFill>
@@ -10208,7 +10252,7 @@
             </a:endParaRPr>
           </a:p>
           <a:p>
-            <a:pPr indent="-317500" lvl="0" marL="457200" rtl="0" algn="l">
+            <a:pPr marL="457200" lvl="0" indent="-317500" algn="l" rtl="0">
               <a:spcBef>
                 <a:spcPts val="0"/>
               </a:spcBef>
@@ -10223,7 +10267,7 @@
               <a:buChar char="●"/>
             </a:pPr>
             <a:r>
-              <a:rPr b="1" lang="it">
+              <a:rPr lang="it" b="1">
                 <a:solidFill>
                   <a:schemeClr val="dk2"/>
                 </a:solidFill>
@@ -10257,7 +10301,7 @@
             </a:endParaRPr>
           </a:p>
           <a:p>
-            <a:pPr indent="-317500" lvl="0" marL="457200" rtl="0" algn="l">
+            <a:pPr marL="457200" lvl="0" indent="-317500" algn="l" rtl="0">
               <a:spcBef>
                 <a:spcPts val="0"/>
               </a:spcBef>
@@ -10272,7 +10316,7 @@
               <a:buChar char="●"/>
             </a:pPr>
             <a:r>
-              <a:rPr b="1" lang="it">
+              <a:rPr lang="it" b="1">
                 <a:solidFill>
                   <a:schemeClr val="dk2"/>
                 </a:solidFill>
@@ -10306,7 +10350,7 @@
             </a:endParaRPr>
           </a:p>
           <a:p>
-            <a:pPr indent="-317500" lvl="0" marL="457200" rtl="0" algn="l">
+            <a:pPr marL="457200" lvl="0" indent="-317500" algn="l" rtl="0">
               <a:spcBef>
                 <a:spcPts val="0"/>
               </a:spcBef>
@@ -10321,7 +10365,7 @@
               <a:buChar char="●"/>
             </a:pPr>
             <a:r>
-              <a:rPr b="1" lang="it">
+              <a:rPr lang="it" b="1">
                 <a:solidFill>
                   <a:schemeClr val="dk2"/>
                 </a:solidFill>
@@ -10355,7 +10399,7 @@
             </a:endParaRPr>
           </a:p>
           <a:p>
-            <a:pPr indent="-317500" lvl="0" marL="457200" rtl="0" algn="l">
+            <a:pPr marL="457200" lvl="0" indent="-317500" algn="l" rtl="0">
               <a:spcBef>
                 <a:spcPts val="0"/>
               </a:spcBef>
@@ -10370,7 +10414,7 @@
               <a:buChar char="●"/>
             </a:pPr>
             <a:r>
-              <a:rPr b="1" lang="it">
+              <a:rPr lang="it" b="1">
                 <a:solidFill>
                   <a:schemeClr val="dk2"/>
                 </a:solidFill>
@@ -10425,12 +10469,12 @@
           </a:ln>
         </p:spPr>
         <p:txBody>
-          <a:bodyPr anchorCtr="0" anchor="t" bIns="91425" lIns="91425" spcFirstLastPara="1" rIns="91425" wrap="square" tIns="91425">
+          <a:bodyPr spcFirstLastPara="1" wrap="square" lIns="91425" tIns="91425" rIns="91425" bIns="91425" anchor="t" anchorCtr="0">
             <a:spAutoFit/>
           </a:bodyPr>
           <a:lstStyle/>
           <a:p>
-            <a:pPr indent="0" lvl="0" marL="0" rtl="0" algn="l">
+            <a:pPr marL="0" lvl="0" indent="0" algn="l" rtl="0">
               <a:spcBef>
                 <a:spcPts val="0"/>
               </a:spcBef>
@@ -10440,7 +10484,7 @@
               <a:buNone/>
             </a:pPr>
             <a:r>
-              <a:rPr b="1" lang="it" sz="1500">
+              <a:rPr lang="it" sz="1500" b="1">
                 <a:solidFill>
                   <a:schemeClr val="dk1"/>
                 </a:solidFill>
@@ -10451,7 +10495,7 @@
               </a:rPr>
               <a:t>“QR Code”:</a:t>
             </a:r>
-            <a:endParaRPr b="1" sz="1500">
+            <a:endParaRPr sz="1500" b="1">
               <a:solidFill>
                 <a:schemeClr val="dk1"/>
               </a:solidFill>
@@ -10462,7 +10506,7 @@
             </a:endParaRPr>
           </a:p>
           <a:p>
-            <a:pPr indent="-317500" lvl="0" marL="457200" rtl="0" algn="l">
+            <a:pPr marL="457200" lvl="0" indent="-317500" algn="l" rtl="0">
               <a:spcBef>
                 <a:spcPts val="0"/>
               </a:spcBef>
@@ -10477,7 +10521,7 @@
               <a:buChar char="●"/>
             </a:pPr>
             <a:r>
-              <a:rPr b="1" lang="it">
+              <a:rPr lang="it" b="1">
                 <a:solidFill>
                   <a:schemeClr val="dk2"/>
                 </a:solidFill>
@@ -10486,10 +10530,10 @@
                 <a:cs typeface="Lato"/>
                 <a:sym typeface="Lato"/>
               </a:rPr>
-              <a:t>qrcode</a:t>
+              <a:t>qrcode: </a:t>
             </a:r>
             <a:r>
-              <a:rPr b="1" lang="it">
+              <a:rPr lang="it">
                 <a:solidFill>
                   <a:schemeClr val="dk2"/>
                 </a:solidFill>
@@ -10498,31 +10542,7 @@
                 <a:cs typeface="Lato"/>
                 <a:sym typeface="Lato"/>
               </a:rPr>
-              <a:t>: </a:t>
-            </a:r>
-            <a:r>
-              <a:rPr lang="it">
-                <a:solidFill>
-                  <a:schemeClr val="dk2"/>
-                </a:solidFill>
-                <a:latin typeface="Lato"/>
-                <a:ea typeface="Lato"/>
-                <a:cs typeface="Lato"/>
-                <a:sym typeface="Lato"/>
-              </a:rPr>
-              <a:t>generazione QR Code</a:t>
-            </a:r>
-            <a:r>
-              <a:rPr lang="it">
-                <a:solidFill>
-                  <a:schemeClr val="dk2"/>
-                </a:solidFill>
-                <a:latin typeface="Lato"/>
-                <a:ea typeface="Lato"/>
-                <a:cs typeface="Lato"/>
-                <a:sym typeface="Lato"/>
-              </a:rPr>
-              <a:t>.</a:t>
+              <a:t>generazione QR Code.</a:t>
             </a:r>
             <a:endParaRPr>
               <a:solidFill>
@@ -10535,7 +10555,7 @@
             </a:endParaRPr>
           </a:p>
           <a:p>
-            <a:pPr indent="-317500" lvl="0" marL="457200" rtl="0" algn="l">
+            <a:pPr marL="457200" lvl="0" indent="-317500" algn="l" rtl="0">
               <a:spcBef>
                 <a:spcPts val="0"/>
               </a:spcBef>
@@ -10550,7 +10570,7 @@
               <a:buChar char="●"/>
             </a:pPr>
             <a:r>
-              <a:rPr b="1" lang="it">
+              <a:rPr lang="it" b="1">
                 <a:solidFill>
                   <a:schemeClr val="dk2"/>
                 </a:solidFill>
@@ -10605,12 +10625,12 @@
           </a:ln>
         </p:spPr>
         <p:txBody>
-          <a:bodyPr anchorCtr="0" anchor="t" bIns="91425" lIns="91425" spcFirstLastPara="1" rIns="91425" wrap="square" tIns="91425">
+          <a:bodyPr spcFirstLastPara="1" wrap="square" lIns="91425" tIns="91425" rIns="91425" bIns="91425" anchor="t" anchorCtr="0">
             <a:spAutoFit/>
           </a:bodyPr>
           <a:lstStyle/>
           <a:p>
-            <a:pPr indent="0" lvl="0" marL="0" rtl="0" algn="l">
+            <a:pPr marL="0" lvl="0" indent="0" algn="l" rtl="0">
               <a:spcBef>
                 <a:spcPts val="0"/>
               </a:spcBef>
@@ -10620,7 +10640,7 @@
               <a:buNone/>
             </a:pPr>
             <a:r>
-              <a:rPr b="1" lang="it" sz="1500">
+              <a:rPr lang="it" sz="1500" b="1">
                 <a:solidFill>
                   <a:schemeClr val="dk1"/>
                 </a:solidFill>
@@ -10631,7 +10651,7 @@
               </a:rPr>
               <a:t>“Condivisione del codice”:</a:t>
             </a:r>
-            <a:endParaRPr b="1" sz="1500">
+            <a:endParaRPr sz="1500" b="1">
               <a:solidFill>
                 <a:schemeClr val="dk1"/>
               </a:solidFill>
@@ -10642,7 +10662,7 @@
             </a:endParaRPr>
           </a:p>
           <a:p>
-            <a:pPr indent="-317500" lvl="0" marL="457200" rtl="0" algn="l">
+            <a:pPr marL="457200" lvl="0" indent="-317500" algn="l" rtl="0">
               <a:spcBef>
                 <a:spcPts val="0"/>
               </a:spcBef>
@@ -10657,7 +10677,7 @@
               <a:buChar char="●"/>
             </a:pPr>
             <a:r>
-              <a:rPr b="1" lang="it">
+              <a:rPr lang="it" b="1">
                 <a:solidFill>
                   <a:schemeClr val="dk2"/>
                 </a:solidFill>
@@ -10841,11 +10861,11 @@
 </file>
 
 <file path=ppt/slides/slide7.xml><?xml version="1.0" encoding="utf-8"?>
-<p:sld xmlns:a="http://schemas.openxmlformats.org/drawingml/2006/main" xmlns:r="http://schemas.openxmlformats.org/officeDocument/2006/relationships" xmlns:mc="http://schemas.openxmlformats.org/markup-compatibility/2006" xmlns:mv="urn:schemas-microsoft-com:mac:vml" xmlns:p="http://schemas.openxmlformats.org/presentationml/2006/main" xmlns:c="http://schemas.openxmlformats.org/drawingml/2006/chart" xmlns:dgm="http://schemas.openxmlformats.org/drawingml/2006/diagram" xmlns:o="urn:schemas-microsoft-com:office:office" xmlns:v="urn:schemas-microsoft-com:vml" xmlns:pvml="urn:schemas-microsoft-com:office:powerpoint" xmlns:com="http://schemas.openxmlformats.org/drawingml/2006/compatibility" xmlns:p14="http://schemas.microsoft.com/office/powerpoint/2010/main" xmlns:p15="http://schemas.microsoft.com/office/powerpoint/2012/main" xmlns:ahyp="http://schemas.microsoft.com/office/drawing/2018/hyperlinkcolor">
+<p:sld xmlns:a="http://schemas.openxmlformats.org/drawingml/2006/main" xmlns:r="http://schemas.openxmlformats.org/officeDocument/2006/relationships" xmlns:p="http://schemas.openxmlformats.org/presentationml/2006/main">
   <p:cSld>
     <p:spTree>
       <p:nvGrpSpPr>
-        <p:cNvPr id="131" name="Shape 131"/>
+        <p:cNvPr id="1" name="Shape 131"/>
         <p:cNvGrpSpPr/>
         <p:nvPr/>
       </p:nvGrpSpPr>
@@ -10894,11 +10914,11 @@
 </file>
 
 <file path=ppt/slides/slide8.xml><?xml version="1.0" encoding="utf-8"?>
-<p:sld xmlns:a="http://schemas.openxmlformats.org/drawingml/2006/main" xmlns:r="http://schemas.openxmlformats.org/officeDocument/2006/relationships" xmlns:mc="http://schemas.openxmlformats.org/markup-compatibility/2006" xmlns:mv="urn:schemas-microsoft-com:mac:vml" xmlns:p="http://schemas.openxmlformats.org/presentationml/2006/main" xmlns:c="http://schemas.openxmlformats.org/drawingml/2006/chart" xmlns:dgm="http://schemas.openxmlformats.org/drawingml/2006/diagram" xmlns:o="urn:schemas-microsoft-com:office:office" xmlns:v="urn:schemas-microsoft-com:vml" xmlns:pvml="urn:schemas-microsoft-com:office:powerpoint" xmlns:com="http://schemas.openxmlformats.org/drawingml/2006/compatibility" xmlns:p14="http://schemas.microsoft.com/office/powerpoint/2010/main" xmlns:p15="http://schemas.microsoft.com/office/powerpoint/2012/main" xmlns:ahyp="http://schemas.microsoft.com/office/drawing/2018/hyperlinkcolor">
+<p:sld xmlns:a="http://schemas.openxmlformats.org/drawingml/2006/main" xmlns:r="http://schemas.openxmlformats.org/officeDocument/2006/relationships" xmlns:p="http://schemas.openxmlformats.org/presentationml/2006/main">
   <p:cSld>
     <p:spTree>
       <p:nvGrpSpPr>
-        <p:cNvPr id="136" name="Shape 136"/>
+        <p:cNvPr id="1" name="Shape 136"/>
         <p:cNvGrpSpPr/>
         <p:nvPr/>
       </p:nvGrpSpPr>
@@ -10958,12 +10978,12 @@
           </a:ln>
         </p:spPr>
         <p:txBody>
-          <a:bodyPr anchorCtr="0" anchor="t" bIns="91425" lIns="91425" spcFirstLastPara="1" rIns="91425" wrap="square" tIns="91425">
+          <a:bodyPr spcFirstLastPara="1" wrap="square" lIns="91425" tIns="91425" rIns="91425" bIns="91425" anchor="t" anchorCtr="0">
             <a:noAutofit/>
           </a:bodyPr>
           <a:lstStyle/>
           <a:p>
-            <a:pPr indent="0" lvl="0" marL="0" rtl="0" algn="l">
+            <a:pPr marL="0" lvl="0" indent="0" algn="l" rtl="0">
               <a:spcBef>
                 <a:spcPts val="0"/>
               </a:spcBef>
@@ -10973,7 +10993,7 @@
               <a:buNone/>
             </a:pPr>
             <a:r>
-              <a:rPr b="1" lang="it" sz="2000">
+              <a:rPr lang="it" sz="2000" b="1">
                 <a:solidFill>
                   <a:schemeClr val="dk1"/>
                 </a:solidFill>
@@ -10984,7 +11004,7 @@
               </a:rPr>
               <a:t>Biglietto che viene inviato via mail all’acquirente:</a:t>
             </a:r>
-            <a:endParaRPr b="1" sz="2000">
+            <a:endParaRPr sz="2000" b="1">
               <a:solidFill>
                 <a:schemeClr val="dk1"/>
               </a:solidFill>
@@ -10995,7 +11015,7 @@
             </a:endParaRPr>
           </a:p>
           <a:p>
-            <a:pPr indent="0" lvl="0" marL="0" rtl="0" algn="l">
+            <a:pPr marL="0" lvl="0" indent="0" algn="l" rtl="0">
               <a:spcBef>
                 <a:spcPts val="0"/>
               </a:spcBef>
@@ -11004,9 +11024,6 @@
               </a:spcAft>
               <a:buNone/>
             </a:pPr>
-            <a:r>
-              <a:t/>
-            </a:r>
             <a:endParaRPr sz="1600">
               <a:solidFill>
                 <a:schemeClr val="dk2"/>
@@ -11018,7 +11035,7 @@
             </a:endParaRPr>
           </a:p>
           <a:p>
-            <a:pPr indent="0" lvl="0" marL="0" rtl="0" algn="l">
+            <a:pPr marL="0" lvl="0" indent="0" algn="l" rtl="0">
               <a:spcBef>
                 <a:spcPts val="0"/>
               </a:spcBef>
@@ -11050,7 +11067,7 @@
             </a:endParaRPr>
           </a:p>
           <a:p>
-            <a:pPr indent="0" lvl="0" marL="0" rtl="0" algn="l">
+            <a:pPr marL="0" lvl="0" indent="0" algn="l" rtl="0">
               <a:spcBef>
                 <a:spcPts val="0"/>
               </a:spcBef>
@@ -11092,11 +11109,11 @@
 </file>
 
 <file path=ppt/slides/slide9.xml><?xml version="1.0" encoding="utf-8"?>
-<p:sld xmlns:a="http://schemas.openxmlformats.org/drawingml/2006/main" xmlns:r="http://schemas.openxmlformats.org/officeDocument/2006/relationships" xmlns:mc="http://schemas.openxmlformats.org/markup-compatibility/2006" xmlns:mv="urn:schemas-microsoft-com:mac:vml" xmlns:p="http://schemas.openxmlformats.org/presentationml/2006/main" xmlns:c="http://schemas.openxmlformats.org/drawingml/2006/chart" xmlns:dgm="http://schemas.openxmlformats.org/drawingml/2006/diagram" xmlns:o="urn:schemas-microsoft-com:office:office" xmlns:v="urn:schemas-microsoft-com:vml" xmlns:pvml="urn:schemas-microsoft-com:office:powerpoint" xmlns:com="http://schemas.openxmlformats.org/drawingml/2006/compatibility" xmlns:p14="http://schemas.microsoft.com/office/powerpoint/2010/main" xmlns:p15="http://schemas.microsoft.com/office/powerpoint/2012/main" xmlns:ahyp="http://schemas.microsoft.com/office/drawing/2018/hyperlinkcolor">
+<p:sld xmlns:a="http://schemas.openxmlformats.org/drawingml/2006/main" xmlns:r="http://schemas.openxmlformats.org/officeDocument/2006/relationships" xmlns:p="http://schemas.openxmlformats.org/presentationml/2006/main">
   <p:cSld>
     <p:spTree>
       <p:nvGrpSpPr>
-        <p:cNvPr id="142" name="Shape 142"/>
+        <p:cNvPr id="1" name="Shape 142"/>
         <p:cNvGrpSpPr/>
         <p:nvPr/>
       </p:nvGrpSpPr>
@@ -11156,12 +11173,12 @@
           </a:ln>
         </p:spPr>
         <p:txBody>
-          <a:bodyPr anchorCtr="0" anchor="t" bIns="91425" lIns="91425" spcFirstLastPara="1" rIns="91425" wrap="square" tIns="91425">
+          <a:bodyPr spcFirstLastPara="1" wrap="square" lIns="91425" tIns="91425" rIns="91425" bIns="91425" anchor="t" anchorCtr="0">
             <a:noAutofit/>
           </a:bodyPr>
           <a:lstStyle/>
           <a:p>
-            <a:pPr indent="0" lvl="0" marL="0" rtl="0" algn="l">
+            <a:pPr marL="0" lvl="0" indent="0" algn="l" rtl="0">
               <a:spcBef>
                 <a:spcPts val="0"/>
               </a:spcBef>
@@ -11171,7 +11188,7 @@
               <a:buNone/>
             </a:pPr>
             <a:r>
-              <a:rPr b="1" lang="it" sz="2000">
+              <a:rPr lang="it" sz="2000" b="1">
                 <a:solidFill>
                   <a:schemeClr val="dk1"/>
                 </a:solidFill>
@@ -11182,7 +11199,7 @@
               </a:rPr>
               <a:t>Mail per il reset della password:</a:t>
             </a:r>
-            <a:endParaRPr b="1" sz="2000">
+            <a:endParaRPr sz="2000" b="1">
               <a:solidFill>
                 <a:schemeClr val="dk1"/>
               </a:solidFill>
@@ -11193,7 +11210,7 @@
             </a:endParaRPr>
           </a:p>
           <a:p>
-            <a:pPr indent="0" lvl="0" marL="0" rtl="0" algn="l">
+            <a:pPr marL="0" lvl="0" indent="0" algn="l" rtl="0">
               <a:spcBef>
                 <a:spcPts val="0"/>
               </a:spcBef>
@@ -11202,9 +11219,6 @@
               </a:spcAft>
               <a:buNone/>
             </a:pPr>
-            <a:r>
-              <a:t/>
-            </a:r>
             <a:endParaRPr sz="1600">
               <a:solidFill>
                 <a:schemeClr val="dk2"/>
@@ -11216,7 +11230,7 @@
             </a:endParaRPr>
           </a:p>
           <a:p>
-            <a:pPr indent="0" lvl="0" marL="0" rtl="0" algn="l">
+            <a:pPr marL="0" lvl="0" indent="0" algn="l" rtl="0">
               <a:spcBef>
                 <a:spcPts val="0"/>
               </a:spcBef>
@@ -11258,7 +11272,7 @@
 </file>
 
 <file path=ppt/theme/theme1.xml><?xml version="1.0" encoding="utf-8"?>
-<a:theme xmlns:a="http://schemas.openxmlformats.org/drawingml/2006/main" xmlns:r="http://schemas.openxmlformats.org/officeDocument/2006/relationships" name="Swiss">
+<a:theme xmlns:a="http://schemas.openxmlformats.org/drawingml/2006/main" name="Swiss">
   <a:themeElements>
     <a:clrScheme name="Swiss">
       <a:dk1>
@@ -11533,11 +11547,13 @@
       </a:bgFillStyleLst>
     </a:fmtScheme>
   </a:themeElements>
+  <a:objectDefaults/>
+  <a:extraClrSchemeLst/>
 </a:theme>
 </file>
 
 <file path=ppt/theme/theme2.xml><?xml version="1.0" encoding="utf-8"?>
-<a:theme xmlns:a="http://schemas.openxmlformats.org/drawingml/2006/main" xmlns:r="http://schemas.openxmlformats.org/officeDocument/2006/relationships">
+<a:theme xmlns:a="http://schemas.openxmlformats.org/drawingml/2006/main">
   <a:themeElements>
     <a:clrScheme name="Default">
       <a:dk1>
@@ -11812,5 +11828,7 @@
       </a:bgFillStyleLst>
     </a:fmtScheme>
   </a:themeElements>
+  <a:objectDefaults/>
+  <a:extraClrSchemeLst/>
 </a:theme>
 </file>
--- a/Presentazione_progetto_TI.pptx
+++ b/Presentazione_progetto_TI.pptx
@@ -1379,7 +1379,7 @@
         </p:nvSpPr>
         <p:spPr>
           <a:xfrm>
-            <a:off x="381300" y="685800"/>
+            <a:off x="381000" y="685800"/>
             <a:ext cx="6096000" cy="3429000"/>
           </a:xfrm>
           <a:custGeom>
@@ -9585,10 +9585,10 @@
               <a:buNone/>
             </a:pPr>
             <a:r>
-              <a:rPr lang="it"/>
+              <a:rPr lang="it" dirty="0"/>
               <a:t>TECNOLOGIE, FRAMEWORK E STRUMENTI DI SVILUPPO UTILIZZATI:</a:t>
             </a:r>
-            <a:endParaRPr/>
+            <a:endParaRPr dirty="0"/>
           </a:p>
         </p:txBody>
       </p:sp>
@@ -9829,7 +9829,7 @@
               <a:buNone/>
             </a:pPr>
             <a:r>
-              <a:rPr lang="it" sz="1500" b="1">
+              <a:rPr lang="it" sz="1500" b="1" dirty="0">
                 <a:solidFill>
                   <a:schemeClr val="dk1"/>
                 </a:solidFill>
@@ -9840,7 +9840,7 @@
               </a:rPr>
               <a:t>“Backend”:</a:t>
             </a:r>
-            <a:endParaRPr sz="1500" b="1">
+            <a:endParaRPr sz="1500" b="1" dirty="0">
               <a:solidFill>
                 <a:schemeClr val="dk1"/>
               </a:solidFill>
@@ -9866,7 +9866,7 @@
               <a:buChar char="●"/>
             </a:pPr>
             <a:r>
-              <a:rPr lang="it" b="1">
+              <a:rPr lang="it" b="1" dirty="0">
                 <a:solidFill>
                   <a:schemeClr val="dk2"/>
                 </a:solidFill>
@@ -9878,7 +9878,7 @@
               <a:t>Node.js:</a:t>
             </a:r>
             <a:r>
-              <a:rPr lang="it">
+              <a:rPr lang="it" dirty="0">
                 <a:solidFill>
                   <a:schemeClr val="dk2"/>
                 </a:solidFill>
@@ -9889,7 +9889,7 @@
               </a:rPr>
               <a:t> runtime javascript.</a:t>
             </a:r>
-            <a:endParaRPr>
+            <a:endParaRPr dirty="0">
               <a:solidFill>
                 <a:schemeClr val="dk2"/>
               </a:solidFill>
@@ -9915,7 +9915,7 @@
               <a:buChar char="●"/>
             </a:pPr>
             <a:r>
-              <a:rPr lang="it" b="1">
+              <a:rPr lang="it" b="1" dirty="0">
                 <a:solidFill>
                   <a:schemeClr val="dk2"/>
                 </a:solidFill>
@@ -9927,7 +9927,7 @@
               <a:t>Express.js:</a:t>
             </a:r>
             <a:r>
-              <a:rPr lang="it">
+              <a:rPr lang="it" dirty="0">
                 <a:solidFill>
                   <a:schemeClr val="dk2"/>
                 </a:solidFill>
@@ -9936,9 +9936,9 @@
                 <a:cs typeface="Lato"/>
                 <a:sym typeface="Lato"/>
               </a:rPr>
-              <a:t> reb framework.</a:t>
+              <a:t> web framework.</a:t>
             </a:r>
-            <a:endParaRPr>
+            <a:endParaRPr dirty="0">
               <a:solidFill>
                 <a:schemeClr val="dk2"/>
               </a:solidFill>
@@ -9964,7 +9964,7 @@
               <a:buChar char="●"/>
             </a:pPr>
             <a:r>
-              <a:rPr lang="it" b="1">
+              <a:rPr lang="it" b="1" dirty="0">
                 <a:solidFill>
                   <a:schemeClr val="dk2"/>
                 </a:solidFill>
@@ -9976,7 +9976,7 @@
               <a:t>Es Modules: </a:t>
             </a:r>
             <a:r>
-              <a:rPr lang="it">
+              <a:rPr lang="it" dirty="0">
                 <a:solidFill>
                   <a:schemeClr val="dk2"/>
                 </a:solidFill>
@@ -9987,7 +9987,7 @@
               </a:rPr>
               <a:t>sistema di moduli.</a:t>
             </a:r>
-            <a:endParaRPr>
+            <a:endParaRPr dirty="0">
               <a:solidFill>
                 <a:schemeClr val="dk2"/>
               </a:solidFill>
@@ -10013,7 +10013,7 @@
               <a:buChar char="●"/>
             </a:pPr>
             <a:r>
-              <a:rPr lang="it" b="1">
+              <a:rPr lang="it" b="1" dirty="0">
                 <a:solidFill>
                   <a:schemeClr val="dk2"/>
                 </a:solidFill>
@@ -10025,7 +10025,7 @@
               <a:t>Autenticazione: </a:t>
             </a:r>
             <a:r>
-              <a:rPr lang="it">
+              <a:rPr lang="it" dirty="0">
                 <a:solidFill>
                   <a:schemeClr val="dk2"/>
                 </a:solidFill>
@@ -10036,7 +10036,7 @@
               </a:rPr>
               <a:t>JWT, bcryptjs e crypto.</a:t>
             </a:r>
-            <a:endParaRPr>
+            <a:endParaRPr dirty="0">
               <a:solidFill>
                 <a:schemeClr val="dk2"/>
               </a:solidFill>
@@ -10062,7 +10062,7 @@
               <a:buChar char="●"/>
             </a:pPr>
             <a:r>
-              <a:rPr lang="it" b="1">
+              <a:rPr lang="it" b="1" dirty="0">
                 <a:solidFill>
                   <a:schemeClr val="dk2"/>
                 </a:solidFill>
@@ -10074,7 +10074,7 @@
               <a:t>Email:</a:t>
             </a:r>
             <a:r>
-              <a:rPr lang="it">
+              <a:rPr lang="it" dirty="0">
                 <a:solidFill>
                   <a:schemeClr val="dk2"/>
                 </a:solidFill>
@@ -10085,7 +10085,7 @@
               </a:rPr>
               <a:t> nodemailer e gmail SMTP.</a:t>
             </a:r>
-            <a:endParaRPr>
+            <a:endParaRPr dirty="0">
               <a:solidFill>
                 <a:schemeClr val="dk2"/>
               </a:solidFill>
@@ -10111,7 +10111,7 @@
               <a:buChar char="●"/>
             </a:pPr>
             <a:r>
-              <a:rPr lang="it" b="1">
+              <a:rPr lang="it" b="1" dirty="0">
                 <a:solidFill>
                   <a:schemeClr val="dk2"/>
                 </a:solidFill>
@@ -10123,7 +10123,7 @@
               <a:t>Database:</a:t>
             </a:r>
             <a:r>
-              <a:rPr lang="it">
+              <a:rPr lang="it" dirty="0">
                 <a:solidFill>
                   <a:schemeClr val="dk2"/>
                 </a:solidFill>
@@ -10134,7 +10134,7 @@
               </a:rPr>
               <a:t> MariaDB</a:t>
             </a:r>
-            <a:endParaRPr>
+            <a:endParaRPr dirty="0">
               <a:solidFill>
                 <a:schemeClr val="dk2"/>
               </a:solidFill>
